--- a/1학기/웹 프로그래밍/2026_웹 프로그래밍_part3.pptx
+++ b/1학기/웹 프로그래밍/2026_웹 프로그래밍_part3.pptx
@@ -1,51 +1,51 @@
 
 <file path=ppt/presentation.xml><?xml version="1.0" encoding="utf-8"?>
-<p:presentation xmlns:a="http://schemas.openxmlformats.org/drawingml/2006/main" xmlns:r="http://schemas.openxmlformats.org/officeDocument/2006/relationships" xmlns:p="http://schemas.openxmlformats.org/presentationml/2006/main" saveSubsetFonts="1">
+<p:presentation xmlns:a="http://schemas.openxmlformats.org/drawingml/2006/main" xmlns:r="http://schemas.openxmlformats.org/officeDocument/2006/relationships" xmlns:p="http://schemas.openxmlformats.org/presentationml/2006/main" xmlns:p14="http://schemas.microsoft.com/office/powerpoint/2010/main" saveSubsetFonts="1">
   <p:sldMasterIdLst>
-    <p:sldMasterId id="2147483660" r:id="rId1"/>
+    <p:sldMasterId id="2147483665" r:id="rId5"/>
   </p:sldMasterIdLst>
   <p:notesMasterIdLst>
-    <p:notesMasterId r:id="rId38"/>
+    <p:notesMasterId r:id="rId7"/>
   </p:notesMasterIdLst>
   <p:sldIdLst>
-    <p:sldId id="256" r:id="rId2"/>
-    <p:sldId id="422" r:id="rId3"/>
-    <p:sldId id="423" r:id="rId4"/>
-    <p:sldId id="424" r:id="rId5"/>
-    <p:sldId id="425" r:id="rId6"/>
-    <p:sldId id="426" r:id="rId7"/>
-    <p:sldId id="427" r:id="rId8"/>
-    <p:sldId id="428" r:id="rId9"/>
-    <p:sldId id="429" r:id="rId10"/>
-    <p:sldId id="430" r:id="rId11"/>
-    <p:sldId id="431" r:id="rId12"/>
-    <p:sldId id="432" r:id="rId13"/>
-    <p:sldId id="433" r:id="rId14"/>
-    <p:sldId id="434" r:id="rId15"/>
-    <p:sldId id="435" r:id="rId16"/>
-    <p:sldId id="436" r:id="rId17"/>
-    <p:sldId id="437" r:id="rId18"/>
-    <p:sldId id="438" r:id="rId19"/>
-    <p:sldId id="439" r:id="rId20"/>
-    <p:sldId id="440" r:id="rId21"/>
-    <p:sldId id="441" r:id="rId22"/>
-    <p:sldId id="442" r:id="rId23"/>
-    <p:sldId id="443" r:id="rId24"/>
-    <p:sldId id="444" r:id="rId25"/>
-    <p:sldId id="445" r:id="rId26"/>
-    <p:sldId id="448" r:id="rId27"/>
-    <p:sldId id="449" r:id="rId28"/>
-    <p:sldId id="450" r:id="rId29"/>
-    <p:sldId id="451" r:id="rId30"/>
-    <p:sldId id="452" r:id="rId31"/>
-    <p:sldId id="453" r:id="rId32"/>
-    <p:sldId id="454" r:id="rId33"/>
-    <p:sldId id="446" r:id="rId34"/>
-    <p:sldId id="447" r:id="rId35"/>
-    <p:sldId id="455" r:id="rId36"/>
-    <p:sldId id="457" r:id="rId37"/>
+    <p:sldId id="256" r:id="rId9"/>
+    <p:sldId id="422" r:id="rId10"/>
+    <p:sldId id="423" r:id="rId11"/>
+    <p:sldId id="424" r:id="rId12"/>
+    <p:sldId id="425" r:id="rId13"/>
+    <p:sldId id="426" r:id="rId14"/>
+    <p:sldId id="427" r:id="rId15"/>
+    <p:sldId id="428" r:id="rId16"/>
+    <p:sldId id="429" r:id="rId17"/>
+    <p:sldId id="430" r:id="rId18"/>
+    <p:sldId id="431" r:id="rId19"/>
+    <p:sldId id="432" r:id="rId20"/>
+    <p:sldId id="433" r:id="rId21"/>
+    <p:sldId id="434" r:id="rId22"/>
+    <p:sldId id="435" r:id="rId23"/>
+    <p:sldId id="436" r:id="rId25"/>
+    <p:sldId id="437" r:id="rId26"/>
+    <p:sldId id="438" r:id="rId27"/>
+    <p:sldId id="439" r:id="rId28"/>
+    <p:sldId id="440" r:id="rId29"/>
+    <p:sldId id="441" r:id="rId30"/>
+    <p:sldId id="442" r:id="rId31"/>
+    <p:sldId id="443" r:id="rId32"/>
+    <p:sldId id="444" r:id="rId33"/>
+    <p:sldId id="445" r:id="rId34"/>
+    <p:sldId id="448" r:id="rId35"/>
+    <p:sldId id="449" r:id="rId36"/>
+    <p:sldId id="450" r:id="rId37"/>
+    <p:sldId id="451" r:id="rId38"/>
+    <p:sldId id="452" r:id="rId39"/>
+    <p:sldId id="453" r:id="rId40"/>
+    <p:sldId id="454" r:id="rId41"/>
+    <p:sldId id="446" r:id="rId42"/>
+    <p:sldId id="447" r:id="rId43"/>
+    <p:sldId id="455" r:id="rId44"/>
+    <p:sldId id="457" r:id="rId45"/>
   </p:sldIdLst>
-  <p:sldSz cx="9144000" cy="6858000" type="screen4x3"/>
+  <p:sldSz cx="9144000" cy="6858000"/>
   <p:notesSz cx="6858000" cy="9144000"/>
   <p:defaultTextStyle>
     <a:defPPr>
@@ -145,12 +145,12 @@
   <p:extLst>
     <p:ext uri="{EFAFB233-063F-42B5-8137-9DF3F51BA10A}">
       <p15:sldGuideLst xmlns:p15="http://schemas.microsoft.com/office/powerpoint/2012/main">
-        <p15:guide id="1" orient="horz" pos="2160">
+        <p15:guide id="1" orient="horz" pos="2159" userDrawn="0">
           <p15:clr>
             <a:srgbClr val="A4A3A4"/>
           </p15:clr>
         </p15:guide>
-        <p15:guide id="2" pos="2880">
+        <p15:guide id="2" pos="2879" userDrawn="0">
           <p15:clr>
             <a:srgbClr val="A4A3A4"/>
           </p15:clr>
@@ -159,6 +159,188 @@
     </p:ext>
   </p:extLst>
 </p:presentation>
+</file>
+
+<file path=ppt/ink/ink1.xml><?xml version="1.0" encoding="utf-8"?>
+<inkml:ink xmlns:inkml="http://www.w3.org/2003/InkML">
+  <inkml:definitions>
+    <inkml:context xml:id="ctx0">
+      <inkml:inkSource xml:id="inkSrc0">
+        <inkml:traceFormat>
+          <inkml:channel name="X" type="integer" max="3200" units="cm"/>
+          <inkml:channel name="Y" type="integer" max="1080" units="cm"/>
+        </inkml:traceFormat>
+        <inkml:channelProperties>
+          <inkml:channelProperty channel="X" name="resolution" value="66.666656" units="1/cm"/>
+          <inkml:channelProperty channel="Y" name="resolution" value="40.000000" units="1/cm"/>
+        </inkml:channelProperties>
+      </inkml:inkSource>
+    </inkml:context>
+    <inkml:brush xml:id="br0">
+      <inkml:brushProperty name="width" value="0.035278" units="cm"/>
+      <inkml:brushProperty name="height" value="0.035278" units="cm"/>
+      <inkml:brushProperty name="color" value="#ff0000"/>
+      <inkml:brushProperty name="fitToCurve" value="1"/>
+    </inkml:brush>
+  </inkml:definitions>
+  <inkml:trace contextRef="#ctx0" brushRef="#br0">2151 0,'-52'105,"-248"319,-53 17,-106-53,-88 35,248-229,210-141,72-35,-1-1,1-17,34 18,18-18,124 0,282-53,194-18,-159 18,-35 36,-352 17,-1 0,-18 0,-52 0,0 0,-1 0,-17-18,-17 1,-36-36,-159-88,-176-89,141 71,0 1,-176-142,229 159,17 17,54 1,-71-54,141 125,-35-19,70 53,18 1,-18 17,18 17,0 36,0 159,124 370,158 318,-35-195,35-88,-211-422,-36-125,-35-35,0-17,0 0,0-36,18 18,-18-53,35-53,0-141,53-70,36-71,105-177,-105 301,-36 87,-35 89,-18 0,-17 70,-18 1,0-1,0 0,17 1,1-19,17-34,-17-54,70-34,-70 105,-1 17,1 1,-18 53,-18-1,18-17</inkml:trace>
+</inkml:ink>
+</file>
+
+<file path=ppt/ink/ink2.xml><?xml version="1.0" encoding="utf-8"?>
+<inkml:ink xmlns:inkml="http://www.w3.org/2003/InkML">
+  <inkml:definitions>
+    <inkml:context xml:id="ctx0">
+      <inkml:inkSource xml:id="inkSrc0">
+        <inkml:traceFormat>
+          <inkml:channel name="X" type="integer" max="3200" units="cm"/>
+          <inkml:channel name="Y" type="integer" max="1080" units="cm"/>
+        </inkml:traceFormat>
+        <inkml:channelProperties>
+          <inkml:channelProperty channel="X" name="resolution" value="66.666656" units="1/cm"/>
+          <inkml:channelProperty channel="Y" name="resolution" value="40.000000" units="1/cm"/>
+        </inkml:channelProperties>
+      </inkml:inkSource>
+    </inkml:context>
+    <inkml:brush xml:id="br0">
+      <inkml:brushProperty name="width" value="0.035278" units="cm"/>
+      <inkml:brushProperty name="height" value="0.035278" units="cm"/>
+      <inkml:brushProperty name="color" value="#ff0000"/>
+      <inkml:brushProperty name="fitToCurve" value="1"/>
+    </inkml:brush>
+  </inkml:definitions>
+  <inkml:trace contextRef="#ctx0" brushRef="#br0">0 0,'0'0</inkml:trace>
+</inkml:ink>
+</file>
+
+<file path=ppt/ink/ink3.xml><?xml version="1.0" encoding="utf-8"?>
+<inkml:ink xmlns:inkml="http://www.w3.org/2003/InkML">
+  <inkml:definitions>
+    <inkml:context xml:id="ctx0">
+      <inkml:inkSource xml:id="inkSrc0">
+        <inkml:traceFormat>
+          <inkml:channel name="X" type="integer" max="3200" units="cm"/>
+          <inkml:channel name="Y" type="integer" max="1080" units="cm"/>
+        </inkml:traceFormat>
+        <inkml:channelProperties>
+          <inkml:channelProperty channel="X" name="resolution" value="66.666656" units="1/cm"/>
+          <inkml:channelProperty channel="Y" name="resolution" value="40.000000" units="1/cm"/>
+        </inkml:channelProperties>
+      </inkml:inkSource>
+    </inkml:context>
+    <inkml:brush xml:id="br0">
+      <inkml:brushProperty name="width" value="0.035278" units="cm"/>
+      <inkml:brushProperty name="height" value="0.035278" units="cm"/>
+      <inkml:brushProperty name="color" value="#ff0000"/>
+      <inkml:brushProperty name="fitToCurve" value="1"/>
+    </inkml:brush>
+  </inkml:definitions>
+  <inkml:trace contextRef="#ctx0" brushRef="#br0">2434 0,'-71'105,"-70"89,-353 494,71-176,88-71,158-247,-52 123,17-34,1-1,175-229,-34 35,35-53,35 0,0-35</inkml:trace>
+</inkml:ink>
+</file>
+
+<file path=ppt/ink/ink4.xml><?xml version="1.0" encoding="utf-8"?>
+<inkml:ink xmlns:inkml="http://www.w3.org/2003/InkML">
+  <inkml:definitions>
+    <inkml:context xml:id="ctx0">
+      <inkml:inkSource xml:id="inkSrc0">
+        <inkml:traceFormat>
+          <inkml:channel name="X" type="integer" max="3200" units="cm"/>
+          <inkml:channel name="Y" type="integer" max="1080" units="cm"/>
+        </inkml:traceFormat>
+        <inkml:channelProperties>
+          <inkml:channelProperty channel="X" name="resolution" value="66.666656" units="1/cm"/>
+          <inkml:channelProperty channel="Y" name="resolution" value="40.000000" units="1/cm"/>
+        </inkml:channelProperties>
+      </inkml:inkSource>
+    </inkml:context>
+    <inkml:brush xml:id="br0">
+      <inkml:brushProperty name="width" value="0.035278" units="cm"/>
+      <inkml:brushProperty name="height" value="0.035278" units="cm"/>
+      <inkml:brushProperty name="color" value="#ff0000"/>
+      <inkml:brushProperty name="fitToCurve" value="1"/>
+    </inkml:brush>
+  </inkml:definitions>
+  <inkml:trace contextRef="#ctx0" brushRef="#br0">0 299,'176'-53,"247"-70,-123 52,-159 36,-17 18,-36 34,-71 36,19 53,-19 35,-34 53,-54 18,18-106,-70 105,-71-52,-53 17,159-140,70-19,-35-17,53 18,-18-18,18-18,18 1,106-1,70 0,-106 18,106 0,-106 18,53 17,-70-17,-36 17,-35 36,-53-1,-106 89,-52 17,-54-34,194-90,-123 1,89-35,-54-18,159 0</inkml:trace>
+</inkml:ink>
+</file>
+
+<file path=ppt/ink/ink5.xml><?xml version="1.0" encoding="utf-8"?>
+<inkml:ink xmlns:inkml="http://www.w3.org/2003/InkML">
+  <inkml:definitions>
+    <inkml:context xml:id="ctx0">
+      <inkml:inkSource xml:id="inkSrc0">
+        <inkml:traceFormat>
+          <inkml:channel name="X" type="integer" max="3200" units="cm"/>
+          <inkml:channel name="Y" type="integer" max="1080" units="cm"/>
+        </inkml:traceFormat>
+        <inkml:channelProperties>
+          <inkml:channelProperty channel="X" name="resolution" value="66.666656" units="1/cm"/>
+          <inkml:channelProperty channel="Y" name="resolution" value="40.000000" units="1/cm"/>
+        </inkml:channelProperties>
+      </inkml:inkSource>
+    </inkml:context>
+    <inkml:brush xml:id="br0">
+      <inkml:brushProperty name="width" value="0.035278" units="cm"/>
+      <inkml:brushProperty name="height" value="0.035278" units="cm"/>
+      <inkml:brushProperty name="color" value="#ff0000"/>
+      <inkml:brushProperty name="fitToCurve" value="1"/>
+    </inkml:brush>
+  </inkml:definitions>
+  <inkml:trace contextRef="#ctx0" brushRef="#br0">1411 0,'-18'70,"-176"300,-124 142,-140 246,193-264,159-353,71-105,18-1,17-35</inkml:trace>
+</inkml:ink>
+</file>
+
+<file path=ppt/ink/ink6.xml><?xml version="1.0" encoding="utf-8"?>
+<inkml:ink xmlns:inkml="http://www.w3.org/2003/InkML">
+  <inkml:definitions>
+    <inkml:context xml:id="ctx0">
+      <inkml:inkSource xml:id="inkSrc0">
+        <inkml:traceFormat>
+          <inkml:channel name="X" type="integer" max="3200" units="cm"/>
+          <inkml:channel name="Y" type="integer" max="1080" units="cm"/>
+        </inkml:traceFormat>
+        <inkml:channelProperties>
+          <inkml:channelProperty channel="X" name="resolution" value="66.666656" units="1/cm"/>
+          <inkml:channelProperty channel="Y" name="resolution" value="40.000000" units="1/cm"/>
+        </inkml:channelProperties>
+      </inkml:inkSource>
+    </inkml:context>
+    <inkml:brush xml:id="br0">
+      <inkml:brushProperty name="width" value="0.035278" units="cm"/>
+      <inkml:brushProperty name="height" value="0.035278" units="cm"/>
+      <inkml:brushProperty name="color" value="#ff0000"/>
+      <inkml:brushProperty name="fitToCurve" value="1"/>
+    </inkml:brush>
+  </inkml:definitions>
+  <inkml:trace contextRef="#ctx0" brushRef="#br0">158 0,'0'158,"0"266,-17-1,-19-159,-34 54,52-53,1-54,17-70,0-70,0-1,17-17,-17-17,18-19,-18-17</inkml:trace>
+</inkml:ink>
+</file>
+
+<file path=ppt/ink/ink7.xml><?xml version="1.0" encoding="utf-8"?>
+<inkml:ink xmlns:inkml="http://www.w3.org/2003/InkML">
+  <inkml:definitions>
+    <inkml:context xml:id="ctx0">
+      <inkml:inkSource xml:id="inkSrc0">
+        <inkml:traceFormat>
+          <inkml:channel name="X" type="integer" max="3200" units="cm"/>
+          <inkml:channel name="Y" type="integer" max="1080" units="cm"/>
+        </inkml:traceFormat>
+        <inkml:channelProperties>
+          <inkml:channelProperty channel="X" name="resolution" value="66.666656" units="1/cm"/>
+          <inkml:channelProperty channel="Y" name="resolution" value="40.000000" units="1/cm"/>
+        </inkml:channelProperties>
+      </inkml:inkSource>
+    </inkml:context>
+    <inkml:brush xml:id="br0">
+      <inkml:brushProperty name="width" value="0.035278" units="cm"/>
+      <inkml:brushProperty name="height" value="0.035278" units="cm"/>
+      <inkml:brushProperty name="color" value="#ff0000"/>
+      <inkml:brushProperty name="fitToCurve" value="1"/>
+    </inkml:brush>
+  </inkml:definitions>
+  <inkml:trace contextRef="#ctx0" brushRef="#br0">1075 194,'-88'-36,"-159"-70,-105 54,158 104,88 160,53 123,18-123,35-124,0-35,0-35,35-1,53-17,0 0,265-88,35-53,-229 70,70-34,-17-19,-142 71,36-35,-35 17,-54 71,19-52,-19 52,-17 17,-35 18,-36 54,-70 158,35-71,-123 530,141-336,35-158,35-71,18-71,-17-17,-1-18,-17 36,0 0,35-71</inkml:trace>
+</inkml:ink>
 </file>
 
 <file path=ppt/notesMasters/notesMaster1.xml><?xml version="1.0" encoding="utf-8"?>
@@ -510,7 +692,7 @@
 </p:notesMaster>
 </file>
 
-<file path=ppt/notesSlides/notesSlide1.xml><?xml version="1.0" encoding="utf-8"?>
+<file path=ppt/notesSlides/notesSlide15.xml><?xml version="1.0" encoding="utf-8"?>
 <p:notes xmlns:a="http://schemas.openxmlformats.org/drawingml/2006/main" xmlns:r="http://schemas.openxmlformats.org/officeDocument/2006/relationships" xmlns:p="http://schemas.openxmlformats.org/presentationml/2006/main">
   <p:cSld>
     <p:spTree>
@@ -6433,7 +6615,7 @@
 </file>
 
 <file path=ppt/slides/slide2.xml><?xml version="1.0" encoding="utf-8"?>
-<p:sld xmlns:a="http://schemas.openxmlformats.org/drawingml/2006/main" xmlns:r="http://schemas.openxmlformats.org/officeDocument/2006/relationships" xmlns:p="http://schemas.openxmlformats.org/presentationml/2006/main">
+<p:sld xmlns:a="http://schemas.openxmlformats.org/drawingml/2006/main" xmlns:r="http://schemas.openxmlformats.org/officeDocument/2006/relationships" xmlns:p="http://schemas.openxmlformats.org/presentationml/2006/main" xmlns:p14="http://schemas.microsoft.com/office/powerpoint/2010/main">
   <p:cSld>
     <p:spTree>
       <p:nvGrpSpPr>
@@ -6465,7 +6647,12 @@
             <p:ph type="title"/>
           </p:nvPr>
         </p:nvSpPr>
-        <p:spPr/>
+        <p:spPr>
+          <a:xfrm>
+            <a:off x="443230" y="146050"/>
+            <a:ext cx="7773035" cy="762635"/>
+          </a:xfrm>
+        </p:spPr>
         <p:txBody>
           <a:bodyPr/>
           <a:lstStyle/>
@@ -6494,7 +6681,12 @@
             <p:ph idx="1"/>
           </p:nvPr>
         </p:nvSpPr>
-        <p:spPr/>
+        <p:spPr>
+          <a:xfrm>
+            <a:off x="444500" y="1152525"/>
+            <a:ext cx="7773035" cy="5020310"/>
+          </a:xfrm>
+        </p:spPr>
         <p:txBody>
           <a:bodyPr>
             <a:normAutofit fontScale="47500" lnSpcReduction="20000"/>
@@ -6798,7 +6990,12 @@
             <p:ph type="sldNum" sz="quarter" idx="10"/>
           </p:nvPr>
         </p:nvSpPr>
-        <p:spPr/>
+        <p:spPr>
+          <a:xfrm>
+            <a:off x="7112000" y="6419850"/>
+            <a:ext cx="1905635" cy="305435"/>
+          </a:xfrm>
+        </p:spPr>
         <p:txBody>
           <a:bodyPr/>
           <a:lstStyle/>
@@ -6833,7 +7030,12 @@
             <p:ph type="ftr" sz="quarter" idx="11"/>
           </p:nvPr>
         </p:nvSpPr>
-        <p:spPr/>
+        <p:spPr>
+          <a:xfrm>
+            <a:off x="897255" y="6393180"/>
+            <a:ext cx="3110230" cy="349885"/>
+          </a:xfrm>
+        </p:spPr>
         <p:txBody>
           <a:bodyPr/>
           <a:lstStyle/>
@@ -6845,6 +7047,84 @@
           </a:p>
         </p:txBody>
       </p:sp>
+      <mc:AlternateContent xmlns:mc="http://schemas.openxmlformats.org/markup-compatibility/2006" xmlns:p14="http://schemas.microsoft.com/office/powerpoint/2010/main">
+        <mc:Choice Requires="p14">
+          <p:contentPart p14:bwMode="auto" r:id="rId1">
+            <p14:nvContentPartPr>
+              <p14:cNvPr id="6" name="잉크 1"/>
+              <p14:cNvContentPartPr/>
+              <p14:nvPr/>
+            </p14:nvContentPartPr>
+            <p14:xfrm>
+              <a:off x="5594350" y="495300"/>
+              <a:ext cx="901700" cy="1263650"/>
+            </p14:xfrm>
+          </p:contentPart>
+        </mc:Choice>
+        <mc:Fallback>
+          <p:pic>
+            <p:nvPicPr>
+              <p:cNvPr id="6" name="잉크 1"/>
+              <p:cNvPicPr/>
+              <p:nvPr/>
+            </p:nvPicPr>
+            <p:blipFill>
+              <a:blip r:embed="rId2"/>
+              <a:stretch>
+                <a:fillRect/>
+              </a:stretch>
+            </p:blipFill>
+            <p:spPr>
+              <a:xfrm>
+                <a:off x="5594350" y="495300"/>
+                <a:ext cx="901700" cy="1263650"/>
+              </a:xfrm>
+              <a:prstGeom prst="rect">
+                <a:avLst/>
+              </a:prstGeom>
+            </p:spPr>
+          </p:pic>
+        </mc:Fallback>
+      </mc:AlternateContent>
+      <mc:AlternateContent xmlns:mc="http://schemas.openxmlformats.org/markup-compatibility/2006" xmlns:p14="http://schemas.microsoft.com/office/powerpoint/2010/main">
+        <mc:Choice Requires="p14">
+          <p:contentPart p14:bwMode="auto" r:id="rId3">
+            <p14:nvContentPartPr>
+              <p14:cNvPr id="7" name="잉크 2"/>
+              <p14:cNvContentPartPr/>
+              <p14:nvPr/>
+            </p14:nvContentPartPr>
+            <p14:xfrm>
+              <a:off x="2641600" y="4210050"/>
+              <a:ext cx="6350" cy="6350"/>
+            </p14:xfrm>
+          </p:contentPart>
+        </mc:Choice>
+        <mc:Fallback>
+          <p:pic>
+            <p:nvPicPr>
+              <p:cNvPr id="7" name="잉크 2"/>
+              <p:cNvPicPr/>
+              <p:nvPr/>
+            </p:nvPicPr>
+            <p:blipFill>
+              <a:blip r:embed="rId4"/>
+              <a:stretch>
+                <a:fillRect/>
+              </a:stretch>
+            </p:blipFill>
+            <p:spPr>
+              <a:xfrm>
+                <a:off x="2641600" y="4210050"/>
+                <a:ext cx="6350" cy="6350"/>
+              </a:xfrm>
+              <a:prstGeom prst="rect">
+                <a:avLst/>
+              </a:prstGeom>
+            </p:spPr>
+          </p:pic>
+        </mc:Fallback>
+      </mc:AlternateContent>
     </p:spTree>
     <p:extLst>
       <p:ext uri="{BB962C8B-B14F-4D97-AF65-F5344CB8AC3E}">
@@ -6855,6 +7135,21 @@
   <p:clrMapOvr>
     <a:masterClrMapping/>
   </p:clrMapOvr>
+  <mc:AlternateContent xmlns:mc="http://schemas.openxmlformats.org/markup-compatibility/2006">
+    <mc:Choice xmlns:p14="http://schemas.microsoft.com/office/powerpoint/2010/main" Requires="p14">
+      <p:transition spd="slow" p14:dur="2000"/>
+    </mc:Choice>
+    <mc:Fallback>
+      <p:transition spd="slow"/>
+    </mc:Fallback>
+  </mc:AlternateContent>
+  <p:timing>
+    <p:tnLst>
+      <p:par>
+        <p:cTn id="1" dur="indefinite" restart="never" nodeType="tmRoot"/>
+      </p:par>
+    </p:tnLst>
+  </p:timing>
 </p:sld>
 </file>
 
@@ -16847,7 +17142,7 @@
 </file>
 
 <file path=ppt/slides/slide6.xml><?xml version="1.0" encoding="utf-8"?>
-<p:sld xmlns:a="http://schemas.openxmlformats.org/drawingml/2006/main" xmlns:r="http://schemas.openxmlformats.org/officeDocument/2006/relationships" xmlns:p="http://schemas.openxmlformats.org/presentationml/2006/main">
+<p:sld xmlns:a="http://schemas.openxmlformats.org/drawingml/2006/main" xmlns:r="http://schemas.openxmlformats.org/officeDocument/2006/relationships" xmlns:p="http://schemas.openxmlformats.org/presentationml/2006/main" xmlns:p14="http://schemas.microsoft.com/office/powerpoint/2010/main">
   <p:cSld>
     <p:spTree>
       <p:nvGrpSpPr>
@@ -16879,7 +17174,12 @@
             <p:ph type="title"/>
           </p:nvPr>
         </p:nvSpPr>
-        <p:spPr/>
+        <p:spPr>
+          <a:xfrm>
+            <a:off x="443230" y="146050"/>
+            <a:ext cx="7773035" cy="762635"/>
+          </a:xfrm>
+        </p:spPr>
         <p:txBody>
           <a:bodyPr/>
           <a:lstStyle/>
@@ -16916,7 +17216,12 @@
             <p:ph idx="1"/>
           </p:nvPr>
         </p:nvSpPr>
-        <p:spPr/>
+        <p:spPr>
+          <a:xfrm>
+            <a:off x="444500" y="1152525"/>
+            <a:ext cx="7773035" cy="5020310"/>
+          </a:xfrm>
+        </p:spPr>
         <p:txBody>
           <a:bodyPr>
             <a:normAutofit/>
@@ -17208,7 +17513,12 @@
             <p:ph type="sldNum" sz="quarter" idx="10"/>
           </p:nvPr>
         </p:nvSpPr>
-        <p:spPr/>
+        <p:spPr>
+          <a:xfrm>
+            <a:off x="7112000" y="6419850"/>
+            <a:ext cx="1905635" cy="305435"/>
+          </a:xfrm>
+        </p:spPr>
         <p:txBody>
           <a:bodyPr/>
           <a:lstStyle/>
@@ -17243,7 +17553,12 @@
             <p:ph type="ftr" sz="quarter" idx="11"/>
           </p:nvPr>
         </p:nvSpPr>
-        <p:spPr/>
+        <p:spPr>
+          <a:xfrm>
+            <a:off x="897255" y="6393180"/>
+            <a:ext cx="3110230" cy="349885"/>
+          </a:xfrm>
+        </p:spPr>
         <p:txBody>
           <a:bodyPr/>
           <a:lstStyle/>
@@ -17269,8 +17584,8 @@
         </p:nvSpPr>
         <p:spPr>
           <a:xfrm>
-            <a:off x="1691680" y="4581128"/>
-            <a:ext cx="3218382" cy="1282402"/>
+            <a:off x="1691640" y="4580890"/>
+            <a:ext cx="3218180" cy="1282700"/>
           </a:xfrm>
           <a:prstGeom prst="rect">
             <a:avLst/>
@@ -17345,14 +17660,209 @@
         </p:blipFill>
         <p:spPr>
           <a:xfrm>
-            <a:off x="5508104" y="4452260"/>
-            <a:ext cx="2983409" cy="1830271"/>
+            <a:off x="5507990" y="4451985"/>
+            <a:ext cx="2983230" cy="1830070"/>
           </a:xfrm>
           <a:prstGeom prst="rect">
             <a:avLst/>
           </a:prstGeom>
         </p:spPr>
       </p:pic>
+      <mc:AlternateContent xmlns:mc="http://schemas.openxmlformats.org/markup-compatibility/2006" xmlns:p14="http://schemas.microsoft.com/office/powerpoint/2010/main">
+        <mc:Choice Requires="p14">
+          <p:contentPart p14:bwMode="auto" r:id="rId3">
+            <p14:nvContentPartPr>
+              <p14:cNvPr id="9" name="잉크 3"/>
+              <p14:cNvContentPartPr/>
+              <p14:nvPr/>
+            </p14:nvContentPartPr>
+            <p14:xfrm>
+              <a:off x="6057900" y="2806700"/>
+              <a:ext cx="876300" cy="1162050"/>
+            </p14:xfrm>
+          </p:contentPart>
+        </mc:Choice>
+        <mc:Fallback>
+          <p:pic>
+            <p:nvPicPr>
+              <p:cNvPr id="9" name="잉크 3"/>
+              <p:cNvPicPr/>
+              <p:nvPr/>
+            </p:nvPicPr>
+            <p:blipFill>
+              <a:blip r:embed="rId4"/>
+              <a:stretch>
+                <a:fillRect/>
+              </a:stretch>
+            </p:blipFill>
+            <p:spPr>
+              <a:xfrm>
+                <a:off x="6057900" y="2806700"/>
+                <a:ext cx="876300" cy="1162050"/>
+              </a:xfrm>
+              <a:prstGeom prst="rect">
+                <a:avLst/>
+              </a:prstGeom>
+            </p:spPr>
+          </p:pic>
+        </mc:Fallback>
+      </mc:AlternateContent>
+      <mc:AlternateContent xmlns:mc="http://schemas.openxmlformats.org/markup-compatibility/2006" xmlns:p14="http://schemas.microsoft.com/office/powerpoint/2010/main">
+        <mc:Choice Requires="p14">
+          <p:contentPart p14:bwMode="auto" r:id="rId5">
+            <p14:nvContentPartPr>
+              <p14:cNvPr id="10" name="잉크 4"/>
+              <p14:cNvContentPartPr/>
+              <p14:nvPr/>
+            </p14:nvContentPartPr>
+            <p14:xfrm>
+              <a:off x="6934200" y="3111500"/>
+              <a:ext cx="501650" cy="800100"/>
+            </p14:xfrm>
+          </p:contentPart>
+        </mc:Choice>
+        <mc:Fallback>
+          <p:pic>
+            <p:nvPicPr>
+              <p:cNvPr id="10" name="잉크 4"/>
+              <p:cNvPicPr/>
+              <p:nvPr/>
+            </p:nvPicPr>
+            <p:blipFill>
+              <a:blip r:embed="rId6"/>
+              <a:stretch>
+                <a:fillRect/>
+              </a:stretch>
+            </p:blipFill>
+            <p:spPr>
+              <a:xfrm>
+                <a:off x="6934200" y="3111500"/>
+                <a:ext cx="501650" cy="800100"/>
+              </a:xfrm>
+              <a:prstGeom prst="rect">
+                <a:avLst/>
+              </a:prstGeom>
+            </p:spPr>
+          </p:pic>
+        </mc:Fallback>
+      </mc:AlternateContent>
+      <mc:AlternateContent xmlns:mc="http://schemas.openxmlformats.org/markup-compatibility/2006" xmlns:p14="http://schemas.microsoft.com/office/powerpoint/2010/main">
+        <mc:Choice Requires="p14">
+          <p:contentPart p14:bwMode="auto" r:id="rId7">
+            <p14:nvContentPartPr>
+              <p14:cNvPr id="11" name="잉크 5"/>
+              <p14:cNvContentPartPr/>
+              <p14:nvPr/>
+            </p14:nvContentPartPr>
+            <p14:xfrm>
+              <a:off x="7289800" y="3143250"/>
+              <a:ext cx="508000" cy="869950"/>
+            </p14:xfrm>
+          </p:contentPart>
+        </mc:Choice>
+        <mc:Fallback>
+          <p:pic>
+            <p:nvPicPr>
+              <p:cNvPr id="11" name="잉크 5"/>
+              <p:cNvPicPr/>
+              <p:nvPr/>
+            </p:nvPicPr>
+            <p:blipFill>
+              <a:blip r:embed="rId8"/>
+              <a:stretch>
+                <a:fillRect/>
+              </a:stretch>
+            </p:blipFill>
+            <p:spPr>
+              <a:xfrm>
+                <a:off x="7289800" y="3143250"/>
+                <a:ext cx="508000" cy="869950"/>
+              </a:xfrm>
+              <a:prstGeom prst="rect">
+                <a:avLst/>
+              </a:prstGeom>
+            </p:spPr>
+          </p:pic>
+        </mc:Fallback>
+      </mc:AlternateContent>
+      <mc:AlternateContent xmlns:mc="http://schemas.openxmlformats.org/markup-compatibility/2006" xmlns:p14="http://schemas.microsoft.com/office/powerpoint/2010/main">
+        <mc:Choice Requires="p14">
+          <p:contentPart p14:bwMode="auto" r:id="rId9">
+            <p14:nvContentPartPr>
+              <p14:cNvPr id="12" name="잉크 6"/>
+              <p14:cNvContentPartPr/>
+              <p14:nvPr/>
+            </p14:nvContentPartPr>
+            <p14:xfrm>
+              <a:off x="7874000" y="3257550"/>
+              <a:ext cx="57150" cy="882650"/>
+            </p14:xfrm>
+          </p:contentPart>
+        </mc:Choice>
+        <mc:Fallback>
+          <p:pic>
+            <p:nvPicPr>
+              <p:cNvPr id="12" name="잉크 6"/>
+              <p:cNvPicPr/>
+              <p:nvPr/>
+            </p:nvPicPr>
+            <p:blipFill>
+              <a:blip r:embed="rId10"/>
+              <a:stretch>
+                <a:fillRect/>
+              </a:stretch>
+            </p:blipFill>
+            <p:spPr>
+              <a:xfrm>
+                <a:off x="7874000" y="3257550"/>
+                <a:ext cx="57150" cy="882650"/>
+              </a:xfrm>
+              <a:prstGeom prst="rect">
+                <a:avLst/>
+              </a:prstGeom>
+            </p:spPr>
+          </p:pic>
+        </mc:Fallback>
+      </mc:AlternateContent>
+      <mc:AlternateContent xmlns:mc="http://schemas.openxmlformats.org/markup-compatibility/2006" xmlns:p14="http://schemas.microsoft.com/office/powerpoint/2010/main">
+        <mc:Choice Requires="p14">
+          <p:contentPart p14:bwMode="auto" r:id="rId11">
+            <p14:nvContentPartPr>
+              <p14:cNvPr id="13" name="잉크 7"/>
+              <p14:cNvContentPartPr/>
+              <p14:nvPr/>
+            </p14:nvContentPartPr>
+            <p14:xfrm>
+              <a:off x="8077200" y="3175000"/>
+              <a:ext cx="673100" cy="895350"/>
+            </p14:xfrm>
+          </p:contentPart>
+        </mc:Choice>
+        <mc:Fallback>
+          <p:pic>
+            <p:nvPicPr>
+              <p:cNvPr id="13" name="잉크 7"/>
+              <p:cNvPicPr/>
+              <p:nvPr/>
+            </p:nvPicPr>
+            <p:blipFill>
+              <a:blip r:embed="rId12"/>
+              <a:stretch>
+                <a:fillRect/>
+              </a:stretch>
+            </p:blipFill>
+            <p:spPr>
+              <a:xfrm>
+                <a:off x="8077200" y="3175000"/>
+                <a:ext cx="673100" cy="895350"/>
+              </a:xfrm>
+              <a:prstGeom prst="rect">
+                <a:avLst/>
+              </a:prstGeom>
+            </p:spPr>
+          </p:pic>
+        </mc:Fallback>
+      </mc:AlternateContent>
     </p:spTree>
     <p:extLst>
       <p:ext uri="{BB962C8B-B14F-4D97-AF65-F5344CB8AC3E}">
@@ -17363,6 +17873,21 @@
   <p:clrMapOvr>
     <a:masterClrMapping/>
   </p:clrMapOvr>
+  <mc:AlternateContent xmlns:mc="http://schemas.openxmlformats.org/markup-compatibility/2006">
+    <mc:Choice xmlns:p14="http://schemas.microsoft.com/office/powerpoint/2010/main" Requires="p14">
+      <p:transition spd="slow" p14:dur="2000"/>
+    </mc:Choice>
+    <mc:Fallback>
+      <p:transition spd="slow"/>
+    </mc:Fallback>
+  </mc:AlternateContent>
+  <p:timing>
+    <p:tnLst>
+      <p:par>
+        <p:cTn id="1" dur="indefinite" restart="never" nodeType="tmRoot"/>
+      </p:par>
+    </p:tnLst>
+  </p:timing>
 </p:sld>
 </file>
 

--- a/1학기/웹 프로그래밍/2026_웹 프로그래밍_part3.pptx
+++ b/1학기/웹 프로그래밍/2026_웹 프로그래밍_part3.pptx
@@ -2,7 +2,7 @@
 <file path=ppt/presentation.xml><?xml version="1.0" encoding="utf-8"?>
 <p:presentation xmlns:a="http://schemas.openxmlformats.org/drawingml/2006/main" xmlns:r="http://schemas.openxmlformats.org/officeDocument/2006/relationships" xmlns:p="http://schemas.openxmlformats.org/presentationml/2006/main" xmlns:p14="http://schemas.microsoft.com/office/powerpoint/2010/main" saveSubsetFonts="1">
   <p:sldMasterIdLst>
-    <p:sldMasterId id="2147483665" r:id="rId5"/>
+    <p:sldMasterId id="2147483669" r:id="rId5"/>
   </p:sldMasterIdLst>
   <p:notesMasterIdLst>
     <p:notesMasterId r:id="rId7"/>
@@ -145,12 +145,12 @@
   <p:extLst>
     <p:ext uri="{EFAFB233-063F-42B5-8137-9DF3F51BA10A}">
       <p15:sldGuideLst xmlns:p15="http://schemas.microsoft.com/office/powerpoint/2012/main">
-        <p15:guide id="1" orient="horz" pos="2159" userDrawn="0">
+        <p15:guide id="1" orient="horz" pos="2157" userDrawn="0">
           <p15:clr>
             <a:srgbClr val="A4A3A4"/>
           </p15:clr>
         </p15:guide>
-        <p15:guide id="2" pos="2879" userDrawn="0">
+        <p15:guide id="2" pos="2877" userDrawn="0">
           <p15:clr>
             <a:srgbClr val="A4A3A4"/>
           </p15:clr>
@@ -235,7 +235,7 @@
       <inkml:brushProperty name="fitToCurve" value="1"/>
     </inkml:brush>
   </inkml:definitions>
-  <inkml:trace contextRef="#ctx0" brushRef="#br0">2434 0,'-71'105,"-70"89,-353 494,71-176,88-71,158-247,-52 123,17-34,1-1,175-229,-34 35,35-53,35 0,0-35</inkml:trace>
+  <inkml:trace contextRef="#ctx0" brushRef="#br0">3555 0,'0'42,"-275"233,-85 127,-232 85,295-233,-380 381,275-275,127-43,42-84,85-42,127-128,-1-42,65-21,-1 0,43 0,21 0,126 0,382 64,64 20,-340-20,1-22,42 22,-233-43,-63-21,-1 0,1 21,-21-21,-22 21,0-21,1 0,-22 0,0 0,-21-21,-21-21,0-1,-64-62,-42-65,-106-63,-63-84,42 63,-508-402,254 254,42 21,127 42,-126-42,338 275,85 85,42 63,0 1,0 41,0 86,0 105,84 85,43 63,233 868,-148-635,-64-84,-64-255,22 22,-63-254,-22-1,0-41,0-1,21-21,-20-21,-1 0,0-21,21-64,128-338,-86 275,107-233,-22 127,-21-43,0 43,85-232,-106 253,21 0,43-212,-128 297,-20 21,-43 106,21 0,-21 0,0 21</inkml:trace>
 </inkml:ink>
 </file>
 
@@ -261,7 +261,7 @@
       <inkml:brushProperty name="fitToCurve" value="1"/>
     </inkml:brush>
   </inkml:definitions>
-  <inkml:trace contextRef="#ctx0" brushRef="#br0">0 299,'176'-53,"247"-70,-123 52,-159 36,-17 18,-36 34,-71 36,19 53,-19 35,-34 53,-54 18,18-106,-70 105,-71-52,-53 17,159-140,70-19,-35-17,53 18,-18-18,18-18,18 1,106-1,70 0,-106 18,106 0,-106 18,53 17,-70-17,-36 17,-35 36,-53-1,-106 89,-52 17,-54-34,194-90,-123 1,89-35,-54-18,159 0</inkml:trace>
+  <inkml:trace contextRef="#ctx0" brushRef="#br0">2434 0,'-71'105,"-70"89,-353 494,71-176,88-71,158-247,-52 123,17-34,1-1,175-229,-34 35,35-53,35 0,0-35</inkml:trace>
 </inkml:ink>
 </file>
 
@@ -287,7 +287,7 @@
       <inkml:brushProperty name="fitToCurve" value="1"/>
     </inkml:brush>
   </inkml:definitions>
-  <inkml:trace contextRef="#ctx0" brushRef="#br0">1411 0,'-18'70,"-176"300,-124 142,-140 246,193-264,159-353,71-105,18-1,17-35</inkml:trace>
+  <inkml:trace contextRef="#ctx0" brushRef="#br0">0 299,'176'-53,"247"-70,-123 52,-159 36,-17 18,-36 34,-71 36,19 53,-19 35,-34 53,-54 18,18-106,-70 105,-71-52,-53 17,159-140,70-19,-35-17,53 18,-18-18,18-18,18 1,106-1,70 0,-106 18,106 0,-106 18,53 17,-70-17,-36 17,-35 36,-53-1,-106 89,-52 17,-54-34,194-90,-123 1,89-35,-54-18,159 0</inkml:trace>
 </inkml:ink>
 </file>
 
@@ -313,7 +313,7 @@
       <inkml:brushProperty name="fitToCurve" value="1"/>
     </inkml:brush>
   </inkml:definitions>
-  <inkml:trace contextRef="#ctx0" brushRef="#br0">158 0,'0'158,"0"266,-17-1,-19-159,-34 54,52-53,1-54,17-70,0-70,0-1,17-17,-17-17,18-19,-18-17</inkml:trace>
+  <inkml:trace contextRef="#ctx0" brushRef="#br0">1411 0,'-18'70,"-176"300,-124 142,-140 246,193-264,159-353,71-105,18-1,17-35</inkml:trace>
 </inkml:ink>
 </file>
 
@@ -339,7 +339,59 @@
       <inkml:brushProperty name="fitToCurve" value="1"/>
     </inkml:brush>
   </inkml:definitions>
+  <inkml:trace contextRef="#ctx0" brushRef="#br0">158 0,'0'158,"0"266,-17-1,-19-159,-34 54,52-53,1-54,17-70,0-70,0-1,17-17,-17-17,18-19,-18-17</inkml:trace>
+</inkml:ink>
+</file>
+
+<file path=ppt/ink/ink8.xml><?xml version="1.0" encoding="utf-8"?>
+<inkml:ink xmlns:inkml="http://www.w3.org/2003/InkML">
+  <inkml:definitions>
+    <inkml:context xml:id="ctx0">
+      <inkml:inkSource xml:id="inkSrc0">
+        <inkml:traceFormat>
+          <inkml:channel name="X" type="integer" max="3200" units="cm"/>
+          <inkml:channel name="Y" type="integer" max="1080" units="cm"/>
+        </inkml:traceFormat>
+        <inkml:channelProperties>
+          <inkml:channelProperty channel="X" name="resolution" value="66.666656" units="1/cm"/>
+          <inkml:channelProperty channel="Y" name="resolution" value="40.000000" units="1/cm"/>
+        </inkml:channelProperties>
+      </inkml:inkSource>
+    </inkml:context>
+    <inkml:brush xml:id="br0">
+      <inkml:brushProperty name="width" value="0.035278" units="cm"/>
+      <inkml:brushProperty name="height" value="0.035278" units="cm"/>
+      <inkml:brushProperty name="color" value="#ff0000"/>
+      <inkml:brushProperty name="fitToCurve" value="1"/>
+    </inkml:brush>
+  </inkml:definitions>
   <inkml:trace contextRef="#ctx0" brushRef="#br0">1075 194,'-88'-36,"-159"-70,-105 54,158 104,88 160,53 123,18-123,35-124,0-35,0-35,35-1,53-17,0 0,265-88,35-53,-229 70,70-34,-17-19,-142 71,36-35,-35 17,-54 71,19-52,-19 52,-17 17,-35 18,-36 54,-70 158,35-71,-123 530,141-336,35-158,35-71,18-71,-17-17,-1-18,-17 36,0 0,35-71</inkml:trace>
+</inkml:ink>
+</file>
+
+<file path=ppt/ink/ink9.xml><?xml version="1.0" encoding="utf-8"?>
+<inkml:ink xmlns:inkml="http://www.w3.org/2003/InkML">
+  <inkml:definitions>
+    <inkml:context xml:id="ctx0">
+      <inkml:inkSource xml:id="inkSrc0">
+        <inkml:traceFormat>
+          <inkml:channel name="X" type="integer" max="3200" units="cm"/>
+          <inkml:channel name="Y" type="integer" max="1080" units="cm"/>
+        </inkml:traceFormat>
+        <inkml:channelProperties>
+          <inkml:channelProperty channel="X" name="resolution" value="66.666656" units="1/cm"/>
+          <inkml:channelProperty channel="Y" name="resolution" value="40.000000" units="1/cm"/>
+        </inkml:channelProperties>
+      </inkml:inkSource>
+    </inkml:context>
+    <inkml:brush xml:id="br0">
+      <inkml:brushProperty name="width" value="0.035278" units="cm"/>
+      <inkml:brushProperty name="height" value="0.035278" units="cm"/>
+      <inkml:brushProperty name="color" value="#ff0000"/>
+      <inkml:brushProperty name="fitToCurve" value="1"/>
+    </inkml:brush>
+  </inkml:definitions>
+  <inkml:trace contextRef="#ctx0" brushRef="#br0">2518 486,'-148'360,"-296"339,84-107,-212 107,234-339,253-255,-63 22,148-84,-21-22,-1-21,22 21,22-42,41 21,43-42,127 20,592-41,-20 63,-255 0,-338-21,42 0,-170-1,-20 1,-1 21,-42-21,1 21,-22-21,-22 0,-41-22,-43-41,-169-128,-1122-1016,635 509,296 295,-21 43,382 276,84 84,42 42,0 42,63 22,22 105,42 64,170 572,-170-255,127 255,-127-191,-105-402,20 21,1 42,-1-106,-42-105,-21-64,22 0,-22-42,0 0,0-21,0 21,63-149,43-147,127-128,211-465,-63-42,-169 274,-127 382,-85 190,21 64,-21 21,0 21</inkml:trace>
 </inkml:ink>
 </file>
 
@@ -17670,7 +17722,7 @@
       </p:pic>
       <mc:AlternateContent xmlns:mc="http://schemas.openxmlformats.org/markup-compatibility/2006" xmlns:p14="http://schemas.microsoft.com/office/powerpoint/2010/main">
         <mc:Choice Requires="p14">
-          <p:contentPart p14:bwMode="auto" r:id="rId3">
+          <p:contentPart p14:bwMode="auto" r:id="rId25">
             <p14:nvContentPartPr>
               <p14:cNvPr id="9" name="잉크 3"/>
               <p14:cNvContentPartPr/>
@@ -17690,7 +17742,7 @@
               <p:nvPr/>
             </p:nvPicPr>
             <p:blipFill>
-              <a:blip r:embed="rId4"/>
+              <a:blip r:embed="rId26"/>
               <a:stretch>
                 <a:fillRect/>
               </a:stretch>
@@ -17709,7 +17761,7 @@
       </mc:AlternateContent>
       <mc:AlternateContent xmlns:mc="http://schemas.openxmlformats.org/markup-compatibility/2006" xmlns:p14="http://schemas.microsoft.com/office/powerpoint/2010/main">
         <mc:Choice Requires="p14">
-          <p:contentPart p14:bwMode="auto" r:id="rId5">
+          <p:contentPart p14:bwMode="auto" r:id="rId27">
             <p14:nvContentPartPr>
               <p14:cNvPr id="10" name="잉크 4"/>
               <p14:cNvContentPartPr/>
@@ -17729,7 +17781,7 @@
               <p:nvPr/>
             </p:nvPicPr>
             <p:blipFill>
-              <a:blip r:embed="rId6"/>
+              <a:blip r:embed="rId28"/>
               <a:stretch>
                 <a:fillRect/>
               </a:stretch>
@@ -17748,7 +17800,7 @@
       </mc:AlternateContent>
       <mc:AlternateContent xmlns:mc="http://schemas.openxmlformats.org/markup-compatibility/2006" xmlns:p14="http://schemas.microsoft.com/office/powerpoint/2010/main">
         <mc:Choice Requires="p14">
-          <p:contentPart p14:bwMode="auto" r:id="rId7">
+          <p:contentPart p14:bwMode="auto" r:id="rId29">
             <p14:nvContentPartPr>
               <p14:cNvPr id="11" name="잉크 5"/>
               <p14:cNvContentPartPr/>
@@ -17768,7 +17820,7 @@
               <p:nvPr/>
             </p:nvPicPr>
             <p:blipFill>
-              <a:blip r:embed="rId8"/>
+              <a:blip r:embed="rId30"/>
               <a:stretch>
                 <a:fillRect/>
               </a:stretch>
@@ -17787,7 +17839,7 @@
       </mc:AlternateContent>
       <mc:AlternateContent xmlns:mc="http://schemas.openxmlformats.org/markup-compatibility/2006" xmlns:p14="http://schemas.microsoft.com/office/powerpoint/2010/main">
         <mc:Choice Requires="p14">
-          <p:contentPart p14:bwMode="auto" r:id="rId9">
+          <p:contentPart p14:bwMode="auto" r:id="rId31">
             <p14:nvContentPartPr>
               <p14:cNvPr id="12" name="잉크 6"/>
               <p14:cNvContentPartPr/>
@@ -17807,7 +17859,7 @@
               <p:nvPr/>
             </p:nvPicPr>
             <p:blipFill>
-              <a:blip r:embed="rId10"/>
+              <a:blip r:embed="rId32"/>
               <a:stretch>
                 <a:fillRect/>
               </a:stretch>
@@ -17826,7 +17878,7 @@
       </mc:AlternateContent>
       <mc:AlternateContent xmlns:mc="http://schemas.openxmlformats.org/markup-compatibility/2006" xmlns:p14="http://schemas.microsoft.com/office/powerpoint/2010/main">
         <mc:Choice Requires="p14">
-          <p:contentPart p14:bwMode="auto" r:id="rId11">
+          <p:contentPart p14:bwMode="auto" r:id="rId33">
             <p14:nvContentPartPr>
               <p14:cNvPr id="13" name="잉크 7"/>
               <p14:cNvContentPartPr/>
@@ -17846,7 +17898,7 @@
               <p:nvPr/>
             </p:nvPicPr>
             <p:blipFill>
-              <a:blip r:embed="rId12"/>
+              <a:blip r:embed="rId34"/>
               <a:stretch>
                 <a:fillRect/>
               </a:stretch>
@@ -17863,6 +17915,116 @@
           </p:pic>
         </mc:Fallback>
       </mc:AlternateContent>
+      <mc:AlternateContent xmlns:mc="http://schemas.openxmlformats.org/markup-compatibility/2006" xmlns:p14="http://schemas.microsoft.com/office/powerpoint/2010/main">
+        <mc:Choice Requires="p14">
+          <p:contentPart p14:bwMode="auto" r:id="rId35">
+            <p14:nvContentPartPr>
+              <p14:cNvPr id="14" name="잉크 1"/>
+              <p14:cNvContentPartPr/>
+              <p14:nvPr/>
+            </p14:nvContentPartPr>
+            <p14:xfrm>
+              <a:off x="5913120" y="563880"/>
+              <a:ext cx="1333500" cy="1645920"/>
+            </p14:xfrm>
+          </p:contentPart>
+        </mc:Choice>
+        <mc:Fallback>
+          <p:pic>
+            <p:nvPicPr>
+              <p:cNvPr id="14" name="잉크 1"/>
+              <p:cNvPicPr/>
+              <p:nvPr/>
+            </p:nvPicPr>
+            <p:blipFill>
+              <a:blip r:embed="rId36"/>
+              <a:stretch>
+                <a:fillRect/>
+              </a:stretch>
+            </p:blipFill>
+            <p:spPr>
+              <a:xfrm>
+                <a:off x="5913120" y="563880"/>
+                <a:ext cx="1333500" cy="1645920"/>
+              </a:xfrm>
+              <a:prstGeom prst="rect">
+                <a:avLst/>
+              </a:prstGeom>
+            </p:spPr>
+          </p:pic>
+        </mc:Fallback>
+      </mc:AlternateContent>
+      <p:sp>
+        <p:nvSpPr>
+          <p:cNvPr id="15" name="텍스트 상자 1"/>
+          <p:cNvSpPr txBox="1">
+            <a:spLocks/>
+          </p:cNvSpPr>
+          <p:nvPr/>
+        </p:nvSpPr>
+        <p:spPr>
+          <a:xfrm rot="0">
+            <a:off x="1959610" y="5494020"/>
+            <a:ext cx="318770" cy="677545"/>
+          </a:xfrm>
+          <a:prstGeom prst="rect"/>
+          <a:noFill/>
+          <a:ln>
+            <a:noFill/>
+            <a:prstDash/>
+          </a:ln>
+        </p:spPr>
+        <p:txBody>
+          <a:bodyPr wrap="none" lIns="89535" tIns="46355" rIns="89535" bIns="46355" vert="horz" anchor="t">
+            <a:spAutoFit/>
+          </a:bodyPr>
+          <a:lstStyle/>
+          <a:p>
+            <a:pPr marL="228600" indent="-228600">
+              <a:buFont typeface="맑은 고딕"/>
+              <a:buChar char="•"/>
+            </a:pPr>
+            <a:r>
+              <a:rPr sz="1000" b="1"/>
+              <a:t>Arial</a:t>
+            </a:r>
+            <a:r>
+              <a:rPr sz="1000"/>
+              <a:t>글꼴을 우선 사용합니다. </a:t>
+            </a:r>
+            <a:endParaRPr lang="ko-KR" altLang="en-US" sz="1000"/>
+          </a:p>
+          <a:p>
+            <a:pPr marL="0" indent="0">
+              <a:buFont typeface="맑은 고딕"/>
+              <a:buChar char="•"/>
+            </a:pPr>
+            <a:r>
+              <a:rPr sz="1000"/>
+              <a:t>만약 Arial이 사용자 시스템에 없으면, </a:t>
+            </a:r>
+            <a:r>
+              <a:rPr sz="1000" b="1"/>
+              <a:t>sans-serif 계열 글꼴</a:t>
+            </a:r>
+            <a:r>
+              <a:rPr sz="1000"/>
+              <a:t>(고딕체 계열)을 대신 사용합니다.</a:t>
+            </a:r>
+            <a:endParaRPr lang="ko-KR" altLang="en-US" sz="1000"/>
+          </a:p>
+          <a:p>
+            <a:pPr marL="0" indent="0">
+              <a:buFont typeface="맑은 고딕"/>
+              <a:buChar char="•"/>
+            </a:pPr>
+            <a:endParaRPr lang="ko-KR" altLang="en-US" sz="1800">
+              <a:latin typeface="맑은 고딕" charset="0"/>
+              <a:ea typeface="맑은 고딕" charset="0"/>
+            </a:endParaRPr>
+          </a:p>
+        </p:txBody>
+      </p:sp>
     </p:spTree>
     <p:extLst>
       <p:ext uri="{BB962C8B-B14F-4D97-AF65-F5344CB8AC3E}">
@@ -18173,7 +18335,7 @@
 </file>
 
 <file path=ppt/slides/slide8.xml><?xml version="1.0" encoding="utf-8"?>
-<p:sld xmlns:a="http://schemas.openxmlformats.org/drawingml/2006/main" xmlns:r="http://schemas.openxmlformats.org/officeDocument/2006/relationships" xmlns:p="http://schemas.openxmlformats.org/presentationml/2006/main">
+<p:sld xmlns:a="http://schemas.openxmlformats.org/drawingml/2006/main" xmlns:r="http://schemas.openxmlformats.org/officeDocument/2006/relationships" xmlns:p="http://schemas.openxmlformats.org/presentationml/2006/main" xmlns:p14="http://schemas.microsoft.com/office/powerpoint/2010/main">
   <p:cSld>
     <p:spTree>
       <p:nvGrpSpPr>
@@ -18205,7 +18367,12 @@
             <p:ph type="title"/>
           </p:nvPr>
         </p:nvSpPr>
-        <p:spPr/>
+        <p:spPr>
+          <a:xfrm>
+            <a:off x="443230" y="146050"/>
+            <a:ext cx="7773035" cy="762635"/>
+          </a:xfrm>
+        </p:spPr>
         <p:txBody>
           <a:bodyPr/>
           <a:lstStyle/>
@@ -18244,7 +18411,7 @@
         </p:nvSpPr>
         <p:spPr>
           <a:xfrm>
-            <a:off x="504206" y="1154112"/>
+            <a:off x="504190" y="1153795"/>
             <a:ext cx="7772400" cy="5019675"/>
           </a:xfrm>
         </p:spPr>
@@ -18280,7 +18447,12 @@
             <p:ph type="sldNum" sz="quarter" idx="10"/>
           </p:nvPr>
         </p:nvSpPr>
-        <p:spPr/>
+        <p:spPr>
+          <a:xfrm>
+            <a:off x="7112000" y="6419850"/>
+            <a:ext cx="1905635" cy="305435"/>
+          </a:xfrm>
+        </p:spPr>
         <p:txBody>
           <a:bodyPr/>
           <a:lstStyle/>
@@ -18315,7 +18487,12 @@
             <p:ph type="ftr" sz="quarter" idx="11"/>
           </p:nvPr>
         </p:nvSpPr>
-        <p:spPr/>
+        <p:spPr>
+          <a:xfrm>
+            <a:off x="897255" y="6393180"/>
+            <a:ext cx="3110230" cy="349885"/>
+          </a:xfrm>
+        </p:spPr>
         <p:txBody>
           <a:bodyPr/>
           <a:lstStyle/>
@@ -18341,8 +18518,8 @@
         </p:nvSpPr>
         <p:spPr>
           <a:xfrm>
-            <a:off x="896938" y="1700808"/>
-            <a:ext cx="5884944" cy="1200329"/>
+            <a:off x="897255" y="1700530"/>
+            <a:ext cx="5885180" cy="1200150"/>
           </a:xfrm>
           <a:prstGeom prst="rect">
             <a:avLst/>
@@ -18452,8 +18629,8 @@
         </p:nvSpPr>
         <p:spPr>
           <a:xfrm>
-            <a:off x="896938" y="3179857"/>
-            <a:ext cx="4075603" cy="1200329"/>
+            <a:off x="897255" y="3180080"/>
+            <a:ext cx="4075430" cy="1200150"/>
           </a:xfrm>
           <a:prstGeom prst="rect">
             <a:avLst/>
@@ -18547,8 +18724,8 @@
         </p:nvSpPr>
         <p:spPr>
           <a:xfrm>
-            <a:off x="896938" y="4658906"/>
-            <a:ext cx="5588838" cy="1200329"/>
+            <a:off x="897255" y="4658995"/>
+            <a:ext cx="5588635" cy="1200150"/>
           </a:xfrm>
           <a:prstGeom prst="rect">
             <a:avLst/>
@@ -18628,6 +18805,45 @@
           </a:p>
         </p:txBody>
       </p:sp>
+      <mc:AlternateContent xmlns:mc="http://schemas.openxmlformats.org/markup-compatibility/2006" xmlns:p14="http://schemas.microsoft.com/office/powerpoint/2010/main">
+        <mc:Choice Requires="p14">
+          <p:contentPart p14:bwMode="auto" r:id="rId1">
+            <p14:nvContentPartPr>
+              <p14:cNvPr id="9" name="잉크 2"/>
+              <p14:cNvContentPartPr/>
+              <p14:nvPr/>
+            </p14:nvContentPartPr>
+            <p14:xfrm>
+              <a:off x="6187440" y="2057400"/>
+              <a:ext cx="1348740" cy="1813560"/>
+            </p14:xfrm>
+          </p:contentPart>
+        </mc:Choice>
+        <mc:Fallback>
+          <p:pic>
+            <p:nvPicPr>
+              <p:cNvPr id="9" name="잉크 2"/>
+              <p:cNvPicPr/>
+              <p:nvPr/>
+            </p:nvPicPr>
+            <p:blipFill>
+              <a:blip r:embed="rId2"/>
+              <a:stretch>
+                <a:fillRect/>
+              </a:stretch>
+            </p:blipFill>
+            <p:spPr>
+              <a:xfrm>
+                <a:off x="6187440" y="2057400"/>
+                <a:ext cx="1348740" cy="1813560"/>
+              </a:xfrm>
+              <a:prstGeom prst="rect">
+                <a:avLst/>
+              </a:prstGeom>
+            </p:spPr>
+          </p:pic>
+        </mc:Fallback>
+      </mc:AlternateContent>
     </p:spTree>
     <p:extLst>
       <p:ext uri="{BB962C8B-B14F-4D97-AF65-F5344CB8AC3E}">
@@ -18638,6 +18854,21 @@
   <p:clrMapOvr>
     <a:masterClrMapping/>
   </p:clrMapOvr>
+  <mc:AlternateContent xmlns:mc="http://schemas.openxmlformats.org/markup-compatibility/2006">
+    <mc:Choice xmlns:p14="http://schemas.microsoft.com/office/powerpoint/2010/main" Requires="p14">
+      <p:transition spd="slow" p14:dur="2000"/>
+    </mc:Choice>
+    <mc:Fallback>
+      <p:transition spd="slow"/>
+    </mc:Fallback>
+  </mc:AlternateContent>
+  <p:timing>
+    <p:tnLst>
+      <p:par>
+        <p:cTn id="1" dur="indefinite" restart="never" nodeType="tmRoot"/>
+      </p:par>
+    </p:tnLst>
+  </p:timing>
 </p:sld>
 </file>
 

--- a/1학기/웹 프로그래밍/2026_웹 프로그래밍_part3.pptx
+++ b/1학기/웹 프로그래밍/2026_웹 프로그래밍_part3.pptx
@@ -2,7 +2,7 @@
 <file path=ppt/presentation.xml><?xml version="1.0" encoding="utf-8"?>
 <p:presentation xmlns:a="http://schemas.openxmlformats.org/drawingml/2006/main" xmlns:r="http://schemas.openxmlformats.org/officeDocument/2006/relationships" xmlns:p="http://schemas.openxmlformats.org/presentationml/2006/main" xmlns:p14="http://schemas.microsoft.com/office/powerpoint/2010/main" saveSubsetFonts="1">
   <p:sldMasterIdLst>
-    <p:sldMasterId id="2147483669" r:id="rId5"/>
+    <p:sldMasterId id="2147483671" r:id="rId5"/>
   </p:sldMasterIdLst>
   <p:notesMasterIdLst>
     <p:notesMasterId r:id="rId7"/>
@@ -23,27 +23,27 @@
     <p:sldId id="433" r:id="rId21"/>
     <p:sldId id="434" r:id="rId22"/>
     <p:sldId id="435" r:id="rId23"/>
-    <p:sldId id="436" r:id="rId25"/>
-    <p:sldId id="437" r:id="rId26"/>
-    <p:sldId id="438" r:id="rId27"/>
-    <p:sldId id="439" r:id="rId28"/>
-    <p:sldId id="440" r:id="rId29"/>
-    <p:sldId id="441" r:id="rId30"/>
-    <p:sldId id="442" r:id="rId31"/>
-    <p:sldId id="443" r:id="rId32"/>
-    <p:sldId id="444" r:id="rId33"/>
-    <p:sldId id="445" r:id="rId34"/>
-    <p:sldId id="448" r:id="rId35"/>
-    <p:sldId id="449" r:id="rId36"/>
-    <p:sldId id="450" r:id="rId37"/>
-    <p:sldId id="451" r:id="rId38"/>
-    <p:sldId id="452" r:id="rId39"/>
-    <p:sldId id="453" r:id="rId40"/>
-    <p:sldId id="454" r:id="rId41"/>
-    <p:sldId id="446" r:id="rId42"/>
-    <p:sldId id="447" r:id="rId43"/>
-    <p:sldId id="455" r:id="rId44"/>
-    <p:sldId id="457" r:id="rId45"/>
+    <p:sldId id="436" r:id="rId24"/>
+    <p:sldId id="437" r:id="rId25"/>
+    <p:sldId id="438" r:id="rId26"/>
+    <p:sldId id="439" r:id="rId27"/>
+    <p:sldId id="440" r:id="rId28"/>
+    <p:sldId id="441" r:id="rId29"/>
+    <p:sldId id="442" r:id="rId30"/>
+    <p:sldId id="443" r:id="rId31"/>
+    <p:sldId id="444" r:id="rId32"/>
+    <p:sldId id="445" r:id="rId33"/>
+    <p:sldId id="448" r:id="rId34"/>
+    <p:sldId id="449" r:id="rId35"/>
+    <p:sldId id="450" r:id="rId36"/>
+    <p:sldId id="451" r:id="rId37"/>
+    <p:sldId id="452" r:id="rId38"/>
+    <p:sldId id="453" r:id="rId39"/>
+    <p:sldId id="454" r:id="rId40"/>
+    <p:sldId id="446" r:id="rId41"/>
+    <p:sldId id="447" r:id="rId42"/>
+    <p:sldId id="455" r:id="rId43"/>
+    <p:sldId id="457" r:id="rId44"/>
   </p:sldIdLst>
   <p:sldSz cx="9144000" cy="6858000"/>
   <p:notesSz cx="6858000" cy="9144000"/>
@@ -145,12 +145,12 @@
   <p:extLst>
     <p:ext uri="{EFAFB233-063F-42B5-8137-9DF3F51BA10A}">
       <p15:sldGuideLst xmlns:p15="http://schemas.microsoft.com/office/powerpoint/2012/main">
-        <p15:guide id="1" orient="horz" pos="2157" userDrawn="0">
+        <p15:guide id="1" orient="horz" pos="2156" userDrawn="0">
           <p15:clr>
             <a:srgbClr val="A4A3A4"/>
           </p15:clr>
         </p15:guide>
-        <p15:guide id="2" pos="2877" userDrawn="0">
+        <p15:guide id="2" pos="2876" userDrawn="0">
           <p15:clr>
             <a:srgbClr val="A4A3A4"/>
           </p15:clr>
@@ -184,6 +184,162 @@
     </inkml:brush>
   </inkml:definitions>
   <inkml:trace contextRef="#ctx0" brushRef="#br0">2151 0,'-52'105,"-248"319,-53 17,-106-53,-88 35,248-229,210-141,72-35,-1-1,1-17,34 18,18-18,124 0,282-53,194-18,-159 18,-35 36,-352 17,-1 0,-18 0,-52 0,0 0,-1 0,-17-18,-17 1,-36-36,-159-88,-176-89,141 71,0 1,-176-142,229 159,17 17,54 1,-71-54,141 125,-35-19,70 53,18 1,-18 17,18 17,0 36,0 159,124 370,158 318,-35-195,35-88,-211-422,-36-125,-35-35,0-17,0 0,0-36,18 18,-18-53,35-53,0-141,53-70,36-71,105-177,-105 301,-36 87,-35 89,-18 0,-17 70,-18 1,0-1,0 0,17 1,1-19,17-34,-17-54,70-34,-70 105,-1 17,1 1,-18 53,-18-1,18-17</inkml:trace>
+</inkml:ink>
+</file>
+
+<file path=ppt/ink/ink10.xml><?xml version="1.0" encoding="utf-8"?>
+<inkml:ink xmlns:inkml="http://www.w3.org/2003/InkML">
+  <inkml:definitions>
+    <inkml:context xml:id="ctx0">
+      <inkml:inkSource xml:id="inkSrc0">
+        <inkml:traceFormat>
+          <inkml:channel name="X" type="integer" max="3200" units="cm"/>
+          <inkml:channel name="Y" type="integer" max="1080" units="cm"/>
+        </inkml:traceFormat>
+        <inkml:channelProperties>
+          <inkml:channelProperty channel="X" name="resolution" value="66.666656" units="1/cm"/>
+          <inkml:channelProperty channel="Y" name="resolution" value="40.000000" units="1/cm"/>
+        </inkml:channelProperties>
+      </inkml:inkSource>
+    </inkml:context>
+    <inkml:brush xml:id="br0">
+      <inkml:brushProperty name="width" value="0.035278" units="cm"/>
+      <inkml:brushProperty name="height" value="0.035278" units="cm"/>
+      <inkml:brushProperty name="color" value="#ff0000"/>
+      <inkml:brushProperty name="fitToCurve" value="1"/>
+    </inkml:brush>
+  </inkml:definitions>
+  <inkml:trace contextRef="#ctx0" brushRef="#br0">3619 380,'-127'212,"-212"148,-21-21,-105-1,-318 213,402-297,296-191,127-63,1 0,20 0,22-21,21 21,359-85,170 1,-233 20,487-63,-571 127,105 0,-338 0,-85-21,0 0,-85-43,-275-190,106 85,-550-233,-1186-297,1398 488,274 62,86 44,232 84,21 21,21 126,64 23,148 210,42 65,64 105,-191-233,149 212,-191-296,21 21,-127-170,43 43,-64-64,21-42,0-42,0-64,21-42,22-212,21-148,-22 297,22-297,-1 211,-84 191,64-21,-43 85,64-43,-64 22,64-43,-22 64,-42 21,-21-1,43 1,-43 0,21 21,-21 0</inkml:trace>
+</inkml:ink>
+</file>
+
+<file path=ppt/ink/ink11.xml><?xml version="1.0" encoding="utf-8"?>
+<inkml:ink xmlns:inkml="http://www.w3.org/2003/InkML">
+  <inkml:definitions>
+    <inkml:context xml:id="ctx0">
+      <inkml:inkSource xml:id="inkSrc0">
+        <inkml:traceFormat>
+          <inkml:channel name="X" type="integer" max="3200" units="cm"/>
+          <inkml:channel name="Y" type="integer" max="1080" units="cm"/>
+        </inkml:traceFormat>
+        <inkml:channelProperties>
+          <inkml:channelProperty channel="X" name="resolution" value="66.666656" units="1/cm"/>
+          <inkml:channelProperty channel="Y" name="resolution" value="40.000000" units="1/cm"/>
+        </inkml:channelProperties>
+      </inkml:inkSource>
+    </inkml:context>
+    <inkml:brush xml:id="br0">
+      <inkml:brushProperty name="width" value="0.035278" units="cm"/>
+      <inkml:brushProperty name="height" value="0.035278" units="cm"/>
+      <inkml:brushProperty name="color" value="#ff0000"/>
+      <inkml:brushProperty name="fitToCurve" value="1"/>
+    </inkml:brush>
+  </inkml:definitions>
+  <inkml:trace contextRef="#ctx0" brushRef="#br0">3365 0,'-21'105,"-43"107,1-64,-1 0,-486 614,359-550,-274 317,338-360,-170 149,22-22,42 1,85-65,64-62,-22-1,0 22,0 63,64-170,-22 1,1 0,42-1,-22 1,-20-22,42-20,21-1,0-21,-22 0,-20 22,21 41,-21-62,42 20,0-21,-21-21,21 0</inkml:trace>
+</inkml:ink>
+</file>
+
+<file path=ppt/ink/ink12.xml><?xml version="1.0" encoding="utf-8"?>
+<inkml:ink xmlns:inkml="http://www.w3.org/2003/InkML">
+  <inkml:definitions>
+    <inkml:context xml:id="ctx0">
+      <inkml:inkSource xml:id="inkSrc0">
+        <inkml:traceFormat>
+          <inkml:channel name="X" type="integer" max="3200" units="cm"/>
+          <inkml:channel name="Y" type="integer" max="1080" units="cm"/>
+        </inkml:traceFormat>
+        <inkml:channelProperties>
+          <inkml:channelProperty channel="X" name="resolution" value="66.666656" units="1/cm"/>
+          <inkml:channelProperty channel="Y" name="resolution" value="40.000000" units="1/cm"/>
+        </inkml:channelProperties>
+      </inkml:inkSource>
+    </inkml:context>
+    <inkml:brush xml:id="br0">
+      <inkml:brushProperty name="width" value="0.035278" units="cm"/>
+      <inkml:brushProperty name="height" value="0.035278" units="cm"/>
+      <inkml:brushProperty name="color" value="#ff0000"/>
+      <inkml:brushProperty name="fitToCurve" value="1"/>
+    </inkml:brush>
+  </inkml:definitions>
+  <inkml:trace contextRef="#ctx0" brushRef="#br0">677 0,'-21'0,"-1"21,-41 21,-1-21,22 21,-21-20,20 20,-20-21,-43 43,64-22,-1 0,-41 1,63-22,84-21,-42 0,43 0,-43 0,63 0,1 0,21 0,-64 0,-21 0,22 0,-22 0,-42 0,0 0,21 0</inkml:trace>
+</inkml:ink>
+</file>
+
+<file path=ppt/ink/ink13.xml><?xml version="1.0" encoding="utf-8"?>
+<inkml:ink xmlns:inkml="http://www.w3.org/2003/InkML">
+  <inkml:definitions>
+    <inkml:context xml:id="ctx0">
+      <inkml:inkSource xml:id="inkSrc0">
+        <inkml:traceFormat>
+          <inkml:channel name="X" type="integer" max="3200" units="cm"/>
+          <inkml:channel name="Y" type="integer" max="1080" units="cm"/>
+        </inkml:traceFormat>
+        <inkml:channelProperties>
+          <inkml:channelProperty channel="X" name="resolution" value="66.666656" units="1/cm"/>
+          <inkml:channelProperty channel="Y" name="resolution" value="40.000000" units="1/cm"/>
+        </inkml:channelProperties>
+      </inkml:inkSource>
+    </inkml:context>
+    <inkml:brush xml:id="br0">
+      <inkml:brushProperty name="width" value="0.035278" units="cm"/>
+      <inkml:brushProperty name="height" value="0.035278" units="cm"/>
+      <inkml:brushProperty name="color" value="#ff0000"/>
+      <inkml:brushProperty name="fitToCurve" value="1"/>
+    </inkml:brush>
+  </inkml:definitions>
+  <inkml:trace contextRef="#ctx0" brushRef="#br0">190 0,'0'42,"0"-21,0 64,-64 190,1-21,0-21,63-106,0-127</inkml:trace>
+</inkml:ink>
+</file>
+
+<file path=ppt/ink/ink14.xml><?xml version="1.0" encoding="utf-8"?>
+<inkml:ink xmlns:inkml="http://www.w3.org/2003/InkML">
+  <inkml:definitions>
+    <inkml:context xml:id="ctx0">
+      <inkml:inkSource xml:id="inkSrc0">
+        <inkml:traceFormat>
+          <inkml:channel name="X" type="integer" max="3200" units="cm"/>
+          <inkml:channel name="Y" type="integer" max="1080" units="cm"/>
+        </inkml:traceFormat>
+        <inkml:channelProperties>
+          <inkml:channelProperty channel="X" name="resolution" value="66.666656" units="1/cm"/>
+          <inkml:channelProperty channel="Y" name="resolution" value="40.000000" units="1/cm"/>
+        </inkml:channelProperties>
+      </inkml:inkSource>
+    </inkml:context>
+    <inkml:brush xml:id="br0">
+      <inkml:brushProperty name="width" value="0.035278" units="cm"/>
+      <inkml:brushProperty name="height" value="0.035278" units="cm"/>
+      <inkml:brushProperty name="color" value="#ff0000"/>
+      <inkml:brushProperty name="fitToCurve" value="1"/>
+    </inkml:brush>
+  </inkml:definitions>
+  <inkml:trace contextRef="#ctx0" brushRef="#br0">719 0,'-21'42,"21"-21,-85 106,1 42,-1 22,0-85,-126 148,147-149,22-41,21-43,21 0,-21-21,21 0</inkml:trace>
+</inkml:ink>
+</file>
+
+<file path=ppt/ink/ink15.xml><?xml version="1.0" encoding="utf-8"?>
+<inkml:ink xmlns:inkml="http://www.w3.org/2003/InkML">
+  <inkml:definitions>
+    <inkml:context xml:id="ctx0">
+      <inkml:inkSource xml:id="inkSrc0">
+        <inkml:traceFormat>
+          <inkml:channel name="X" type="integer" max="3200" units="cm"/>
+          <inkml:channel name="Y" type="integer" max="1080" units="cm"/>
+        </inkml:traceFormat>
+        <inkml:channelProperties>
+          <inkml:channelProperty channel="X" name="resolution" value="66.666656" units="1/cm"/>
+          <inkml:channelProperty channel="Y" name="resolution" value="40.000000" units="1/cm"/>
+        </inkml:channelProperties>
+      </inkml:inkSource>
+    </inkml:context>
+    <inkml:brush xml:id="br0">
+      <inkml:brushProperty name="width" value="0.035278" units="cm"/>
+      <inkml:brushProperty name="height" value="0.035278" units="cm"/>
+      <inkml:brushProperty name="color" value="#ff0000"/>
+      <inkml:brushProperty name="fitToCurve" value="1"/>
+    </inkml:brush>
+  </inkml:definitions>
+  <inkml:trace contextRef="#ctx0" brushRef="#br0">0 0,'0'42,"0"42,0-20,0 42,0 42,0 42,0-126,0-22,0-21,0 1,0-1,0-21</inkml:trace>
 </inkml:ink>
 </file>
 
@@ -235,7 +391,7 @@
       <inkml:brushProperty name="fitToCurve" value="1"/>
     </inkml:brush>
   </inkml:definitions>
-  <inkml:trace contextRef="#ctx0" brushRef="#br0">3555 0,'0'42,"-275"233,-85 127,-232 85,295-233,-380 381,275-275,127-43,42-84,85-42,127-128,-1-42,65-21,-1 0,43 0,21 0,126 0,382 64,64 20,-340-20,1-22,42 22,-233-43,-63-21,-1 0,1 21,-21-21,-22 21,0-21,1 0,-22 0,0 0,-21-21,-21-21,0-1,-64-62,-42-65,-106-63,-63-84,42 63,-508-402,254 254,42 21,127 42,-126-42,338 275,85 85,42 63,0 1,0 41,0 86,0 105,84 85,43 63,233 868,-148-635,-64-84,-64-255,22 22,-63-254,-22-1,0-41,0-1,21-21,-20-21,-1 0,0-21,21-64,128-338,-86 275,107-233,-22 127,-21-43,0 43,85-232,-106 253,21 0,43-212,-128 297,-20 21,-43 106,21 0,-21 0,0 21</inkml:trace>
+  <inkml:trace contextRef="#ctx0" brushRef="#br0">2434 0,'-71'105,"-70"89,-353 494,71-176,88-71,158-247,-52 123,17-34,1-1,175-229,-34 35,35-53,35 0,0-35</inkml:trace>
 </inkml:ink>
 </file>
 
@@ -261,7 +417,7 @@
       <inkml:brushProperty name="fitToCurve" value="1"/>
     </inkml:brush>
   </inkml:definitions>
-  <inkml:trace contextRef="#ctx0" brushRef="#br0">2434 0,'-71'105,"-70"89,-353 494,71-176,88-71,158-247,-52 123,17-34,1-1,175-229,-34 35,35-53,35 0,0-35</inkml:trace>
+  <inkml:trace contextRef="#ctx0" brushRef="#br0">0 299,'176'-53,"247"-70,-123 52,-159 36,-17 18,-36 34,-71 36,19 53,-19 35,-34 53,-54 18,18-106,-70 105,-71-52,-53 17,159-140,70-19,-35-17,53 18,-18-18,18-18,18 1,106-1,70 0,-106 18,106 0,-106 18,53 17,-70-17,-36 17,-35 36,-53-1,-106 89,-52 17,-54-34,194-90,-123 1,89-35,-54-18,159 0</inkml:trace>
 </inkml:ink>
 </file>
 
@@ -287,7 +443,7 @@
       <inkml:brushProperty name="fitToCurve" value="1"/>
     </inkml:brush>
   </inkml:definitions>
-  <inkml:trace contextRef="#ctx0" brushRef="#br0">0 299,'176'-53,"247"-70,-123 52,-159 36,-17 18,-36 34,-71 36,19 53,-19 35,-34 53,-54 18,18-106,-70 105,-71-52,-53 17,159-140,70-19,-35-17,53 18,-18-18,18-18,18 1,106-1,70 0,-106 18,106 0,-106 18,53 17,-70-17,-36 17,-35 36,-53-1,-106 89,-52 17,-54-34,194-90,-123 1,89-35,-54-18,159 0</inkml:trace>
+  <inkml:trace contextRef="#ctx0" brushRef="#br0">1411 0,'-18'70,"-176"300,-124 142,-140 246,193-264,159-353,71-105,18-1,17-35</inkml:trace>
 </inkml:ink>
 </file>
 
@@ -313,7 +469,7 @@
       <inkml:brushProperty name="fitToCurve" value="1"/>
     </inkml:brush>
   </inkml:definitions>
-  <inkml:trace contextRef="#ctx0" brushRef="#br0">1411 0,'-18'70,"-176"300,-124 142,-140 246,193-264,159-353,71-105,18-1,17-35</inkml:trace>
+  <inkml:trace contextRef="#ctx0" brushRef="#br0">158 0,'0'158,"0"266,-17-1,-19-159,-34 54,52-53,1-54,17-70,0-70,0-1,17-17,-17-17,18-19,-18-17</inkml:trace>
 </inkml:ink>
 </file>
 
@@ -339,7 +495,7 @@
       <inkml:brushProperty name="fitToCurve" value="1"/>
     </inkml:brush>
   </inkml:definitions>
-  <inkml:trace contextRef="#ctx0" brushRef="#br0">158 0,'0'158,"0"266,-17-1,-19-159,-34 54,52-53,1-54,17-70,0-70,0-1,17-17,-17-17,18-19,-18-17</inkml:trace>
+  <inkml:trace contextRef="#ctx0" brushRef="#br0">1075 194,'-88'-36,"-159"-70,-105 54,158 104,88 160,53 123,18-123,35-124,0-35,0-35,35-1,53-17,0 0,265-88,35-53,-229 70,70-34,-17-19,-142 71,36-35,-35 17,-54 71,19-52,-19 52,-17 17,-35 18,-36 54,-70 158,35-71,-123 530,141-336,35-158,35-71,18-71,-17-17,-1-18,-17 36,0 0,35-71</inkml:trace>
 </inkml:ink>
 </file>
 
@@ -365,7 +521,7 @@
       <inkml:brushProperty name="fitToCurve" value="1"/>
     </inkml:brush>
   </inkml:definitions>
-  <inkml:trace contextRef="#ctx0" brushRef="#br0">1075 194,'-88'-36,"-159"-70,-105 54,158 104,88 160,53 123,18-123,35-124,0-35,0-35,35-1,53-17,0 0,265-88,35-53,-229 70,70-34,-17-19,-142 71,36-35,-35 17,-54 71,19-52,-19 52,-17 17,-35 18,-36 54,-70 158,35-71,-123 530,141-336,35-158,35-71,18-71,-17-17,-1-18,-17 36,0 0,35-71</inkml:trace>
+  <inkml:trace contextRef="#ctx0" brushRef="#br0">2518 486,'-148'360,"-296"339,84-107,-212 107,234-339,253-255,-63 22,148-84,-21-22,-1-21,22 21,22-42,41 21,43-42,127 20,592-41,-20 63,-255 0,-338-21,42 0,-170-1,-20 1,-1 21,-42-21,1 21,-22-21,-22 0,-41-22,-43-41,-169-128,-1122-1016,635 509,296 295,-21 43,382 276,84 84,42 42,0 42,63 22,22 105,42 64,170 572,-170-255,127 255,-127-191,-105-402,20 21,1 42,-1-106,-42-105,-21-64,22 0,-22-42,0 0,0-21,0 21,63-149,43-147,127-128,211-465,-63-42,-169 274,-127 382,-85 190,21 64,-21 21,0 21</inkml:trace>
 </inkml:ink>
 </file>
 
@@ -391,7 +547,7 @@
       <inkml:brushProperty name="fitToCurve" value="1"/>
     </inkml:brush>
   </inkml:definitions>
-  <inkml:trace contextRef="#ctx0" brushRef="#br0">2518 486,'-148'360,"-296"339,84-107,-212 107,234-339,253-255,-63 22,148-84,-21-22,-1-21,22 21,22-42,41 21,43-42,127 20,592-41,-20 63,-255 0,-338-21,42 0,-170-1,-20 1,-1 21,-42-21,1 21,-22-21,-22 0,-41-22,-43-41,-169-128,-1122-1016,635 509,296 295,-21 43,382 276,84 84,42 42,0 42,63 22,22 105,42 64,170 572,-170-255,127 255,-127-191,-105-402,20 21,1 42,-1-106,-42-105,-21-64,22 0,-22-42,0 0,0-21,0 21,63-149,43-147,127-128,211-465,-63-42,-169 274,-127 382,-85 190,21 64,-21 21,0 21</inkml:trace>
+  <inkml:trace contextRef="#ctx0" brushRef="#br0">3555 0,'0'42,"-275"233,-85 127,-232 85,295-233,-380 381,275-275,127-43,42-84,85-42,127-128,-1-42,65-21,-1 0,43 0,21 0,126 0,382 64,64 20,-340-20,1-22,42 22,-233-43,-63-21,-1 0,1 21,-21-21,-22 21,0-21,1 0,-22 0,0 0,-21-21,-21-21,0-1,-64-62,-42-65,-106-63,-63-84,42 63,-508-402,254 254,42 21,127 42,-126-42,338 275,85 85,42 63,0 1,0 41,0 86,0 105,84 85,43 63,233 868,-148-635,-64-84,-64-255,22 22,-63-254,-22-1,0-41,0-1,21-21,-20-21,-1 0,0-21,21-64,128-338,-86 275,107-233,-22 127,-21-43,0 43,85-232,-106 253,21 0,43-212,-128 297,-20 21,-43 106,21 0,-21 0,0 21</inkml:trace>
 </inkml:ink>
 </file>
 
@@ -4275,7 +4431,7 @@
 </file>
 
 <file path=ppt/slides/slide15.xml><?xml version="1.0" encoding="utf-8"?>
-<p:sld xmlns:a="http://schemas.openxmlformats.org/drawingml/2006/main" xmlns:r="http://schemas.openxmlformats.org/officeDocument/2006/relationships" xmlns:p="http://schemas.openxmlformats.org/presentationml/2006/main">
+<p:sld xmlns:a="http://schemas.openxmlformats.org/drawingml/2006/main" xmlns:r="http://schemas.openxmlformats.org/officeDocument/2006/relationships" xmlns:p="http://schemas.openxmlformats.org/presentationml/2006/main" xmlns:p14="http://schemas.microsoft.com/office/powerpoint/2010/main">
   <p:cSld>
     <p:spTree>
       <p:nvGrpSpPr>
@@ -4307,7 +4463,12 @@
             <p:ph type="title"/>
           </p:nvPr>
         </p:nvSpPr>
-        <p:spPr/>
+        <p:spPr>
+          <a:xfrm>
+            <a:off x="443230" y="146050"/>
+            <a:ext cx="7773035" cy="762635"/>
+          </a:xfrm>
+        </p:spPr>
         <p:txBody>
           <a:bodyPr/>
           <a:lstStyle/>
@@ -4344,7 +4505,12 @@
             <p:ph type="sldNum" sz="quarter" idx="10"/>
           </p:nvPr>
         </p:nvSpPr>
-        <p:spPr/>
+        <p:spPr>
+          <a:xfrm>
+            <a:off x="7112000" y="6419850"/>
+            <a:ext cx="1905635" cy="305435"/>
+          </a:xfrm>
+        </p:spPr>
         <p:txBody>
           <a:bodyPr/>
           <a:lstStyle/>
@@ -4379,7 +4545,12 @@
             <p:ph type="ftr" sz="quarter" idx="11"/>
           </p:nvPr>
         </p:nvSpPr>
-        <p:spPr/>
+        <p:spPr>
+          <a:xfrm>
+            <a:off x="897255" y="6393180"/>
+            <a:ext cx="3110230" cy="349885"/>
+          </a:xfrm>
+        </p:spPr>
         <p:txBody>
           <a:bodyPr/>
           <a:lstStyle/>
@@ -4405,8 +4576,8 @@
         </p:nvSpPr>
         <p:spPr>
           <a:xfrm>
-            <a:off x="251520" y="1048961"/>
-            <a:ext cx="4824536" cy="5216813"/>
+            <a:off x="251460" y="1049020"/>
+            <a:ext cx="4824730" cy="5216525"/>
           </a:xfrm>
           <a:prstGeom prst="rect">
             <a:avLst/>
@@ -4798,8 +4969,8 @@
         </p:blipFill>
         <p:spPr>
           <a:xfrm>
-            <a:off x="5436096" y="3372006"/>
-            <a:ext cx="3158316" cy="2880321"/>
+            <a:off x="5436235" y="3371850"/>
+            <a:ext cx="3158490" cy="2880360"/>
           </a:xfrm>
           <a:prstGeom prst="rect">
             <a:avLst/>
@@ -4811,6 +4982,45 @@
           </a:ln>
         </p:spPr>
       </p:pic>
+      <mc:AlternateContent xmlns:mc="http://schemas.openxmlformats.org/markup-compatibility/2006" xmlns:p14="http://schemas.microsoft.com/office/powerpoint/2010/main">
+        <mc:Choice Requires="p14">
+          <p:contentPart p14:bwMode="auto" r:id="rId4">
+            <p14:nvContentPartPr>
+              <p14:cNvPr id="9" name="잉크 1"/>
+              <p14:cNvContentPartPr/>
+              <p14:nvPr/>
+            </p14:nvContentPartPr>
+            <p14:xfrm>
+              <a:off x="5707380" y="1348740"/>
+              <a:ext cx="1668780" cy="1097280"/>
+            </p14:xfrm>
+          </p:contentPart>
+        </mc:Choice>
+        <mc:Fallback>
+          <p:pic>
+            <p:nvPicPr>
+              <p:cNvPr id="9" name="잉크 1"/>
+              <p:cNvPicPr/>
+              <p:nvPr/>
+            </p:nvPicPr>
+            <p:blipFill>
+              <a:blip r:embed="rId5"/>
+              <a:stretch>
+                <a:fillRect/>
+              </a:stretch>
+            </p:blipFill>
+            <p:spPr>
+              <a:xfrm>
+                <a:off x="5707380" y="1348740"/>
+                <a:ext cx="1668780" cy="1097280"/>
+              </a:xfrm>
+              <a:prstGeom prst="rect">
+                <a:avLst/>
+              </a:prstGeom>
+            </p:spPr>
+          </p:pic>
+        </mc:Fallback>
+      </mc:AlternateContent>
     </p:spTree>
     <p:extLst>
       <p:ext uri="{BB962C8B-B14F-4D97-AF65-F5344CB8AC3E}">
@@ -4821,11 +5031,26 @@
   <p:clrMapOvr>
     <a:masterClrMapping/>
   </p:clrMapOvr>
+  <mc:AlternateContent xmlns:mc="http://schemas.openxmlformats.org/markup-compatibility/2006">
+    <mc:Choice xmlns:p14="http://schemas.microsoft.com/office/powerpoint/2010/main" Requires="p14">
+      <p:transition spd="slow" p14:dur="2000"/>
+    </mc:Choice>
+    <mc:Fallback>
+      <p:transition spd="slow"/>
+    </mc:Fallback>
+  </mc:AlternateContent>
+  <p:timing>
+    <p:tnLst>
+      <p:par>
+        <p:cTn id="1" dur="indefinite" restart="never" nodeType="tmRoot"/>
+      </p:par>
+    </p:tnLst>
+  </p:timing>
 </p:sld>
 </file>
 
 <file path=ppt/slides/slide16.xml><?xml version="1.0" encoding="utf-8"?>
-<p:sld xmlns:a="http://schemas.openxmlformats.org/drawingml/2006/main" xmlns:r="http://schemas.openxmlformats.org/officeDocument/2006/relationships" xmlns:p="http://schemas.openxmlformats.org/presentationml/2006/main">
+<p:sld xmlns:a="http://schemas.openxmlformats.org/drawingml/2006/main" xmlns:r="http://schemas.openxmlformats.org/officeDocument/2006/relationships" xmlns:p="http://schemas.openxmlformats.org/presentationml/2006/main" xmlns:p14="http://schemas.microsoft.com/office/powerpoint/2010/main">
   <p:cSld>
     <p:spTree>
       <p:nvGrpSpPr>
@@ -4857,7 +5082,12 @@
             <p:ph type="title"/>
           </p:nvPr>
         </p:nvSpPr>
-        <p:spPr/>
+        <p:spPr>
+          <a:xfrm>
+            <a:off x="443230" y="146050"/>
+            <a:ext cx="7773035" cy="762635"/>
+          </a:xfrm>
+        </p:spPr>
         <p:txBody>
           <a:bodyPr/>
           <a:lstStyle/>
@@ -4896,8 +5126,8 @@
         </p:nvSpPr>
         <p:spPr>
           <a:xfrm>
-            <a:off x="107504" y="1197527"/>
-            <a:ext cx="4752528" cy="5019675"/>
+            <a:off x="107315" y="1197610"/>
+            <a:ext cx="4752340" cy="5019675"/>
           </a:xfrm>
         </p:spPr>
         <p:txBody>
@@ -5067,7 +5297,12 @@
             <p:ph type="sldNum" sz="quarter" idx="10"/>
           </p:nvPr>
         </p:nvSpPr>
-        <p:spPr/>
+        <p:spPr>
+          <a:xfrm>
+            <a:off x="7112000" y="6419850"/>
+            <a:ext cx="1905635" cy="305435"/>
+          </a:xfrm>
+        </p:spPr>
         <p:txBody>
           <a:bodyPr/>
           <a:lstStyle/>
@@ -5102,7 +5337,12 @@
             <p:ph type="ftr" sz="quarter" idx="11"/>
           </p:nvPr>
         </p:nvSpPr>
-        <p:spPr/>
+        <p:spPr>
+          <a:xfrm>
+            <a:off x="897255" y="6393180"/>
+            <a:ext cx="3110230" cy="349885"/>
+          </a:xfrm>
+        </p:spPr>
         <p:txBody>
           <a:bodyPr/>
           <a:lstStyle/>
@@ -5128,8 +5368,8 @@
         </p:nvSpPr>
         <p:spPr>
           <a:xfrm>
-            <a:off x="4802920" y="1075874"/>
-            <a:ext cx="4248472" cy="5262979"/>
+            <a:off x="4803140" y="1075690"/>
+            <a:ext cx="4248785" cy="5262880"/>
           </a:xfrm>
           <a:prstGeom prst="rect">
             <a:avLst/>
@@ -5387,6 +5627,201 @@
           </a:p>
         </p:txBody>
       </p:sp>
+      <mc:AlternateContent xmlns:mc="http://schemas.openxmlformats.org/markup-compatibility/2006" xmlns:p14="http://schemas.microsoft.com/office/powerpoint/2010/main">
+        <mc:Choice Requires="p14">
+          <p:contentPart p14:bwMode="auto" r:id="rId1">
+            <p14:nvContentPartPr>
+              <p14:cNvPr id="7" name="잉크 2"/>
+              <p14:cNvContentPartPr/>
+              <p14:nvPr/>
+            </p14:nvContentPartPr>
+            <p14:xfrm>
+              <a:off x="7147560" y="4381500"/>
+              <a:ext cx="1211580" cy="1813560"/>
+            </p14:xfrm>
+          </p:contentPart>
+        </mc:Choice>
+        <mc:Fallback>
+          <p:pic>
+            <p:nvPicPr>
+              <p:cNvPr id="7" name="잉크 2"/>
+              <p:cNvPicPr/>
+              <p:nvPr/>
+            </p:nvPicPr>
+            <p:blipFill>
+              <a:blip r:embed="rId2"/>
+              <a:stretch>
+                <a:fillRect/>
+              </a:stretch>
+            </p:blipFill>
+            <p:spPr>
+              <a:xfrm>
+                <a:off x="7147560" y="4381500"/>
+                <a:ext cx="1211580" cy="1813560"/>
+              </a:xfrm>
+              <a:prstGeom prst="rect">
+                <a:avLst/>
+              </a:prstGeom>
+            </p:spPr>
+          </p:pic>
+        </mc:Fallback>
+      </mc:AlternateContent>
+      <mc:AlternateContent xmlns:mc="http://schemas.openxmlformats.org/markup-compatibility/2006" xmlns:p14="http://schemas.microsoft.com/office/powerpoint/2010/main">
+        <mc:Choice Requires="p14">
+          <p:contentPart p14:bwMode="auto" r:id="rId3">
+            <p14:nvContentPartPr>
+              <p14:cNvPr id="8" name="잉크 3"/>
+              <p14:cNvContentPartPr/>
+              <p14:nvPr/>
+            </p14:nvContentPartPr>
+            <p14:xfrm>
+              <a:off x="8229600" y="4914900"/>
+              <a:ext cx="243840" cy="152400"/>
+            </p14:xfrm>
+          </p:contentPart>
+        </mc:Choice>
+        <mc:Fallback>
+          <p:pic>
+            <p:nvPicPr>
+              <p:cNvPr id="8" name="잉크 3"/>
+              <p:cNvPicPr/>
+              <p:nvPr/>
+            </p:nvPicPr>
+            <p:blipFill>
+              <a:blip r:embed="rId4"/>
+              <a:stretch>
+                <a:fillRect/>
+              </a:stretch>
+            </p:blipFill>
+            <p:spPr>
+              <a:xfrm>
+                <a:off x="8229600" y="4914900"/>
+                <a:ext cx="243840" cy="152400"/>
+              </a:xfrm>
+              <a:prstGeom prst="rect">
+                <a:avLst/>
+              </a:prstGeom>
+            </p:spPr>
+          </p:pic>
+        </mc:Fallback>
+      </mc:AlternateContent>
+      <mc:AlternateContent xmlns:mc="http://schemas.openxmlformats.org/markup-compatibility/2006" xmlns:p14="http://schemas.microsoft.com/office/powerpoint/2010/main">
+        <mc:Choice Requires="p14">
+          <p:contentPart p14:bwMode="auto" r:id="rId5">
+            <p14:nvContentPartPr>
+              <p14:cNvPr id="9" name="잉크 4"/>
+              <p14:cNvContentPartPr/>
+              <p14:nvPr/>
+            </p14:nvContentPartPr>
+            <p14:xfrm>
+              <a:off x="8328660" y="4945380"/>
+              <a:ext cx="68580" cy="373380"/>
+            </p14:xfrm>
+          </p:contentPart>
+        </mc:Choice>
+        <mc:Fallback>
+          <p:pic>
+            <p:nvPicPr>
+              <p:cNvPr id="9" name="잉크 4"/>
+              <p:cNvPicPr/>
+              <p:nvPr/>
+            </p:nvPicPr>
+            <p:blipFill>
+              <a:blip r:embed="rId6"/>
+              <a:stretch>
+                <a:fillRect/>
+              </a:stretch>
+            </p:blipFill>
+            <p:spPr>
+              <a:xfrm>
+                <a:off x="8328660" y="4945380"/>
+                <a:ext cx="68580" cy="373380"/>
+              </a:xfrm>
+              <a:prstGeom prst="rect">
+                <a:avLst/>
+              </a:prstGeom>
+            </p:spPr>
+          </p:pic>
+        </mc:Fallback>
+      </mc:AlternateContent>
+      <mc:AlternateContent xmlns:mc="http://schemas.openxmlformats.org/markup-compatibility/2006" xmlns:p14="http://schemas.microsoft.com/office/powerpoint/2010/main">
+        <mc:Choice Requires="p14">
+          <p:contentPart p14:bwMode="auto" r:id="rId7">
+            <p14:nvContentPartPr>
+              <p14:cNvPr id="10" name="잉크 5"/>
+              <p14:cNvContentPartPr/>
+              <p14:nvPr/>
+            </p14:nvContentPartPr>
+            <p14:xfrm>
+              <a:off x="8458200" y="4968240"/>
+              <a:ext cx="259080" cy="403860"/>
+            </p14:xfrm>
+          </p:contentPart>
+        </mc:Choice>
+        <mc:Fallback>
+          <p:pic>
+            <p:nvPicPr>
+              <p:cNvPr id="10" name="잉크 5"/>
+              <p:cNvPicPr/>
+              <p:nvPr/>
+            </p:nvPicPr>
+            <p:blipFill>
+              <a:blip r:embed="rId8"/>
+              <a:stretch>
+                <a:fillRect/>
+              </a:stretch>
+            </p:blipFill>
+            <p:spPr>
+              <a:xfrm>
+                <a:off x="8458200" y="4968240"/>
+                <a:ext cx="259080" cy="403860"/>
+              </a:xfrm>
+              <a:prstGeom prst="rect">
+                <a:avLst/>
+              </a:prstGeom>
+            </p:spPr>
+          </p:pic>
+        </mc:Fallback>
+      </mc:AlternateContent>
+      <mc:AlternateContent xmlns:mc="http://schemas.openxmlformats.org/markup-compatibility/2006" xmlns:p14="http://schemas.microsoft.com/office/powerpoint/2010/main">
+        <mc:Choice Requires="p14">
+          <p:contentPart p14:bwMode="auto" r:id="rId9">
+            <p14:nvContentPartPr>
+              <p14:cNvPr id="11" name="잉크 6"/>
+              <p14:cNvContentPartPr/>
+              <p14:nvPr/>
+            </p14:nvContentPartPr>
+            <p14:xfrm>
+              <a:off x="8823960" y="5067300"/>
+              <a:ext cx="0" cy="289560"/>
+            </p14:xfrm>
+          </p:contentPart>
+        </mc:Choice>
+        <mc:Fallback>
+          <p:pic>
+            <p:nvPicPr>
+              <p:cNvPr id="11" name="잉크 6"/>
+              <p:cNvPicPr/>
+              <p:nvPr/>
+            </p:nvPicPr>
+            <p:blipFill>
+              <a:blip r:embed="rId10"/>
+              <a:stretch>
+                <a:fillRect/>
+              </a:stretch>
+            </p:blipFill>
+            <p:spPr>
+              <a:xfrm>
+                <a:off x="8823960" y="5067300"/>
+                <a:ext cx="0" cy="289560"/>
+              </a:xfrm>
+              <a:prstGeom prst="rect">
+                <a:avLst/>
+              </a:prstGeom>
+            </p:spPr>
+          </p:pic>
+        </mc:Fallback>
+      </mc:AlternateContent>
     </p:spTree>
     <p:extLst>
       <p:ext uri="{BB962C8B-B14F-4D97-AF65-F5344CB8AC3E}">
@@ -5397,6 +5832,21 @@
   <p:clrMapOvr>
     <a:masterClrMapping/>
   </p:clrMapOvr>
+  <mc:AlternateContent xmlns:mc="http://schemas.openxmlformats.org/markup-compatibility/2006">
+    <mc:Choice xmlns:p14="http://schemas.microsoft.com/office/powerpoint/2010/main" Requires="p14">
+      <p:transition spd="slow" p14:dur="2000"/>
+    </mc:Choice>
+    <mc:Fallback>
+      <p:transition spd="slow"/>
+    </mc:Fallback>
+  </mc:AlternateContent>
+  <p:timing>
+    <p:tnLst>
+      <p:par>
+        <p:cTn id="1" dur="indefinite" restart="never" nodeType="tmRoot"/>
+      </p:par>
+    </p:tnLst>
+  </p:timing>
 </p:sld>
 </file>
 

--- a/1학기/웹 프로그래밍/2026_웹 프로그래밍_part3.pptx
+++ b/1학기/웹 프로그래밍/2026_웹 프로그래밍_part3.pptx
@@ -2,7 +2,7 @@
 <file path=ppt/presentation.xml><?xml version="1.0" encoding="utf-8"?>
 <p:presentation xmlns:a="http://schemas.openxmlformats.org/drawingml/2006/main" xmlns:r="http://schemas.openxmlformats.org/officeDocument/2006/relationships" xmlns:p="http://schemas.openxmlformats.org/presentationml/2006/main" xmlns:p14="http://schemas.microsoft.com/office/powerpoint/2010/main" saveSubsetFonts="1">
   <p:sldMasterIdLst>
-    <p:sldMasterId id="2147483671" r:id="rId5"/>
+    <p:sldMasterId id="2147483678" r:id="rId5"/>
   </p:sldMasterIdLst>
   <p:notesMasterIdLst>
     <p:notesMasterId r:id="rId7"/>
@@ -23,27 +23,27 @@
     <p:sldId id="433" r:id="rId21"/>
     <p:sldId id="434" r:id="rId22"/>
     <p:sldId id="435" r:id="rId23"/>
-    <p:sldId id="436" r:id="rId24"/>
-    <p:sldId id="437" r:id="rId25"/>
-    <p:sldId id="438" r:id="rId26"/>
-    <p:sldId id="439" r:id="rId27"/>
-    <p:sldId id="440" r:id="rId28"/>
-    <p:sldId id="441" r:id="rId29"/>
-    <p:sldId id="442" r:id="rId30"/>
-    <p:sldId id="443" r:id="rId31"/>
-    <p:sldId id="444" r:id="rId32"/>
-    <p:sldId id="445" r:id="rId33"/>
-    <p:sldId id="448" r:id="rId34"/>
-    <p:sldId id="449" r:id="rId35"/>
-    <p:sldId id="450" r:id="rId36"/>
-    <p:sldId id="451" r:id="rId37"/>
-    <p:sldId id="452" r:id="rId38"/>
-    <p:sldId id="453" r:id="rId39"/>
-    <p:sldId id="454" r:id="rId40"/>
-    <p:sldId id="446" r:id="rId41"/>
-    <p:sldId id="447" r:id="rId42"/>
-    <p:sldId id="455" r:id="rId43"/>
-    <p:sldId id="457" r:id="rId44"/>
+    <p:sldId id="436" r:id="rId25"/>
+    <p:sldId id="437" r:id="rId26"/>
+    <p:sldId id="438" r:id="rId27"/>
+    <p:sldId id="439" r:id="rId28"/>
+    <p:sldId id="440" r:id="rId29"/>
+    <p:sldId id="441" r:id="rId30"/>
+    <p:sldId id="442" r:id="rId31"/>
+    <p:sldId id="443" r:id="rId32"/>
+    <p:sldId id="444" r:id="rId33"/>
+    <p:sldId id="445" r:id="rId34"/>
+    <p:sldId id="448" r:id="rId35"/>
+    <p:sldId id="449" r:id="rId36"/>
+    <p:sldId id="450" r:id="rId37"/>
+    <p:sldId id="451" r:id="rId38"/>
+    <p:sldId id="452" r:id="rId39"/>
+    <p:sldId id="453" r:id="rId40"/>
+    <p:sldId id="454" r:id="rId41"/>
+    <p:sldId id="446" r:id="rId42"/>
+    <p:sldId id="447" r:id="rId43"/>
+    <p:sldId id="455" r:id="rId44"/>
+    <p:sldId id="457" r:id="rId45"/>
   </p:sldIdLst>
   <p:sldSz cx="9144000" cy="6858000"/>
   <p:notesSz cx="6858000" cy="9144000"/>
@@ -145,12 +145,12 @@
   <p:extLst>
     <p:ext uri="{EFAFB233-063F-42B5-8137-9DF3F51BA10A}">
       <p15:sldGuideLst xmlns:p15="http://schemas.microsoft.com/office/powerpoint/2012/main">
-        <p15:guide id="1" orient="horz" pos="2156" userDrawn="0">
+        <p15:guide id="1" orient="horz" pos="2155" userDrawn="0">
           <p15:clr>
             <a:srgbClr val="A4A3A4"/>
           </p15:clr>
         </p15:guide>
-        <p15:guide id="2" pos="2876" userDrawn="0">
+        <p15:guide id="2" pos="2875" userDrawn="0">
           <p15:clr>
             <a:srgbClr val="A4A3A4"/>
           </p15:clr>
@@ -343,6 +343,110 @@
 </inkml:ink>
 </file>
 
+<file path=ppt/ink/ink16.xml><?xml version="1.0" encoding="utf-8"?>
+<inkml:ink xmlns:inkml="http://www.w3.org/2003/InkML">
+  <inkml:definitions>
+    <inkml:context xml:id="ctx0">
+      <inkml:inkSource xml:id="inkSrc0">
+        <inkml:traceFormat>
+          <inkml:channel name="X" type="integer" max="3200" units="cm"/>
+          <inkml:channel name="Y" type="integer" max="1080" units="cm"/>
+        </inkml:traceFormat>
+        <inkml:channelProperties>
+          <inkml:channelProperty channel="X" name="resolution" value="66.666656" units="1/cm"/>
+          <inkml:channelProperty channel="Y" name="resolution" value="40.000000" units="1/cm"/>
+        </inkml:channelProperties>
+      </inkml:inkSource>
+    </inkml:context>
+    <inkml:brush xml:id="br0">
+      <inkml:brushProperty name="width" value="0.035278" units="cm"/>
+      <inkml:brushProperty name="height" value="0.035278" units="cm"/>
+      <inkml:brushProperty name="color" value="#ff0000"/>
+      <inkml:brushProperty name="fitToCurve" value="1"/>
+    </inkml:brush>
+  </inkml:definitions>
+  <inkml:trace contextRef="#ctx0" brushRef="#br0">2043 0,'-44'44,"-67"89,-222 178,133-111,-200 222,266-288,-110 132,155-155,45-44,-23-45,45 0,0 23,0-45,-1 22,23 0,23-22,-1 0,22-22,23 0,44-45,67 23,-90 21,1 1,-22-22,22 22,0-23,22 1,-22-1,-23 23,23 0,-44 0,21-23,1 23,88-22,-132 21,43 1,1 22,-23-22,-21 0,21-1,-22 23,0-22,-44 22,-44 0,43-22,-66 22,23-22,-45 0,-245-67,179 67,-23-23,0-22,-89-21,200 65,0-43,23 66,21-22,1-1,-1 1,23 0,-22 22,21-22,1 22,0-23,0 23,22-22,-22 22,66 22,23 45,-1 44,1-44,44 44,-67-44,1 21,44 68,-45-67,-22-23,23 1,21 44,-43-44,43 66,-44-88,1 21,21 1,-44-1,22-21,1-1,-1 1,0-23,0 45,-22-45,22 0,-22 0,23-22,-1 22,-22 1,0-1,22-22,0 22,-22 0,22 1,-22-1,23 0,-1 0,-22 0,0-66,0-23,0 23,0-23,0-110,0 65,0 1,22 0,0-133,23 133,-23 22,0-44,0 88,1-44,-23 23,0 21,22-21,-22 21,22 23,0 0,-22-23,0 23,22-22,-22 22,23 22,-23-23,22 1,-22 0,0-23,22 45,-22-44,22-23,1 23,-23 0,22 21,0 1,-22 22</inkml:trace>
+</inkml:ink>
+</file>
+
+<file path=ppt/ink/ink17.xml><?xml version="1.0" encoding="utf-8"?>
+<inkml:ink xmlns:inkml="http://www.w3.org/2003/InkML">
+  <inkml:definitions>
+    <inkml:context xml:id="ctx0">
+      <inkml:inkSource xml:id="inkSrc0">
+        <inkml:traceFormat>
+          <inkml:channel name="X" type="integer" max="3200" units="cm"/>
+          <inkml:channel name="Y" type="integer" max="1080" units="cm"/>
+        </inkml:traceFormat>
+        <inkml:channelProperties>
+          <inkml:channelProperty channel="X" name="resolution" value="66.666656" units="1/cm"/>
+          <inkml:channelProperty channel="Y" name="resolution" value="40.000000" units="1/cm"/>
+        </inkml:channelProperties>
+      </inkml:inkSource>
+    </inkml:context>
+    <inkml:brush xml:id="br0">
+      <inkml:brushProperty name="width" value="0.035278" units="cm"/>
+      <inkml:brushProperty name="height" value="0.035278" units="cm"/>
+      <inkml:brushProperty name="color" value="#ff0000"/>
+      <inkml:brushProperty name="fitToCurve" value="1"/>
+    </inkml:brush>
+  </inkml:definitions>
+  <inkml:trace contextRef="#ctx0" brushRef="#br0">155 111,'44'0,"23"0,22 0,-22 0,21-45,-43 23,-23 22,0 0,1 0,-1-22,0 0,0 22,-44 0,0 0,0 0,-45 0,0 0,23 0,-67 0,89 0,-90 22,90-22,0 22,-45 0,45 0,0 1,0 21,22 0,-22-21,22-1,0 22,0-21,0-1,0 0,0 0,0 0,0 1,0-1,0 0,22-22,0 0,0 0,45 0,-1 0,-43 0,66-22,-67 22,44-45,-43 45,43-44,-66 22,22 0,-22 22</inkml:trace>
+</inkml:ink>
+</file>
+
+<file path=ppt/ink/ink18.xml><?xml version="1.0" encoding="utf-8"?>
+<inkml:ink xmlns:inkml="http://www.w3.org/2003/InkML">
+  <inkml:definitions>
+    <inkml:context xml:id="ctx0">
+      <inkml:inkSource xml:id="inkSrc0">
+        <inkml:traceFormat>
+          <inkml:channel name="X" type="integer" max="3200" units="cm"/>
+          <inkml:channel name="Y" type="integer" max="1080" units="cm"/>
+        </inkml:traceFormat>
+        <inkml:channelProperties>
+          <inkml:channelProperty channel="X" name="resolution" value="66.666656" units="1/cm"/>
+          <inkml:channelProperty channel="Y" name="resolution" value="40.000000" units="1/cm"/>
+        </inkml:channelProperties>
+      </inkml:inkSource>
+    </inkml:context>
+    <inkml:brush xml:id="br0">
+      <inkml:brushProperty name="width" value="0.035278" units="cm"/>
+      <inkml:brushProperty name="height" value="0.035278" units="cm"/>
+      <inkml:brushProperty name="color" value="#ff0000"/>
+      <inkml:brushProperty name="fitToCurve" value="1"/>
+    </inkml:brush>
+  </inkml:definitions>
+  <inkml:trace contextRef="#ctx0" brushRef="#br0">133 0,'0'177,"0"1,0 22,0 22,0-66,0-1,-45 156,23-222,0-22,22-1,-22 1,22 0,-22-45,22 22,0-22,0 1,0-1,0 0,0-44,0-23,0 23,0-44,0 21,0-44,0 45,0-1,0 1,0 22,0-23,0 23,0 0,22 22,22 0,1 0,-23 22,133 22,-88-21,-23-23,67 22,-88-22,-1 0,0 0,0 0,1 0,-23 0</inkml:trace>
+</inkml:ink>
+</file>
+
+<file path=ppt/ink/ink19.xml><?xml version="1.0" encoding="utf-8"?>
+<inkml:ink xmlns:inkml="http://www.w3.org/2003/InkML">
+  <inkml:definitions>
+    <inkml:context xml:id="ctx0">
+      <inkml:inkSource xml:id="inkSrc0">
+        <inkml:traceFormat>
+          <inkml:channel name="X" type="integer" max="3200" units="cm"/>
+          <inkml:channel name="Y" type="integer" max="1080" units="cm"/>
+        </inkml:traceFormat>
+        <inkml:channelProperties>
+          <inkml:channelProperty channel="X" name="resolution" value="66.666656" units="1/cm"/>
+          <inkml:channelProperty channel="Y" name="resolution" value="40.000000" units="1/cm"/>
+        </inkml:channelProperties>
+      </inkml:inkSource>
+    </inkml:context>
+    <inkml:brush xml:id="br0">
+      <inkml:brushProperty name="width" value="0.035278" units="cm"/>
+      <inkml:brushProperty name="height" value="0.035278" units="cm"/>
+      <inkml:brushProperty name="color" value="#ff0000"/>
+      <inkml:brushProperty name="fitToCurve" value="1"/>
+    </inkml:brush>
+  </inkml:definitions>
+  <inkml:trace contextRef="#ctx0" brushRef="#br0">355 666,'-22'0,"0"0,-1 0,1 0,-22 0,-1 0,23-44,0 44,0-23,-23-43,23 43,0-43,0-23,22 45,0-1,0-22,0 23,22 22,22-23,-22 1,1 22,21 0,-22 22,0 0,1 0,-1 0,-22 22,0 22,0-22,0 23,0-23,0 0,0 23,0-23,0 0,0 0,0 1,0 21,0-22,0 0,0 1,0-1,0 0,0 0,0 23,0-23,0 0,0-22</inkml:trace>
+</inkml:ink>
+</file>
+
 <file path=ppt/ink/ink2.xml><?xml version="1.0" encoding="utf-8"?>
 <inkml:ink xmlns:inkml="http://www.w3.org/2003/InkML">
   <inkml:definitions>
@@ -366,6 +470,266 @@
     </inkml:brush>
   </inkml:definitions>
   <inkml:trace contextRef="#ctx0" brushRef="#br0">0 0,'0'0</inkml:trace>
+</inkml:ink>
+</file>
+
+<file path=ppt/ink/ink20.xml><?xml version="1.0" encoding="utf-8"?>
+<inkml:ink xmlns:inkml="http://www.w3.org/2003/InkML">
+  <inkml:definitions>
+    <inkml:context xml:id="ctx0">
+      <inkml:inkSource xml:id="inkSrc0">
+        <inkml:traceFormat>
+          <inkml:channel name="X" type="integer" max="3200" units="cm"/>
+          <inkml:channel name="Y" type="integer" max="1080" units="cm"/>
+        </inkml:traceFormat>
+        <inkml:channelProperties>
+          <inkml:channelProperty channel="X" name="resolution" value="66.666656" units="1/cm"/>
+          <inkml:channelProperty channel="Y" name="resolution" value="40.000000" units="1/cm"/>
+        </inkml:channelProperties>
+      </inkml:inkSource>
+    </inkml:context>
+    <inkml:brush xml:id="br0">
+      <inkml:brushProperty name="width" value="0.035278" units="cm"/>
+      <inkml:brushProperty name="height" value="0.035278" units="cm"/>
+      <inkml:brushProperty name="color" value="#ff0000"/>
+      <inkml:brushProperty name="fitToCurve" value="1"/>
+    </inkml:brush>
+  </inkml:definitions>
+  <inkml:trace contextRef="#ctx0" brushRef="#br0">0 0,'66'355,"45"156,89 444,-133-666,-23 200,-44-334,0 1,0-67,0 44,0-89,0 1,0-23,0-67,0-21,0-1,0-22,-66-133,66 67,-23 21,-21-66,44 112,0 65,0 1,0 0,0 0,0 0,22 22,23 0,-23 0,0 0,22 0,-21 0,21 0,23 0,-1 0,-43 0,-1-23,22 23,-22-22,23 22,-23 0,0 0,-22-22,23 22,-1 0,-22-22,22 22,0 0,0-23,23 1,-1-44,1 66,-23-23,22 1,-21 0,-1 22,-22-22,0 22</inkml:trace>
+</inkml:ink>
+</file>
+
+<file path=ppt/ink/ink21.xml><?xml version="1.0" encoding="utf-8"?>
+<inkml:ink xmlns:inkml="http://www.w3.org/2003/InkML">
+  <inkml:definitions>
+    <inkml:context xml:id="ctx0">
+      <inkml:inkSource xml:id="inkSrc0">
+        <inkml:traceFormat>
+          <inkml:channel name="X" type="integer" max="3200" units="cm"/>
+          <inkml:channel name="Y" type="integer" max="1080" units="cm"/>
+        </inkml:traceFormat>
+        <inkml:channelProperties>
+          <inkml:channelProperty channel="X" name="resolution" value="66.666656" units="1/cm"/>
+          <inkml:channelProperty channel="Y" name="resolution" value="40.000000" units="1/cm"/>
+        </inkml:channelProperties>
+      </inkml:inkSource>
+    </inkml:context>
+    <inkml:brush xml:id="br0">
+      <inkml:brushProperty name="width" value="0.035278" units="cm"/>
+      <inkml:brushProperty name="height" value="0.035278" units="cm"/>
+      <inkml:brushProperty name="color" value="#ff0000"/>
+      <inkml:brushProperty name="fitToCurve" value="1"/>
+    </inkml:brush>
+  </inkml:definitions>
+  <inkml:trace contextRef="#ctx0" brushRef="#br0">266 88,'45'0,"43"-22,-21 22,-23-22,23 0,-45 0,1 22,-1 0,0 0,-22 22,22 0,-22 0,22 0,-22 45,0 0,0-23,0 23,0-1,0-21,0 21,0 1,0 0,-22-45,0 45,-22-23,21-22,-66 23,23-1,44-44,-45 22,23 1,-1-1,-22 0,23-22,22 0,-23 0,23 0,0 0,0 0,0 0,44 22,0-22,0 22,0-22,89 0,-88 0,66 0,-23 0,23-22,-45 0,68-45,-46 23,-21-1,21-21,-44 66,-22 0</inkml:trace>
+</inkml:ink>
+</file>
+
+<file path=ppt/ink/ink22.xml><?xml version="1.0" encoding="utf-8"?>
+<inkml:ink xmlns:inkml="http://www.w3.org/2003/InkML">
+  <inkml:definitions>
+    <inkml:context xml:id="ctx0">
+      <inkml:inkSource xml:id="inkSrc0">
+        <inkml:traceFormat>
+          <inkml:channel name="X" type="integer" max="3200" units="cm"/>
+          <inkml:channel name="Y" type="integer" max="1080" units="cm"/>
+        </inkml:traceFormat>
+        <inkml:channelProperties>
+          <inkml:channelProperty channel="X" name="resolution" value="66.666656" units="1/cm"/>
+          <inkml:channelProperty channel="Y" name="resolution" value="40.000000" units="1/cm"/>
+        </inkml:channelProperties>
+      </inkml:inkSource>
+    </inkml:context>
+    <inkml:brush xml:id="br0">
+      <inkml:brushProperty name="width" value="0.035278" units="cm"/>
+      <inkml:brushProperty name="height" value="0.035278" units="cm"/>
+      <inkml:brushProperty name="color" value="#ff0000"/>
+      <inkml:brushProperty name="fitToCurve" value="1"/>
+    </inkml:brush>
+  </inkml:definitions>
+  <inkml:trace contextRef="#ctx0" brushRef="#br0">755 1954,'-22'23,"-1"-1,-21 22,0-21,-23-1,22 0,23 0,-44 0,21-22,23 0,-89-66,44 44,-22-134,45 89,22-44,0 22,22 1,0 21,0 22,22 1,67 0,-67 21,22 23,23 0,-23 0,23 0,-23 0,23 45,-45-45,0 0,1 22,-1 0,0-22,-22 22,22-22,1 0,-23-44,22 0,-22-45,22-45,-22 46,22-112,0 66,23-21,-23 44,0 22,23-89,-45 156,0-22,22-1,0 1,-22 22,0 44,0 22,-22 156,0-44,-1 66,23 0,-44 44,44-21,0-23,-22 0,22 23,-22-68,22-66,0 0,0-22,0-22,0 0,0-45,0 22,0 1,0-23,0 0,0 0,0-44,0 0,0-89,0 66,0-44,0 1,0 21,0 45,22-89,-22 66,22 23,0-22,23 21,-1-21,1 22,-1 0,-22 22,0 0,1-23,-1 23,0 0,0 0,0 0,23-22,-45 22</inkml:trace>
+</inkml:ink>
+</file>
+
+<file path=ppt/ink/ink23.xml><?xml version="1.0" encoding="utf-8"?>
+<inkml:ink xmlns:inkml="http://www.w3.org/2003/InkML">
+  <inkml:definitions>
+    <inkml:context xml:id="ctx0">
+      <inkml:inkSource xml:id="inkSrc0">
+        <inkml:traceFormat>
+          <inkml:channel name="X" type="integer" max="3200" units="cm"/>
+          <inkml:channel name="Y" type="integer" max="1080" units="cm"/>
+        </inkml:traceFormat>
+        <inkml:channelProperties>
+          <inkml:channelProperty channel="X" name="resolution" value="66.666656" units="1/cm"/>
+          <inkml:channelProperty channel="Y" name="resolution" value="40.000000" units="1/cm"/>
+        </inkml:channelProperties>
+      </inkml:inkSource>
+    </inkml:context>
+    <inkml:brush xml:id="br0">
+      <inkml:brushProperty name="width" value="0.035278" units="cm"/>
+      <inkml:brushProperty name="height" value="0.035278" units="cm"/>
+      <inkml:brushProperty name="color" value="#ff0000"/>
+      <inkml:brushProperty name="fitToCurve" value="1"/>
+    </inkml:brush>
+  </inkml:definitions>
+  <inkml:trace contextRef="#ctx0" brushRef="#br0">0 888,'111'0,"0"22,-22-22,-1 0,-43 0,-23 0,0 0,0 0,-22 23,0-1,0 0,0 0,-88 89,21-44,-22 44,45-67,-1 1,-21 21,21-66,45 23,-22-1,22 0,0 0,0 1,67-1,-45 0,44 0,68-22,-68 0,23 0,-22 0,44-66,-67 43,67-110,-66 44,-1-44,-21-156,-23 134,0-1,0-110,0 177,0 0,0 67,0-23,0 1,0 22,0 66,-23-22,23 45,-44 111,44-67,-67 155,45-110,-45 155,23-67,44-177,0 22,-22-67,22 67,0-67,0 0,0 0,0 1,0-46,0 1,0 0,0-23,0-21,0 21,0-44,22 45,45-23,-45 23,111-23,-22 45,0 22,111 0,-133 0,22 0,-22 22,-44-22,44 23,-45-1,0-22,-21 0,21 0,-44 0</inkml:trace>
+</inkml:ink>
+</file>
+
+<file path=ppt/ink/ink24.xml><?xml version="1.0" encoding="utf-8"?>
+<inkml:ink xmlns:inkml="http://www.w3.org/2003/InkML">
+  <inkml:definitions>
+    <inkml:context xml:id="ctx0">
+      <inkml:inkSource xml:id="inkSrc0">
+        <inkml:traceFormat>
+          <inkml:channel name="X" type="integer" max="3200" units="cm"/>
+          <inkml:channel name="Y" type="integer" max="1080" units="cm"/>
+        </inkml:traceFormat>
+        <inkml:channelProperties>
+          <inkml:channelProperty channel="X" name="resolution" value="66.666656" units="1/cm"/>
+          <inkml:channelProperty channel="Y" name="resolution" value="40.000000" units="1/cm"/>
+        </inkml:channelProperties>
+      </inkml:inkSource>
+    </inkml:context>
+    <inkml:brush xml:id="br0">
+      <inkml:brushProperty name="width" value="0.035278" units="cm"/>
+      <inkml:brushProperty name="height" value="0.035278" units="cm"/>
+      <inkml:brushProperty name="color" value="#ff0000"/>
+      <inkml:brushProperty name="fitToCurve" value="1"/>
+    </inkml:brush>
+  </inkml:definitions>
+  <inkml:trace contextRef="#ctx0" brushRef="#br0">0 211,'21'0,"21"0,-21 0,21 0,22 0,-1 0,-41 0,-1 0,42 21,-42-21,43 0,-43 0,0 0,0 0,22 0,-22 21,0-21,0 0,22 0,-22 0,0 0,0 0,0 0,0 0,1 0,-1 0,0 0,0 0,0 0,0 0,1 0,-1 0,0 0,0 0,0 0,0 0,1 0,-1 0,0 0,21 0,-21 0,1 0,-1 0,0 0,0 0,0 0,0 0,1 0,-1 0,0 0,21 0,1 0,-22 0,0 0,0 0,0 0,0 0,22 0,-22 0,0 0,0 0,0 0,1 0,20 0,-21 0,0 0,0 0,1 0,-1 0,0 0,0 0,0 0,0 0,1 0,-1 0,0 0,0 0,21 0,-20 0,-1 0,0 0,0 0,21 0,-20 0,-1 22,0-22,0 0,0 0,0 0,1 0,-1 0,21 21,-21-21,0 0,1 0,-1 0,0 0,0 0,21 21,-20-21,-1 0,0 0,0 0,0 0,0 0,22 0,-22 0,0 0,21 0,-20 0,-1 0,0 0,0 0,0 0,0 0,1 0,-1 0,0 0,0 0,0 0,0 0,1 0,-1 0,0 0,0 0,0 0,0 0,22 0,-1 0,-21 0,0 0,1 0,-1 0,0 0,0 0,21 0,-20 0,-1 0,0 0,21 0,-21 0,1 0,-1 0,21 0,-21 0,22 0,-22 0,0 0,0 0,21 0,1 0,-22 0,0 0,21 0,-20 0,20 0,-21 0,0 0,0-21,22 21,-22-21,21-1,-21 22,1 0,20 0,-21-21,0 21,0 0,22 0,-22 0,21 0,1 0,-22 0,0 0,21 0,-21 0,1 0,-1 0,0 0,0 0,21 0,-20 0,-1 0,21 0,-21 0,0 0,1 0,-1 0,21 0,-21 0,0 0,1 0,-1 0,0 0,21 0,-21 0,1 0,-1 0,0 0,21 0,-21-21,1 21,20 0,0 0,-21 0,1 0,-1 0,21 0,-21 0,22 0,-22 0,0 0,21 0,-21 0,1 0,20 0,-21 0,0 0,0 0,1 0,-1 0,0 0,0 0,21 0,-20 0,-1 0,0 0,21 0,-21 0,1 0,-1 0,0-21,0 21,0 0,0 0,1 0,-1 0,0 0,0 0,0 0,0-21,1 21,20-21,-21 21,21-22,-20 22,-1 0,0 0,-21-21,42 21,-21-21,1 21,20 0,-21-21,21 21,-20-21,-1 21,0-21,0 21,0 0,22 0,-22 0,21 0,0-21,-20 21,20 0,-21 0,0 0,0 0,22 0,-1 0,-21 0,0 0,1 0,-1 0,0 0,42 0,-41 0,-1 0,63 0,-41 0,-22 0,0 0,43 0,-43 0,0 0,21 0,22 21,-22-21,0 0,1 0,-1 0,-21 0,43 0,-22 0,22 0,-22 0,-21 0,43 0,-22 0,0 0,1 21,-22-21,42 0,-20 0,-1 0,-21 21,43 0,-43-21,21 0,0 21,-20-21,-22 21,42-21,-21 0,0 0,22 22,-22-22,0 0,21 0,-21 0,1 0,-1 0,0 0,21 0,-21 0,1 0,-1 0,0 0,21 0,1 0,-22 0,0 0,0 0,0 0,22 0,-22 0,0 0,0-22,0 22,0 0,1-21,-1 21,21 0,-21 0,0 0,1 0,-1 0,0 0,0 0,21 0,-20 0,-1 21,-21-21</inkml:trace>
+</inkml:ink>
+</file>
+
+<file path=ppt/ink/ink25.xml><?xml version="1.0" encoding="utf-8"?>
+<inkml:ink xmlns:inkml="http://www.w3.org/2003/InkML">
+  <inkml:definitions>
+    <inkml:context xml:id="ctx0">
+      <inkml:inkSource xml:id="inkSrc0">
+        <inkml:traceFormat>
+          <inkml:channel name="X" type="integer" max="3200" units="cm"/>
+          <inkml:channel name="Y" type="integer" max="1080" units="cm"/>
+        </inkml:traceFormat>
+        <inkml:channelProperties>
+          <inkml:channelProperty channel="X" name="resolution" value="66.666656" units="1/cm"/>
+          <inkml:channelProperty channel="Y" name="resolution" value="40.000000" units="1/cm"/>
+        </inkml:channelProperties>
+      </inkml:inkSource>
+    </inkml:context>
+    <inkml:brush xml:id="br0">
+      <inkml:brushProperty name="width" value="0.035278" units="cm"/>
+      <inkml:brushProperty name="height" value="0.035278" units="cm"/>
+      <inkml:brushProperty name="color" value="#ff0000"/>
+      <inkml:brushProperty name="fitToCurve" value="1"/>
+    </inkml:brush>
+  </inkml:definitions>
+  <inkml:trace contextRef="#ctx0" brushRef="#br0">0 105,'21'0,"0"0,0 0,0 0,21 0,-20 0,-1 0,0 0,0 0,0 0,0 0,1 0,-1 0,0 0,0 0,0 0,0 0,1 0,-1 0,0 0,0 0,0 0,0 0,1 0,-1 0,0 0,0 0,21 0,-20 0,-1 0,0 0,0 0,21 0,1 0,-22 0,21 0,-21 0,22 0,-22 0,21 0,1 0,-1 0,0 0,-21 0,1 0,20 0,-21 0,43 0,-22 0,0 0,-21 0,1 0,-1 0,21 0,-21 0,0 0,22 0,-22 0,0 0,0 0,0 0,1 0,-1 0,0 0,21 0,-21 0,1 0,-1 0,0 0,0 0,0 0,0 0,1 0,-1 0,42 0,-42 0,22 0,-22 0,21 0,1 0,-22 0,21 0,-21 0,0 0,22-21,-22 21,0 0,21 0,-20 0,-1-21,0 21,0 0,0 0,22 0,-43-21,21 21,0 0,0 0,0 0,0 0,1 0,-1 0,0 0,0 0,0 0,0 0,1 0,-1 0,0 0,0 0,0 0,-21-21,21 21,1-21,-22 21</inkml:trace>
+</inkml:ink>
+</file>
+
+<file path=ppt/ink/ink26.xml><?xml version="1.0" encoding="utf-8"?>
+<inkml:ink xmlns:inkml="http://www.w3.org/2003/InkML">
+  <inkml:definitions>
+    <inkml:context xml:id="ctx0">
+      <inkml:inkSource xml:id="inkSrc0">
+        <inkml:traceFormat>
+          <inkml:channel name="X" type="integer" max="3200" units="cm"/>
+          <inkml:channel name="Y" type="integer" max="1080" units="cm"/>
+        </inkml:traceFormat>
+        <inkml:channelProperties>
+          <inkml:channelProperty channel="X" name="resolution" value="66.666656" units="1/cm"/>
+          <inkml:channelProperty channel="Y" name="resolution" value="40.000000" units="1/cm"/>
+        </inkml:channelProperties>
+      </inkml:inkSource>
+    </inkml:context>
+    <inkml:brush xml:id="br0">
+      <inkml:brushProperty name="width" value="0.035278" units="cm"/>
+      <inkml:brushProperty name="height" value="0.035278" units="cm"/>
+      <inkml:brushProperty name="color" value="#ff0000"/>
+      <inkml:brushProperty name="fitToCurve" value="1"/>
+    </inkml:brush>
+  </inkml:definitions>
+  <inkml:trace contextRef="#ctx0" brushRef="#br0">4381 0,'-85'126,"-21"23,43-65,-43 43,-84 43,-43 62,-529 382,211-296,-20 20,-128 1,149-64,275-169,127-42,106-43,84-21,42 0,170-106,43 21,41 22,170-1,699-42,-699 106,-64 0,64 0,-127 0,-169 0,-106 0,-64 0,-105-42,42 0,-64-22,-42 22,-64-64,64-21,-42-42,-212-255,212 149,-106 21,105 43,170 189,-21 22,21-42,-42 63,-1 43,1 63,-64 63,0 318,43-106,-22 149,85 20,0-63,-21-63,-42-22,63-105,0-107,-43-190,43 22,0-64,0-1,0 1,0 0,0-42,21-22,1-106,83-63,-41 22,21-22,-1-339,-20 233,20 43,-20 63,-22-43,43-20,63-22,0 85,0 64,-42 20,-63 64,-1 64,0 0,-42 21,21 21,-21 0</inkml:trace>
+</inkml:ink>
+</file>
+
+<file path=ppt/ink/ink27.xml><?xml version="1.0" encoding="utf-8"?>
+<inkml:ink xmlns:inkml="http://www.w3.org/2003/InkML">
+  <inkml:definitions>
+    <inkml:context xml:id="ctx0">
+      <inkml:inkSource xml:id="inkSrc0">
+        <inkml:traceFormat>
+          <inkml:channel name="X" type="integer" max="3200" units="cm"/>
+          <inkml:channel name="Y" type="integer" max="1080" units="cm"/>
+        </inkml:traceFormat>
+        <inkml:channelProperties>
+          <inkml:channelProperty channel="X" name="resolution" value="66.666656" units="1/cm"/>
+          <inkml:channelProperty channel="Y" name="resolution" value="40.000000" units="1/cm"/>
+        </inkml:channelProperties>
+      </inkml:inkSource>
+    </inkml:context>
+    <inkml:brush xml:id="br0">
+      <inkml:brushProperty name="width" value="0.035278" units="cm"/>
+      <inkml:brushProperty name="height" value="0.035278" units="cm"/>
+      <inkml:brushProperty name="color" value="#ff0000"/>
+      <inkml:brushProperty name="fitToCurve" value="1"/>
+    </inkml:brush>
+  </inkml:definitions>
+  <inkml:trace contextRef="#ctx0" brushRef="#br0">529 0,'-43'0,"-20"42,-1 0,43-21,-21 43,-1-43,22 21,-42 43,20-43,1 1,0 41,42-63,-21 22,0-1,21-21,0 22,0-22,0 42,0 22,0 21,0 42,42-63,-21 20,0 22,43 22,-64-107,21 0,0 1,0-1,21 0,-42-21,43 22,-43-1,21-21,0-21,-21 43,42-22,1-21,-22 42,42-42,22 0,-43 42,-20-42,20 43,21-43,-63 21,0-21</inkml:trace>
+</inkml:ink>
+</file>
+
+<file path=ppt/ink/ink28.xml><?xml version="1.0" encoding="utf-8"?>
+<inkml:ink xmlns:inkml="http://www.w3.org/2003/InkML">
+  <inkml:definitions>
+    <inkml:context xml:id="ctx0">
+      <inkml:inkSource xml:id="inkSrc0">
+        <inkml:traceFormat>
+          <inkml:channel name="X" type="integer" max="3200" units="cm"/>
+          <inkml:channel name="Y" type="integer" max="1080" units="cm"/>
+        </inkml:traceFormat>
+        <inkml:channelProperties>
+          <inkml:channelProperty channel="X" name="resolution" value="66.666656" units="1/cm"/>
+          <inkml:channelProperty channel="Y" name="resolution" value="40.000000" units="1/cm"/>
+        </inkml:channelProperties>
+      </inkml:inkSource>
+    </inkml:context>
+    <inkml:brush xml:id="br0">
+      <inkml:brushProperty name="width" value="0.035278" units="cm"/>
+      <inkml:brushProperty name="height" value="0.035278" units="cm"/>
+      <inkml:brushProperty name="color" value="#ff0000"/>
+      <inkml:brushProperty name="fitToCurve" value="1"/>
+    </inkml:brush>
+  </inkml:definitions>
+  <inkml:trace contextRef="#ctx0" brushRef="#br0">0 42,'21'0,"0"0,21 0,0 0,-20 0,20 0,-21 0,21 0,43 0,-43 42,1-42,20 0,43 0,-21 0,-22 0,43 0,21 0,-21 0,-64 0,22 0,-1 0,-42 0,1 0,20 0,-21 0,21 0,-20 0,20 0,0 0,-21 0,22 0,-22 0,21 0,22 0,-22 0,0-21,-20 21,41 0,1-21,-43 21,63 0,-62 0,20 0,0 0,-21 0,22 0,20 0,-20 0,20 0,-42 0,22 0,-1 0,-21 0,43 0,-22 0,-21 0,21 0,22 0,-22 0,22 0,-1 0,43 0,-42 0,20 0,22 0,42 0,-42 0,42 0,-42 0,-21 0,21 0,-22 0,-63 0,22 0,-1 0,-21 0,22 0,-22 0,21 0,0 0,-20-21,-1 21,21 0,-21-21,85 21,-64 0,-20 0,20 0,0 0,-21 0,22 0,-22 0,21 0,1 0,-22 0,0 0,-21 0</inkml:trace>
+</inkml:ink>
+</file>
+
+<file path=ppt/ink/ink29.xml><?xml version="1.0" encoding="utf-8"?>
+<inkml:ink xmlns:inkml="http://www.w3.org/2003/InkML">
+  <inkml:definitions>
+    <inkml:context xml:id="ctx0">
+      <inkml:inkSource xml:id="inkSrc0">
+        <inkml:traceFormat>
+          <inkml:channel name="X" type="integer" max="3200" units="cm"/>
+          <inkml:channel name="Y" type="integer" max="1080" units="cm"/>
+        </inkml:traceFormat>
+        <inkml:channelProperties>
+          <inkml:channelProperty channel="X" name="resolution" value="66.666656" units="1/cm"/>
+          <inkml:channelProperty channel="Y" name="resolution" value="40.000000" units="1/cm"/>
+        </inkml:channelProperties>
+      </inkml:inkSource>
+    </inkml:context>
+    <inkml:brush xml:id="br0">
+      <inkml:brushProperty name="width" value="0.035278" units="cm"/>
+      <inkml:brushProperty name="height" value="0.035278" units="cm"/>
+      <inkml:brushProperty name="color" value="#ff0000"/>
+      <inkml:brushProperty name="fitToCurve" value="1"/>
+    </inkml:brush>
+  </inkml:definitions>
+  <inkml:trace contextRef="#ctx0" brushRef="#br0">0 126,'21'0,"0"0,21 0,0 0,-20 0,41 0,22 0,-1 0,-20 0,-1 0,1 0,-22 0,1 0,-22 0,21 0,0 0,-20 0,20 0,21 0,-20-21,20-21,1 42,-43 0,0 0,21-21,-20 21,20 0,0 0,-21 0,22 0,-22 0,21 0,1 0,-22-42,21 42,-21 0,22 0,-1 0,-21 0,21 0,1 21,-1-42,0 42,1-21,-22 0,21 0,-21 0,22 0,-1 0,-21 0,22 0,-22 0,21 0,0 0,-20 0,20 0,0 0,-21-21,22 21,-1 0,-21 0,0 0,1 0,20 0,-21 0,21 0,-20 0,20 0,-21 0,21 0,1 0,-22 0,21 0,-21 0,22 0,-22 0,21 0,1 0,-22 0,21 0,-21 0,-21 42,21-42,22 0,-22 0,21 0,-21 0,22 0,-1 0,-21 0,22 0,-22 0,21 0,-21 0,0 0,1 0,-1 0,21 0,0 0,-20 0,20 0,-21 0,21 0,1 0,-22 21,42-21,-20 0,-22 0,21 0,-21 0,22 0,-1 0,-21 0,22 0,-22 0,21 0,0 0,-20 0,20 0,-21 0,21 0,1 0,-22 0,21 21,1-21,-22 0,21 0,-21 0,0 0,22 0,-22 0,21 0,-42 0</inkml:trace>
 </inkml:ink>
 </file>
 
@@ -2451,14 +2815,13 @@
 </file>
 
 <file path=ppt/slides/slide1.xml><?xml version="1.0" encoding="utf-8"?>
-<p:sld xmlns:a="http://schemas.openxmlformats.org/drawingml/2006/main" xmlns:r="http://schemas.openxmlformats.org/officeDocument/2006/relationships" xmlns:p="http://schemas.openxmlformats.org/presentationml/2006/main">
+<p:sld xmlns:a="http://schemas.openxmlformats.org/drawingml/2006/main" xmlns:r="http://schemas.openxmlformats.org/officeDocument/2006/relationships" xmlns:p="http://schemas.openxmlformats.org/presentationml/2006/main" xmlns:p14="http://schemas.microsoft.com/office/powerpoint/2010/main">
   <p:cSld>
     <p:bg>
       <p:bgPr>
         <a:solidFill>
           <a:schemeClr val="bg1"/>
         </a:solidFill>
-        <a:effectLst/>
       </p:bgPr>
     </p:bg>
     <p:spTree>
@@ -2485,7 +2848,12 @@
             <p:ph type="ctrTitle" sz="quarter"/>
           </p:nvPr>
         </p:nvSpPr>
-        <p:spPr/>
+        <p:spPr>
+          <a:xfrm>
+            <a:off x="1143000" y="1676400"/>
+            <a:ext cx="7011035" cy="1753235"/>
+          </a:xfrm>
+        </p:spPr>
         <p:txBody>
           <a:bodyPr/>
           <a:lstStyle/>
@@ -2526,7 +2894,12 @@
             <p:ph type="subTitle" sz="quarter" idx="1"/>
           </p:nvPr>
         </p:nvSpPr>
-        <p:spPr/>
+        <p:spPr>
+          <a:xfrm>
+            <a:off x="762000" y="4343400"/>
+            <a:ext cx="7696835" cy="1753235"/>
+          </a:xfrm>
+        </p:spPr>
         <p:txBody>
           <a:bodyPr/>
           <a:lstStyle/>
@@ -2542,6 +2915,89 @@
               <a:rPr lang="ko-KR" altLang="en-US" dirty="0"/>
               <a:t>조재한</a:t>
             </a:r>
+          </a:p>
+        </p:txBody>
+      </p:sp>
+      <p:sp>
+        <p:nvSpPr>
+          <p:cNvPr id="4" name="텍스트 상자 26"/>
+          <p:cNvSpPr txBox="1">
+            <a:spLocks/>
+          </p:cNvSpPr>
+          <p:nvPr/>
+        </p:nvSpPr>
+        <p:spPr>
+          <a:xfrm rot="0">
+            <a:off x="2990850" y="3956050"/>
+            <a:ext cx="1654810" cy="647065"/>
+          </a:xfrm>
+          <a:prstGeom prst="rect"/>
+          <a:noFill/>
+          <a:ln>
+            <a:noFill/>
+            <a:prstDash/>
+          </a:ln>
+        </p:spPr>
+        <p:txBody>
+          <a:bodyPr wrap="none" lIns="89535" tIns="46355" rIns="89535" bIns="46355" vert="horz" anchor="t">
+            <a:spAutoFit/>
+          </a:bodyPr>
+          <a:lstStyle/>
+          <a:p>
+            <a:pPr marL="0" indent="0" algn="l" hangingPunct="1"/>
+            <a:r>
+              <a:rPr sz="1800">
+                <a:latin typeface="맑은 고딕" charset="0"/>
+                <a:ea typeface="맑은 고딕" charset="0"/>
+              </a:rPr>
+              <a:t>2</a:t>
+            </a:r>
+            <a:r>
+              <a:rPr sz="1800">
+                <a:latin typeface="맑은 고딕" charset="0"/>
+                <a:ea typeface="맑은 고딕" charset="0"/>
+              </a:rPr>
+              <a:t>3</a:t>
+            </a:r>
+            <a:r>
+              <a:rPr lang="ko-KR" sz="1800">
+                <a:latin typeface="맑은 고딕" charset="0"/>
+                <a:ea typeface="맑은 고딕" charset="0"/>
+              </a:rPr>
+              <a:t>일 </a:t>
+            </a:r>
+            <a:r>
+              <a:rPr lang="ko-KR" sz="1800">
+                <a:latin typeface="맑은 고딕" charset="0"/>
+                <a:ea typeface="맑은 고딕" charset="0"/>
+              </a:rPr>
+              <a:t>중간고사</a:t>
+            </a:r>
+            <a:endParaRPr lang="ko-KR" altLang="en-US" sz="1800">
+              <a:latin typeface="맑은 고딕" charset="0"/>
+              <a:ea typeface="맑은 고딕" charset="0"/>
+            </a:endParaRPr>
+          </a:p>
+          <a:p>
+            <a:pPr marL="0" indent="0" algn="l" hangingPunct="1"/>
+            <a:r>
+              <a:rPr lang="ko-KR" sz="1800">
+                <a:latin typeface="맑은 고딕" charset="0"/>
+                <a:ea typeface="맑은 고딕" charset="0"/>
+              </a:rPr>
+              <a:t>실습 </a:t>
+            </a:r>
+            <a:r>
+              <a:rPr lang="ko-KR" sz="1800">
+                <a:latin typeface="맑은 고딕" charset="0"/>
+                <a:ea typeface="맑은 고딕" charset="0"/>
+              </a:rPr>
+              <a:t>많이 해</a:t>
+            </a:r>
+            <a:endParaRPr lang="ko-KR" altLang="en-US" sz="1800">
+              <a:latin typeface="맑은 고딕" charset="0"/>
+              <a:ea typeface="맑은 고딕" charset="0"/>
+            </a:endParaRPr>
           </a:p>
         </p:txBody>
       </p:sp>
@@ -2550,6 +3006,21 @@
   <p:clrMapOvr>
     <a:overrideClrMapping bg1="lt1" tx1="dk1" bg2="lt2" tx2="dk2" accent1="accent1" accent2="accent2" accent3="accent3" accent4="accent4" accent5="accent5" accent6="accent6" hlink="hlink" folHlink="folHlink"/>
   </p:clrMapOvr>
+  <mc:AlternateContent xmlns:mc="http://schemas.openxmlformats.org/markup-compatibility/2006">
+    <mc:Choice xmlns:p14="http://schemas.microsoft.com/office/powerpoint/2010/main" Requires="p14">
+      <p:transition spd="slow" p14:dur="2000"/>
+    </mc:Choice>
+    <mc:Fallback>
+      <p:transition spd="slow"/>
+    </mc:Fallback>
+  </mc:AlternateContent>
+  <p:timing>
+    <p:tnLst>
+      <p:par>
+        <p:cTn id="1" dur="indefinite" restart="never" nodeType="tmRoot"/>
+      </p:par>
+    </p:tnLst>
+  </p:timing>
 </p:sld>
 </file>
 
@@ -5629,7 +6100,7 @@
       </p:sp>
       <mc:AlternateContent xmlns:mc="http://schemas.openxmlformats.org/markup-compatibility/2006" xmlns:p14="http://schemas.microsoft.com/office/powerpoint/2010/main">
         <mc:Choice Requires="p14">
-          <p:contentPart p14:bwMode="auto" r:id="rId1">
+          <p:contentPart p14:bwMode="auto" r:id="rId11">
             <p14:nvContentPartPr>
               <p14:cNvPr id="7" name="잉크 2"/>
               <p14:cNvContentPartPr/>
@@ -5649,7 +6120,7 @@
               <p:nvPr/>
             </p:nvPicPr>
             <p:blipFill>
-              <a:blip r:embed="rId2"/>
+              <a:blip r:embed="rId12"/>
               <a:stretch>
                 <a:fillRect/>
               </a:stretch>
@@ -5668,7 +6139,7 @@
       </mc:AlternateContent>
       <mc:AlternateContent xmlns:mc="http://schemas.openxmlformats.org/markup-compatibility/2006" xmlns:p14="http://schemas.microsoft.com/office/powerpoint/2010/main">
         <mc:Choice Requires="p14">
-          <p:contentPart p14:bwMode="auto" r:id="rId3">
+          <p:contentPart p14:bwMode="auto" r:id="rId13">
             <p14:nvContentPartPr>
               <p14:cNvPr id="8" name="잉크 3"/>
               <p14:cNvContentPartPr/>
@@ -5688,7 +6159,7 @@
               <p:nvPr/>
             </p:nvPicPr>
             <p:blipFill>
-              <a:blip r:embed="rId4"/>
+              <a:blip r:embed="rId14"/>
               <a:stretch>
                 <a:fillRect/>
               </a:stretch>
@@ -5707,7 +6178,7 @@
       </mc:AlternateContent>
       <mc:AlternateContent xmlns:mc="http://schemas.openxmlformats.org/markup-compatibility/2006" xmlns:p14="http://schemas.microsoft.com/office/powerpoint/2010/main">
         <mc:Choice Requires="p14">
-          <p:contentPart p14:bwMode="auto" r:id="rId5">
+          <p:contentPart p14:bwMode="auto" r:id="rId15">
             <p14:nvContentPartPr>
               <p14:cNvPr id="9" name="잉크 4"/>
               <p14:cNvContentPartPr/>
@@ -5727,7 +6198,7 @@
               <p:nvPr/>
             </p:nvPicPr>
             <p:blipFill>
-              <a:blip r:embed="rId6"/>
+              <a:blip r:embed="rId16"/>
               <a:stretch>
                 <a:fillRect/>
               </a:stretch>
@@ -5746,7 +6217,7 @@
       </mc:AlternateContent>
       <mc:AlternateContent xmlns:mc="http://schemas.openxmlformats.org/markup-compatibility/2006" xmlns:p14="http://schemas.microsoft.com/office/powerpoint/2010/main">
         <mc:Choice Requires="p14">
-          <p:contentPart p14:bwMode="auto" r:id="rId7">
+          <p:contentPart p14:bwMode="auto" r:id="rId17">
             <p14:nvContentPartPr>
               <p14:cNvPr id="10" name="잉크 5"/>
               <p14:cNvContentPartPr/>
@@ -5766,7 +6237,7 @@
               <p:nvPr/>
             </p:nvPicPr>
             <p:blipFill>
-              <a:blip r:embed="rId8"/>
+              <a:blip r:embed="rId18"/>
               <a:stretch>
                 <a:fillRect/>
               </a:stretch>
@@ -5785,7 +6256,7 @@
       </mc:AlternateContent>
       <mc:AlternateContent xmlns:mc="http://schemas.openxmlformats.org/markup-compatibility/2006" xmlns:p14="http://schemas.microsoft.com/office/powerpoint/2010/main">
         <mc:Choice Requires="p14">
-          <p:contentPart p14:bwMode="auto" r:id="rId9">
+          <p:contentPart p14:bwMode="auto" r:id="rId19">
             <p14:nvContentPartPr>
               <p14:cNvPr id="11" name="잉크 6"/>
               <p14:cNvContentPartPr/>
@@ -5805,7 +6276,7 @@
               <p:nvPr/>
             </p:nvPicPr>
             <p:blipFill>
-              <a:blip r:embed="rId10"/>
+              <a:blip r:embed="rId20"/>
               <a:stretch>
                 <a:fillRect/>
               </a:stretch>
@@ -5814,6 +6285,318 @@
               <a:xfrm>
                 <a:off x="8823960" y="5067300"/>
                 <a:ext cx="0" cy="289560"/>
+              </a:xfrm>
+              <a:prstGeom prst="rect">
+                <a:avLst/>
+              </a:prstGeom>
+            </p:spPr>
+          </p:pic>
+        </mc:Fallback>
+      </mc:AlternateContent>
+      <mc:AlternateContent xmlns:mc="http://schemas.openxmlformats.org/markup-compatibility/2006" xmlns:p14="http://schemas.microsoft.com/office/powerpoint/2010/main">
+        <mc:Choice Requires="p14">
+          <p:contentPart p14:bwMode="auto" r:id="rId21">
+            <p14:nvContentPartPr>
+              <p14:cNvPr id="12" name="잉크 1"/>
+              <p14:cNvContentPartPr/>
+              <p14:nvPr/>
+            </p14:nvContentPartPr>
+            <p14:xfrm>
+              <a:off x="3327400" y="383540"/>
+              <a:ext cx="775335" cy="887730"/>
+            </p14:xfrm>
+          </p:contentPart>
+        </mc:Choice>
+        <mc:Fallback>
+          <p:pic>
+            <p:nvPicPr>
+              <p:cNvPr id="12" name="잉크 1"/>
+              <p:cNvPicPr/>
+              <p:nvPr/>
+            </p:nvPicPr>
+            <p:blipFill>
+              <a:blip r:embed="rId22"/>
+              <a:stretch>
+                <a:fillRect/>
+              </a:stretch>
+            </p:blipFill>
+            <p:spPr>
+              <a:xfrm>
+                <a:off x="3327400" y="383540"/>
+                <a:ext cx="775335" cy="887730"/>
+              </a:xfrm>
+              <a:prstGeom prst="rect">
+                <a:avLst/>
+              </a:prstGeom>
+            </p:spPr>
+          </p:pic>
+        </mc:Fallback>
+      </mc:AlternateContent>
+      <mc:AlternateContent xmlns:mc="http://schemas.openxmlformats.org/markup-compatibility/2006" xmlns:p14="http://schemas.microsoft.com/office/powerpoint/2010/main">
+        <mc:Choice Requires="p14">
+          <p:contentPart p14:bwMode="auto" r:id="rId23">
+            <p14:nvContentPartPr>
+              <p14:cNvPr id="13" name="잉크 2"/>
+              <p14:cNvContentPartPr/>
+              <p14:nvPr/>
+            </p14:nvContentPartPr>
+            <p14:xfrm>
+              <a:off x="4382770" y="423545"/>
+              <a:ext cx="247650" cy="168275"/>
+            </p14:xfrm>
+          </p:contentPart>
+        </mc:Choice>
+        <mc:Fallback>
+          <p:pic>
+            <p:nvPicPr>
+              <p:cNvPr id="13" name="잉크 2"/>
+              <p:cNvPicPr/>
+              <p:nvPr/>
+            </p:nvPicPr>
+            <p:blipFill>
+              <a:blip r:embed="rId24"/>
+              <a:stretch>
+                <a:fillRect/>
+              </a:stretch>
+            </p:blipFill>
+            <p:spPr>
+              <a:xfrm>
+                <a:off x="4382770" y="423545"/>
+                <a:ext cx="247650" cy="168275"/>
+              </a:xfrm>
+              <a:prstGeom prst="rect">
+                <a:avLst/>
+              </a:prstGeom>
+            </p:spPr>
+          </p:pic>
+        </mc:Fallback>
+      </mc:AlternateContent>
+      <mc:AlternateContent xmlns:mc="http://schemas.openxmlformats.org/markup-compatibility/2006" xmlns:p14="http://schemas.microsoft.com/office/powerpoint/2010/main">
+        <mc:Choice Requires="p14">
+          <p:contentPart p14:bwMode="auto" r:id="rId25">
+            <p14:nvContentPartPr>
+              <p14:cNvPr id="14" name="잉크 3"/>
+              <p14:cNvContentPartPr/>
+              <p14:nvPr/>
+            </p14:nvContentPartPr>
+            <p14:xfrm>
+              <a:off x="4654550" y="264160"/>
+              <a:ext cx="224155" cy="687705"/>
+            </p14:xfrm>
+          </p:contentPart>
+        </mc:Choice>
+        <mc:Fallback>
+          <p:pic>
+            <p:nvPicPr>
+              <p:cNvPr id="14" name="잉크 3"/>
+              <p:cNvPicPr/>
+              <p:nvPr/>
+            </p:nvPicPr>
+            <p:blipFill>
+              <a:blip r:embed="rId26"/>
+              <a:stretch>
+                <a:fillRect/>
+              </a:stretch>
+            </p:blipFill>
+            <p:spPr>
+              <a:xfrm>
+                <a:off x="4654550" y="264160"/>
+                <a:ext cx="224155" cy="687705"/>
+              </a:xfrm>
+              <a:prstGeom prst="rect">
+                <a:avLst/>
+              </a:prstGeom>
+            </p:spPr>
+          </p:pic>
+        </mc:Fallback>
+      </mc:AlternateContent>
+      <mc:AlternateContent xmlns:mc="http://schemas.openxmlformats.org/markup-compatibility/2006" xmlns:p14="http://schemas.microsoft.com/office/powerpoint/2010/main">
+        <mc:Choice Requires="p14">
+          <p:contentPart p14:bwMode="auto" r:id="rId27">
+            <p14:nvContentPartPr>
+              <p14:cNvPr id="15" name="잉크 4"/>
+              <p14:cNvContentPartPr/>
+              <p14:nvPr/>
+            </p14:nvContentPartPr>
+            <p14:xfrm>
+              <a:off x="4894580" y="351790"/>
+              <a:ext cx="128270" cy="240030"/>
+            </p14:xfrm>
+          </p:contentPart>
+        </mc:Choice>
+        <mc:Fallback>
+          <p:pic>
+            <p:nvPicPr>
+              <p:cNvPr id="15" name="잉크 4"/>
+              <p:cNvPicPr/>
+              <p:nvPr/>
+            </p:nvPicPr>
+            <p:blipFill>
+              <a:blip r:embed="rId28"/>
+              <a:stretch>
+                <a:fillRect/>
+              </a:stretch>
+            </p:blipFill>
+            <p:spPr>
+              <a:xfrm>
+                <a:off x="4894580" y="351790"/>
+                <a:ext cx="128270" cy="240030"/>
+              </a:xfrm>
+              <a:prstGeom prst="rect">
+                <a:avLst/>
+              </a:prstGeom>
+            </p:spPr>
+          </p:pic>
+        </mc:Fallback>
+      </mc:AlternateContent>
+      <mc:AlternateContent xmlns:mc="http://schemas.openxmlformats.org/markup-compatibility/2006" xmlns:p14="http://schemas.microsoft.com/office/powerpoint/2010/main">
+        <mc:Choice Requires="p14">
+          <p:contentPart p14:bwMode="auto" r:id="rId29">
+            <p14:nvContentPartPr>
+              <p14:cNvPr id="16" name="잉크 5"/>
+              <p14:cNvContentPartPr/>
+              <p14:nvPr/>
+            </p14:nvContentPartPr>
+            <p14:xfrm>
+              <a:off x="5126355" y="160020"/>
+              <a:ext cx="455930" cy="1167765"/>
+            </p14:xfrm>
+          </p:contentPart>
+        </mc:Choice>
+        <mc:Fallback>
+          <p:pic>
+            <p:nvPicPr>
+              <p:cNvPr id="16" name="잉크 5"/>
+              <p:cNvPicPr/>
+              <p:nvPr/>
+            </p:nvPicPr>
+            <p:blipFill>
+              <a:blip r:embed="rId30"/>
+              <a:stretch>
+                <a:fillRect/>
+              </a:stretch>
+            </p:blipFill>
+            <p:spPr>
+              <a:xfrm>
+                <a:off x="5126355" y="160020"/>
+                <a:ext cx="455930" cy="1167765"/>
+              </a:xfrm>
+              <a:prstGeom prst="rect">
+                <a:avLst/>
+              </a:prstGeom>
+            </p:spPr>
+          </p:pic>
+        </mc:Fallback>
+      </mc:AlternateContent>
+      <mc:AlternateContent xmlns:mc="http://schemas.openxmlformats.org/markup-compatibility/2006" xmlns:p14="http://schemas.microsoft.com/office/powerpoint/2010/main">
+        <mc:Choice Requires="p14">
+          <p:contentPart p14:bwMode="auto" r:id="rId31">
+            <p14:nvContentPartPr>
+              <p14:cNvPr id="17" name="잉크 6"/>
+              <p14:cNvContentPartPr/>
+              <p14:nvPr/>
+            </p14:nvContentPartPr>
+            <p14:xfrm>
+              <a:off x="4870450" y="879475"/>
+              <a:ext cx="295910" cy="368300"/>
+            </p14:xfrm>
+          </p:contentPart>
+        </mc:Choice>
+        <mc:Fallback>
+          <p:pic>
+            <p:nvPicPr>
+              <p:cNvPr id="17" name="잉크 6"/>
+              <p:cNvPicPr/>
+              <p:nvPr/>
+            </p:nvPicPr>
+            <p:blipFill>
+              <a:blip r:embed="rId32"/>
+              <a:stretch>
+                <a:fillRect/>
+              </a:stretch>
+            </p:blipFill>
+            <p:spPr>
+              <a:xfrm>
+                <a:off x="4870450" y="879475"/>
+                <a:ext cx="295910" cy="368300"/>
+              </a:xfrm>
+              <a:prstGeom prst="rect">
+                <a:avLst/>
+              </a:prstGeom>
+            </p:spPr>
+          </p:pic>
+        </mc:Fallback>
+      </mc:AlternateContent>
+      <mc:AlternateContent xmlns:mc="http://schemas.openxmlformats.org/markup-compatibility/2006" xmlns:p14="http://schemas.microsoft.com/office/powerpoint/2010/main">
+        <mc:Choice Requires="p14">
+          <p:contentPart p14:bwMode="auto" r:id="rId33">
+            <p14:nvContentPartPr>
+              <p14:cNvPr id="18" name="잉크 7"/>
+              <p14:cNvContentPartPr/>
+              <p14:nvPr/>
+            </p14:nvContentPartPr>
+            <p14:xfrm>
+              <a:off x="5614670" y="-104140"/>
+              <a:ext cx="423545" cy="1031875"/>
+            </p14:xfrm>
+          </p:contentPart>
+        </mc:Choice>
+        <mc:Fallback>
+          <p:pic>
+            <p:nvPicPr>
+              <p:cNvPr id="18" name="잉크 7"/>
+              <p:cNvPicPr/>
+              <p:nvPr/>
+            </p:nvPicPr>
+            <p:blipFill>
+              <a:blip r:embed="rId34"/>
+              <a:stretch>
+                <a:fillRect/>
+              </a:stretch>
+            </p:blipFill>
+            <p:spPr>
+              <a:xfrm>
+                <a:off x="5614670" y="-104140"/>
+                <a:ext cx="423545" cy="1031875"/>
+              </a:xfrm>
+              <a:prstGeom prst="rect">
+                <a:avLst/>
+              </a:prstGeom>
+            </p:spPr>
+          </p:pic>
+        </mc:Fallback>
+      </mc:AlternateContent>
+      <mc:AlternateContent xmlns:mc="http://schemas.openxmlformats.org/markup-compatibility/2006" xmlns:p14="http://schemas.microsoft.com/office/powerpoint/2010/main">
+        <mc:Choice Requires="p14">
+          <p:contentPart p14:bwMode="auto" r:id="rId35">
+            <p14:nvContentPartPr>
+              <p14:cNvPr id="19" name="잉크 8"/>
+              <p14:cNvContentPartPr/>
+              <p14:nvPr/>
+            </p14:nvContentPartPr>
+            <p14:xfrm>
+              <a:off x="6318250" y="224155"/>
+              <a:ext cx="687705" cy="631825"/>
+            </p14:xfrm>
+          </p:contentPart>
+        </mc:Choice>
+        <mc:Fallback>
+          <p:pic>
+            <p:nvPicPr>
+              <p:cNvPr id="19" name="잉크 8"/>
+              <p:cNvPicPr/>
+              <p:nvPr/>
+            </p:nvPicPr>
+            <p:blipFill>
+              <a:blip r:embed="rId36"/>
+              <a:stretch>
+                <a:fillRect/>
+              </a:stretch>
+            </p:blipFill>
+            <p:spPr>
+              <a:xfrm>
+                <a:off x="6318250" y="224155"/>
+                <a:ext cx="687705" cy="631825"/>
               </a:xfrm>
               <a:prstGeom prst="rect">
                 <a:avLst/>
@@ -7656,7 +8439,7 @@
 </file>
 
 <file path=ppt/slides/slide20.xml><?xml version="1.0" encoding="utf-8"?>
-<p:sld xmlns:a="http://schemas.openxmlformats.org/drawingml/2006/main" xmlns:r="http://schemas.openxmlformats.org/officeDocument/2006/relationships" xmlns:p="http://schemas.openxmlformats.org/presentationml/2006/main">
+<p:sld xmlns:a="http://schemas.openxmlformats.org/drawingml/2006/main" xmlns:r="http://schemas.openxmlformats.org/officeDocument/2006/relationships" xmlns:p="http://schemas.openxmlformats.org/presentationml/2006/main" xmlns:p14="http://schemas.microsoft.com/office/powerpoint/2010/main">
   <p:cSld>
     <p:spTree>
       <p:nvGrpSpPr>
@@ -7688,7 +8471,12 @@
             <p:ph type="title"/>
           </p:nvPr>
         </p:nvSpPr>
-        <p:spPr/>
+        <p:spPr>
+          <a:xfrm>
+            <a:off x="443230" y="146050"/>
+            <a:ext cx="7773035" cy="762635"/>
+          </a:xfrm>
+        </p:spPr>
         <p:txBody>
           <a:bodyPr/>
           <a:lstStyle/>
@@ -7723,8 +8511,8 @@
         </p:nvSpPr>
         <p:spPr>
           <a:xfrm>
-            <a:off x="251520" y="1152525"/>
-            <a:ext cx="8892480" cy="5019675"/>
+            <a:off x="251460" y="1152525"/>
+            <a:ext cx="8892540" cy="5019675"/>
           </a:xfrm>
         </p:spPr>
         <p:txBody>
@@ -7901,7 +8689,12 @@
             <p:ph type="sldNum" sz="quarter" idx="10"/>
           </p:nvPr>
         </p:nvSpPr>
-        <p:spPr/>
+        <p:spPr>
+          <a:xfrm>
+            <a:off x="7112000" y="6419850"/>
+            <a:ext cx="1905635" cy="305435"/>
+          </a:xfrm>
+        </p:spPr>
         <p:txBody>
           <a:bodyPr/>
           <a:lstStyle/>
@@ -7936,7 +8729,12 @@
             <p:ph type="ftr" sz="quarter" idx="11"/>
           </p:nvPr>
         </p:nvSpPr>
-        <p:spPr/>
+        <p:spPr>
+          <a:xfrm>
+            <a:off x="897255" y="6393180"/>
+            <a:ext cx="3110230" cy="349885"/>
+          </a:xfrm>
+        </p:spPr>
         <p:txBody>
           <a:bodyPr/>
           <a:lstStyle/>
@@ -7948,6 +8746,84 @@
           </a:p>
         </p:txBody>
       </p:sp>
+      <mc:AlternateContent xmlns:mc="http://schemas.openxmlformats.org/markup-compatibility/2006" xmlns:p14="http://schemas.microsoft.com/office/powerpoint/2010/main">
+        <mc:Choice Requires="p14">
+          <p:contentPart p14:bwMode="auto" r:id="rId1">
+            <p14:nvContentPartPr>
+              <p14:cNvPr id="6" name="잉크 9"/>
+              <p14:cNvContentPartPr/>
+              <p14:nvPr/>
+            </p14:nvContentPartPr>
+            <p14:xfrm>
+              <a:off x="5486400" y="1821180"/>
+              <a:ext cx="3489960" cy="114300"/>
+            </p14:xfrm>
+          </p:contentPart>
+        </mc:Choice>
+        <mc:Fallback>
+          <p:pic>
+            <p:nvPicPr>
+              <p:cNvPr id="6" name="잉크 9"/>
+              <p:cNvPicPr/>
+              <p:nvPr/>
+            </p:nvPicPr>
+            <p:blipFill>
+              <a:blip r:embed="rId2"/>
+              <a:stretch>
+                <a:fillRect/>
+              </a:stretch>
+            </p:blipFill>
+            <p:spPr>
+              <a:xfrm>
+                <a:off x="5486400" y="1821180"/>
+                <a:ext cx="3489960" cy="114300"/>
+              </a:xfrm>
+              <a:prstGeom prst="rect">
+                <a:avLst/>
+              </a:prstGeom>
+            </p:spPr>
+          </p:pic>
+        </mc:Fallback>
+      </mc:AlternateContent>
+      <mc:AlternateContent xmlns:mc="http://schemas.openxmlformats.org/markup-compatibility/2006" xmlns:p14="http://schemas.microsoft.com/office/powerpoint/2010/main">
+        <mc:Choice Requires="p14">
+          <p:contentPart p14:bwMode="auto" r:id="rId3">
+            <p14:nvContentPartPr>
+              <p14:cNvPr id="7" name="잉크 10"/>
+              <p14:cNvContentPartPr/>
+              <p14:nvPr/>
+            </p14:nvContentPartPr>
+            <p14:xfrm>
+              <a:off x="1059180" y="2164080"/>
+              <a:ext cx="1059180" cy="38100"/>
+            </p14:xfrm>
+          </p:contentPart>
+        </mc:Choice>
+        <mc:Fallback>
+          <p:pic>
+            <p:nvPicPr>
+              <p:cNvPr id="7" name="잉크 10"/>
+              <p:cNvPicPr/>
+              <p:nvPr/>
+            </p:nvPicPr>
+            <p:blipFill>
+              <a:blip r:embed="rId4"/>
+              <a:stretch>
+                <a:fillRect/>
+              </a:stretch>
+            </p:blipFill>
+            <p:spPr>
+              <a:xfrm>
+                <a:off x="1059180" y="2164080"/>
+                <a:ext cx="1059180" cy="38100"/>
+              </a:xfrm>
+              <a:prstGeom prst="rect">
+                <a:avLst/>
+              </a:prstGeom>
+            </p:spPr>
+          </p:pic>
+        </mc:Fallback>
+      </mc:AlternateContent>
     </p:spTree>
     <p:extLst>
       <p:ext uri="{BB962C8B-B14F-4D97-AF65-F5344CB8AC3E}">
@@ -7958,6 +8834,21 @@
   <p:clrMapOvr>
     <a:masterClrMapping/>
   </p:clrMapOvr>
+  <mc:AlternateContent xmlns:mc="http://schemas.openxmlformats.org/markup-compatibility/2006">
+    <mc:Choice xmlns:p14="http://schemas.microsoft.com/office/powerpoint/2010/main" Requires="p14">
+      <p:transition spd="slow" p14:dur="2000"/>
+    </mc:Choice>
+    <mc:Fallback>
+      <p:transition spd="slow"/>
+    </mc:Fallback>
+  </mc:AlternateContent>
+  <p:timing>
+    <p:tnLst>
+      <p:par>
+        <p:cTn id="1" dur="indefinite" restart="never" nodeType="tmRoot"/>
+      </p:par>
+    </p:tnLst>
+  </p:timing>
 </p:sld>
 </file>
 
@@ -9453,7 +10344,7 @@
 </file>
 
 <file path=ppt/slides/slide24.xml><?xml version="1.0" encoding="utf-8"?>
-<p:sld xmlns:a="http://schemas.openxmlformats.org/drawingml/2006/main" xmlns:r="http://schemas.openxmlformats.org/officeDocument/2006/relationships" xmlns:p="http://schemas.openxmlformats.org/presentationml/2006/main">
+<p:sld xmlns:a="http://schemas.openxmlformats.org/drawingml/2006/main" xmlns:r="http://schemas.openxmlformats.org/officeDocument/2006/relationships" xmlns:p="http://schemas.openxmlformats.org/presentationml/2006/main" xmlns:p14="http://schemas.microsoft.com/office/powerpoint/2010/main">
   <p:cSld>
     <p:spTree>
       <p:nvGrpSpPr>
@@ -9485,7 +10376,12 @@
             <p:ph type="title"/>
           </p:nvPr>
         </p:nvSpPr>
-        <p:spPr/>
+        <p:spPr>
+          <a:xfrm>
+            <a:off x="443230" y="146050"/>
+            <a:ext cx="7773035" cy="762635"/>
+          </a:xfrm>
+        </p:spPr>
         <p:txBody>
           <a:bodyPr/>
           <a:lstStyle/>
@@ -9520,8 +10416,8 @@
         </p:nvSpPr>
         <p:spPr>
           <a:xfrm>
-            <a:off x="444500" y="1008509"/>
-            <a:ext cx="8572500" cy="1340371"/>
+            <a:off x="444500" y="1008380"/>
+            <a:ext cx="8572500" cy="1340485"/>
           </a:xfrm>
         </p:spPr>
         <p:txBody>
@@ -9629,7 +10525,12 @@
             <p:ph type="sldNum" sz="quarter" idx="10"/>
           </p:nvPr>
         </p:nvSpPr>
-        <p:spPr/>
+        <p:spPr>
+          <a:xfrm>
+            <a:off x="7112000" y="6419850"/>
+            <a:ext cx="1905635" cy="305435"/>
+          </a:xfrm>
+        </p:spPr>
         <p:txBody>
           <a:bodyPr/>
           <a:lstStyle/>
@@ -9664,7 +10565,12 @@
             <p:ph type="ftr" sz="quarter" idx="11"/>
           </p:nvPr>
         </p:nvSpPr>
-        <p:spPr/>
+        <p:spPr>
+          <a:xfrm>
+            <a:off x="897255" y="6393180"/>
+            <a:ext cx="3110230" cy="349885"/>
+          </a:xfrm>
+        </p:spPr>
         <p:txBody>
           <a:bodyPr/>
           <a:lstStyle/>
@@ -9690,8 +10596,8 @@
         </p:nvSpPr>
         <p:spPr>
           <a:xfrm>
-            <a:off x="442913" y="2226344"/>
-            <a:ext cx="6006763" cy="3416320"/>
+            <a:off x="443230" y="2226310"/>
+            <a:ext cx="6006465" cy="3416300"/>
           </a:xfrm>
           <a:prstGeom prst="rect">
             <a:avLst/>
@@ -10120,14 +11026,170 @@
         </p:blipFill>
         <p:spPr>
           <a:xfrm>
-            <a:off x="5004048" y="5736242"/>
-            <a:ext cx="3600400" cy="1118768"/>
+            <a:off x="5003800" y="5735955"/>
+            <a:ext cx="3600450" cy="1118870"/>
           </a:xfrm>
           <a:prstGeom prst="rect">
             <a:avLst/>
           </a:prstGeom>
         </p:spPr>
       </p:pic>
+      <mc:AlternateContent xmlns:mc="http://schemas.openxmlformats.org/markup-compatibility/2006" xmlns:p14="http://schemas.microsoft.com/office/powerpoint/2010/main">
+        <mc:Choice Requires="p14">
+          <p:contentPart p14:bwMode="auto" r:id="rId3">
+            <p14:nvContentPartPr>
+              <p14:cNvPr id="10" name="잉크 27"/>
+              <p14:cNvContentPartPr/>
+              <p14:nvPr/>
+            </p14:nvContentPartPr>
+            <p14:xfrm>
+              <a:off x="6294120" y="1493520"/>
+              <a:ext cx="1775460" cy="1844040"/>
+            </p14:xfrm>
+          </p:contentPart>
+        </mc:Choice>
+        <mc:Fallback>
+          <p:pic>
+            <p:nvPicPr>
+              <p:cNvPr id="10" name="잉크 27"/>
+              <p:cNvPicPr/>
+              <p:nvPr/>
+            </p:nvPicPr>
+            <p:blipFill>
+              <a:blip r:embed="rId4"/>
+              <a:stretch>
+                <a:fillRect/>
+              </a:stretch>
+            </p:blipFill>
+            <p:spPr>
+              <a:xfrm>
+                <a:off x="6294120" y="1493520"/>
+                <a:ext cx="1775460" cy="1844040"/>
+              </a:xfrm>
+              <a:prstGeom prst="rect">
+                <a:avLst/>
+              </a:prstGeom>
+            </p:spPr>
+          </p:pic>
+        </mc:Fallback>
+      </mc:AlternateContent>
+      <mc:AlternateContent xmlns:mc="http://schemas.openxmlformats.org/markup-compatibility/2006" xmlns:p14="http://schemas.microsoft.com/office/powerpoint/2010/main">
+        <mc:Choice Requires="p14">
+          <p:contentPart p14:bwMode="auto" r:id="rId5">
+            <p14:nvContentPartPr>
+              <p14:cNvPr id="11" name="잉크 28"/>
+              <p14:cNvContentPartPr/>
+              <p14:nvPr/>
+            </p14:nvContentPartPr>
+            <p14:xfrm>
+              <a:off x="739140" y="1303020"/>
+              <a:ext cx="274320" cy="754380"/>
+            </p14:xfrm>
+          </p:contentPart>
+        </mc:Choice>
+        <mc:Fallback>
+          <p:pic>
+            <p:nvPicPr>
+              <p:cNvPr id="11" name="잉크 28"/>
+              <p:cNvPicPr/>
+              <p:nvPr/>
+            </p:nvPicPr>
+            <p:blipFill>
+              <a:blip r:embed="rId6"/>
+              <a:stretch>
+                <a:fillRect/>
+              </a:stretch>
+            </p:blipFill>
+            <p:spPr>
+              <a:xfrm>
+                <a:off x="739140" y="1303020"/>
+                <a:ext cx="274320" cy="754380"/>
+              </a:xfrm>
+              <a:prstGeom prst="rect">
+                <a:avLst/>
+              </a:prstGeom>
+            </p:spPr>
+          </p:pic>
+        </mc:Fallback>
+      </mc:AlternateContent>
+      <mc:AlternateContent xmlns:mc="http://schemas.openxmlformats.org/markup-compatibility/2006" xmlns:p14="http://schemas.microsoft.com/office/powerpoint/2010/main">
+        <mc:Choice Requires="p14">
+          <p:contentPart p14:bwMode="auto" r:id="rId7">
+            <p14:nvContentPartPr>
+              <p14:cNvPr id="12" name="잉크 31"/>
+              <p14:cNvContentPartPr/>
+              <p14:nvPr/>
+            </p14:nvContentPartPr>
+            <p14:xfrm>
+              <a:off x="1203960" y="1485900"/>
+              <a:ext cx="1760220" cy="30480"/>
+            </p14:xfrm>
+          </p:contentPart>
+        </mc:Choice>
+        <mc:Fallback>
+          <p:pic>
+            <p:nvPicPr>
+              <p:cNvPr id="12" name="잉크 31"/>
+              <p:cNvPicPr/>
+              <p:nvPr/>
+            </p:nvPicPr>
+            <p:blipFill>
+              <a:blip r:embed="rId8"/>
+              <a:stretch>
+                <a:fillRect/>
+              </a:stretch>
+            </p:blipFill>
+            <p:spPr>
+              <a:xfrm>
+                <a:off x="1203960" y="1485900"/>
+                <a:ext cx="1760220" cy="30480"/>
+              </a:xfrm>
+              <a:prstGeom prst="rect">
+                <a:avLst/>
+              </a:prstGeom>
+            </p:spPr>
+          </p:pic>
+        </mc:Fallback>
+      </mc:AlternateContent>
+      <mc:AlternateContent xmlns:mc="http://schemas.openxmlformats.org/markup-compatibility/2006" xmlns:p14="http://schemas.microsoft.com/office/powerpoint/2010/main">
+        <mc:Choice Requires="p14">
+          <p:contentPart p14:bwMode="auto" r:id="rId9">
+            <p14:nvContentPartPr>
+              <p14:cNvPr id="13" name="잉크 34"/>
+              <p14:cNvContentPartPr/>
+              <p14:nvPr/>
+            </p14:nvContentPartPr>
+            <p14:xfrm>
+              <a:off x="1272540" y="1927860"/>
+              <a:ext cx="1684020" cy="45720"/>
+            </p14:xfrm>
+          </p:contentPart>
+        </mc:Choice>
+        <mc:Fallback>
+          <p:pic>
+            <p:nvPicPr>
+              <p:cNvPr id="13" name="잉크 34"/>
+              <p:cNvPicPr/>
+              <p:nvPr/>
+            </p:nvPicPr>
+            <p:blipFill>
+              <a:blip r:embed="rId10"/>
+              <a:stretch>
+                <a:fillRect/>
+              </a:stretch>
+            </p:blipFill>
+            <p:spPr>
+              <a:xfrm>
+                <a:off x="1272540" y="1927860"/>
+                <a:ext cx="1684020" cy="45720"/>
+              </a:xfrm>
+              <a:prstGeom prst="rect">
+                <a:avLst/>
+              </a:prstGeom>
+            </p:spPr>
+          </p:pic>
+        </mc:Fallback>
+      </mc:AlternateContent>
     </p:spTree>
     <p:extLst>
       <p:ext uri="{BB962C8B-B14F-4D97-AF65-F5344CB8AC3E}">
@@ -10138,6 +11200,21 @@
   <p:clrMapOvr>
     <a:masterClrMapping/>
   </p:clrMapOvr>
+  <mc:AlternateContent xmlns:mc="http://schemas.openxmlformats.org/markup-compatibility/2006">
+    <mc:Choice xmlns:p14="http://schemas.microsoft.com/office/powerpoint/2010/main" Requires="p14">
+      <p:transition spd="slow" p14:dur="2000"/>
+    </mc:Choice>
+    <mc:Fallback>
+      <p:transition spd="slow"/>
+    </mc:Fallback>
+  </mc:AlternateContent>
+  <p:timing>
+    <p:tnLst>
+      <p:par>
+        <p:cTn id="1" dur="indefinite" restart="never" nodeType="tmRoot"/>
+      </p:par>
+    </p:tnLst>
+  </p:timing>
 </p:sld>
 </file>
 

--- a/1학기/웹 프로그래밍/2026_웹 프로그래밍_part3.pptx
+++ b/1학기/웹 프로그래밍/2026_웹 프로그래밍_part3.pptx
@@ -2,7 +2,7 @@
 <file path=ppt/presentation.xml><?xml version="1.0" encoding="utf-8"?>
 <p:presentation xmlns:a="http://schemas.openxmlformats.org/drawingml/2006/main" xmlns:r="http://schemas.openxmlformats.org/officeDocument/2006/relationships" xmlns:p="http://schemas.openxmlformats.org/presentationml/2006/main" xmlns:p14="http://schemas.microsoft.com/office/powerpoint/2010/main" saveSubsetFonts="1">
   <p:sldMasterIdLst>
-    <p:sldMasterId id="2147483678" r:id="rId5"/>
+    <p:sldMasterId id="2147483682" r:id="rId5"/>
   </p:sldMasterIdLst>
   <p:notesMasterIdLst>
     <p:notesMasterId r:id="rId7"/>
@@ -759,6 +759,214 @@
 </inkml:ink>
 </file>
 
+<file path=ppt/ink/ink30.xml><?xml version="1.0" encoding="utf-8"?>
+<inkml:ink xmlns:inkml="http://www.w3.org/2003/InkML">
+  <inkml:definitions>
+    <inkml:context xml:id="ctx0">
+      <inkml:inkSource xml:id="inkSrc0">
+        <inkml:traceFormat>
+          <inkml:channel name="X" type="integer" max="3200" units="cm"/>
+          <inkml:channel name="Y" type="integer" max="1080" units="cm"/>
+        </inkml:traceFormat>
+        <inkml:channelProperties>
+          <inkml:channelProperty channel="X" name="resolution" value="66.666656" units="1/cm"/>
+          <inkml:channelProperty channel="Y" name="resolution" value="40.000000" units="1/cm"/>
+        </inkml:channelProperties>
+      </inkml:inkSource>
+    </inkml:context>
+    <inkml:brush xml:id="br0">
+      <inkml:brushProperty name="width" value="0.035278" units="cm"/>
+      <inkml:brushProperty name="height" value="0.035278" units="cm"/>
+      <inkml:brushProperty name="color" value="#ff0000"/>
+      <inkml:brushProperty name="fitToCurve" value="1"/>
+    </inkml:brush>
+  </inkml:definitions>
+  <inkml:trace contextRef="#ctx0" brushRef="#br0">952 0,'-64'42,"-20"85,-22 0,0-21,-127 148,149-170,-1 1,0 0,43-43,21 0,0-21,0 1,21-1,21-21,42 0,-21 0,128 0,-64 0,190-21,-148-1,-63 22,42-21,-43 0,1 0,0 0,-43 21,22-21,-22 21,-21-22,0 22,0 0,1 0,-1 0,-85 0,43 0,-64 0,-84-42,42 21,-21 0,0-43,-191-20,191 20,63 22,22 21,-1-1,22 22,21-21,0 21,0 0,21 21,21 1,0 20,-21 0,21 43,21-22,1 22,62 106,-62-64,-1 0,43 21,-64-106,0 22,0-1,22-21,-43-20,21 20,0-21,0-21,-21 21,0 0,0 1,21-22,0 0,1 0,-1-22,-21 1,0 0,0-42,0-1,0 22,0-43,0-21,0 0,-21-21,-1-21,-41-106,63 148,0-21,0 22,0 41,0-21,21 22,21-1,-20 43,-22 0,42 21,-21 0,-21 0</inkml:trace>
+</inkml:ink>
+</file>
+
+<file path=ppt/ink/ink31.xml><?xml version="1.0" encoding="utf-8"?>
+<inkml:ink xmlns:inkml="http://www.w3.org/2003/InkML">
+  <inkml:definitions>
+    <inkml:context xml:id="ctx0">
+      <inkml:inkSource xml:id="inkSrc0">
+        <inkml:traceFormat>
+          <inkml:channel name="X" type="integer" max="3200" units="cm"/>
+          <inkml:channel name="Y" type="integer" max="1080" units="cm"/>
+        </inkml:traceFormat>
+        <inkml:channelProperties>
+          <inkml:channelProperty channel="X" name="resolution" value="66.666656" units="1/cm"/>
+          <inkml:channelProperty channel="Y" name="resolution" value="40.000000" units="1/cm"/>
+        </inkml:channelProperties>
+      </inkml:inkSource>
+    </inkml:context>
+    <inkml:brush xml:id="br0">
+      <inkml:brushProperty name="width" value="0.035278" units="cm"/>
+      <inkml:brushProperty name="height" value="0.035278" units="cm"/>
+      <inkml:brushProperty name="color" value="#ff0000"/>
+      <inkml:brushProperty name="fitToCurve" value="1"/>
+    </inkml:brush>
+  </inkml:definitions>
+  <inkml:trace contextRef="#ctx0" brushRef="#br0">2476 529,'-42'42,"20"0,-62 1,-86 62,22 1,-21-42,21 84,21-42,-85 21,22 21,-128 64,170-107,21-41,42-22,-21 1,85-43,0 42,-21-42,21 21,21 0,-43-21,1 21,21-21,0 43,-1-22,-20 0,42 0,-42-21,0 43,63-43,21 0,-21 0,21 0,-20 0,20 0,43 0,20 0,44 0,-86 21,1 0,84 0,-21-21,21 0,42 0,-20 21,-22-21,-42 0,-22 0,-20 0,-22 0,1 0,-1 0,0 0,22 0,-22 0,-21 0,22 0,-22 0,21 0,0 0,-20 0,41 0,1 0,-43 0,21 0,-21 0,22 0,-22 0,-21-42,0 21,-21 0,-43-64,-63-84,-190-297,105 233,106 43,-21-1,-42 1,21 20,84 43,22 43,-1-1,1 43,0 20,-1-20,22 42,-21-42,0 42,20 0,-20 0,21 0,-21-42,-1 42,43 42,0-21,0 85,0 105,0-20,0 42,0 42,0 85,43 84,-22-105,0 21,21-106,-21 21,-21-127,43-84,-43-22,0-21,42 21,-42 1,0-22,21-21,-21-42,21-43,1-63,20-43,0 1,64-22,190-275,-126 254,-1 43,-63-1,21-20,0-1,21 22,-42-22,-21 64,-22 63,-21 22,1 20,20 22,-63 21</inkml:trace>
+</inkml:ink>
+</file>
+
+<file path=ppt/ink/ink32.xml><?xml version="1.0" encoding="utf-8"?>
+<inkml:ink xmlns:inkml="http://www.w3.org/2003/InkML">
+  <inkml:definitions>
+    <inkml:context xml:id="ctx0">
+      <inkml:inkSource xml:id="inkSrc0">
+        <inkml:traceFormat>
+          <inkml:channel name="X" type="integer" max="3200" units="cm"/>
+          <inkml:channel name="Y" type="integer" max="1080" units="cm"/>
+        </inkml:traceFormat>
+        <inkml:channelProperties>
+          <inkml:channelProperty channel="X" name="resolution" value="66.666656" units="1/cm"/>
+          <inkml:channelProperty channel="Y" name="resolution" value="40.000000" units="1/cm"/>
+        </inkml:channelProperties>
+      </inkml:inkSource>
+    </inkml:context>
+    <inkml:brush xml:id="br0">
+      <inkml:brushProperty name="width" value="0.035278" units="cm"/>
+      <inkml:brushProperty name="height" value="0.035278" units="cm"/>
+      <inkml:brushProperty name="color" value="#ff0000"/>
+      <inkml:brushProperty name="fitToCurve" value="1"/>
+    </inkml:brush>
+  </inkml:definitions>
+  <inkml:trace contextRef="#ctx0" brushRef="#br0">2158 0,'0'21,"0"21,0 0,0 22,0 42,0 42,-21 0,-21 0,-43 0,-42 85,-254 296,170-338,41 20,1-62,21 41,105-148,1 1,0-1,-1 43,22-43,-21-21,0 43,-22-1,-42 107,64-128,21 0,-22 1,1-1,42-21,-42 21,42-20,0 20,-43 0,43-21,-21 1,-21 62,0-84,63 0,-21 21,-42 22,84-43,21-21,-105 42,42-21</inkml:trace>
+</inkml:ink>
+</file>
+
+<file path=ppt/ink/ink33.xml><?xml version="1.0" encoding="utf-8"?>
+<inkml:ink xmlns:inkml="http://www.w3.org/2003/InkML">
+  <inkml:definitions>
+    <inkml:context xml:id="ctx0">
+      <inkml:inkSource xml:id="inkSrc0">
+        <inkml:traceFormat>
+          <inkml:channel name="X" type="integer" max="3200" units="cm"/>
+          <inkml:channel name="Y" type="integer" max="1080" units="cm"/>
+        </inkml:traceFormat>
+        <inkml:channelProperties>
+          <inkml:channelProperty channel="X" name="resolution" value="66.666656" units="1/cm"/>
+          <inkml:channelProperty channel="Y" name="resolution" value="40.000000" units="1/cm"/>
+        </inkml:channelProperties>
+      </inkml:inkSource>
+    </inkml:context>
+    <inkml:brush xml:id="br0">
+      <inkml:brushProperty name="width" value="0.035278" units="cm"/>
+      <inkml:brushProperty name="height" value="0.035278" units="cm"/>
+      <inkml:brushProperty name="color" value="#ff0000"/>
+      <inkml:brushProperty name="fitToCurve" value="1"/>
+    </inkml:brush>
+  </inkml:definitions>
+  <inkml:trace contextRef="#ctx0" brushRef="#br0">656 0,'-85'42,"43"0,-43 22,21-1,1-21,21-20,-22 41,22-21,-22 22,43-22,-21 1,0-1,63-42,0 0,21 0,22 0,41 0,-41 0,-1 0,86 0,105 0,-149 0,-83 0,20 0,-42-21,0 21</inkml:trace>
+</inkml:ink>
+</file>
+
+<file path=ppt/ink/ink34.xml><?xml version="1.0" encoding="utf-8"?>
+<inkml:ink xmlns:inkml="http://www.w3.org/2003/InkML">
+  <inkml:definitions>
+    <inkml:context xml:id="ctx0">
+      <inkml:inkSource xml:id="inkSrc0">
+        <inkml:traceFormat>
+          <inkml:channel name="X" type="integer" max="3200" units="cm"/>
+          <inkml:channel name="Y" type="integer" max="1080" units="cm"/>
+        </inkml:traceFormat>
+        <inkml:channelProperties>
+          <inkml:channelProperty channel="X" name="resolution" value="66.666656" units="1/cm"/>
+          <inkml:channelProperty channel="Y" name="resolution" value="40.000000" units="1/cm"/>
+        </inkml:channelProperties>
+      </inkml:inkSource>
+    </inkml:context>
+    <inkml:brush xml:id="br0">
+      <inkml:brushProperty name="width" value="0.035278" units="cm"/>
+      <inkml:brushProperty name="height" value="0.035278" units="cm"/>
+      <inkml:brushProperty name="color" value="#ff0000"/>
+      <inkml:brushProperty name="fitToCurve" value="1"/>
+    </inkml:brush>
+  </inkml:definitions>
+  <inkml:trace contextRef="#ctx0" brushRef="#br0">42 0,'0'21,"0"63,0-20,0 20,0 22,0-42,0-22,0 0,0 1,0 20,0 1,0-1,0 128,0-107,0-41,0-1,0 0,0 1,-42-22,42-21</inkml:trace>
+</inkml:ink>
+</file>
+
+<file path=ppt/ink/ink35.xml><?xml version="1.0" encoding="utf-8"?>
+<inkml:ink xmlns:inkml="http://www.w3.org/2003/InkML">
+  <inkml:definitions>
+    <inkml:context xml:id="ctx0">
+      <inkml:inkSource xml:id="inkSrc0">
+        <inkml:traceFormat>
+          <inkml:channel name="X" type="integer" max="3200" units="cm"/>
+          <inkml:channel name="Y" type="integer" max="1080" units="cm"/>
+        </inkml:traceFormat>
+        <inkml:channelProperties>
+          <inkml:channelProperty channel="X" name="resolution" value="66.666656" units="1/cm"/>
+          <inkml:channelProperty channel="Y" name="resolution" value="40.000000" units="1/cm"/>
+        </inkml:channelProperties>
+      </inkml:inkSource>
+    </inkml:context>
+    <inkml:brush xml:id="br0">
+      <inkml:brushProperty name="width" value="0.035278" units="cm"/>
+      <inkml:brushProperty name="height" value="0.035278" units="cm"/>
+      <inkml:brushProperty name="color" value="#ff0000"/>
+      <inkml:brushProperty name="fitToCurve" value="1"/>
+    </inkml:brush>
+  </inkml:definitions>
+  <inkml:trace contextRef="#ctx0" brushRef="#br0">2053 0,'-106'169,"-42"85,63-127,0 0,-63 63,42-42,-21-21,-127 212,85-148,-22-1,22 1,42-43,-42 0,84-42,43-64,0-21,42-21</inkml:trace>
+</inkml:ink>
+</file>
+
+<file path=ppt/ink/ink36.xml><?xml version="1.0" encoding="utf-8"?>
+<inkml:ink xmlns:inkml="http://www.w3.org/2003/InkML">
+  <inkml:definitions>
+    <inkml:context xml:id="ctx0">
+      <inkml:inkSource xml:id="inkSrc0">
+        <inkml:traceFormat>
+          <inkml:channel name="X" type="integer" max="3200" units="cm"/>
+          <inkml:channel name="Y" type="integer" max="1080" units="cm"/>
+        </inkml:traceFormat>
+        <inkml:channelProperties>
+          <inkml:channelProperty channel="X" name="resolution" value="66.666656" units="1/cm"/>
+          <inkml:channelProperty channel="Y" name="resolution" value="40.000000" units="1/cm"/>
+        </inkml:channelProperties>
+      </inkml:inkSource>
+    </inkml:context>
+    <inkml:brush xml:id="br0">
+      <inkml:brushProperty name="width" value="0.035278" units="cm"/>
+      <inkml:brushProperty name="height" value="0.035278" units="cm"/>
+      <inkml:brushProperty name="color" value="#ff0000"/>
+      <inkml:brushProperty name="fitToCurve" value="1"/>
+    </inkml:brush>
+  </inkml:definitions>
+  <inkml:trace contextRef="#ctx0" brushRef="#br0">0 931,'84'-170,"-63"86,22 20,20-42,22-21,-22 22,1 20,-1 21,-20 22,20 0,-42 0,22 42,-1 0,-21 0,0 21,22 0,-22 21,-21 0,0 1,21 63,-21 21,42-85,-42 21,0 1,0-22,0 22,0-1,-42-20,42-22,-21 42,-22-20,1-22,-21 0,20 0,1-21,21 42,-22-42,22 0,0 0,-21 0,-1 43,22-43,-21 42,0-42,63 0,21 0,-21 21,43-21,-1 43,-20-43,-22 21,63-21,1 21,21-21,-21 21,20 0,-20 0,0 1,21-1,-64 0,21 0,-41 21,-22-42</inkml:trace>
+</inkml:ink>
+</file>
+
+<file path=ppt/ink/ink37.xml><?xml version="1.0" encoding="utf-8"?>
+<inkml:ink xmlns:inkml="http://www.w3.org/2003/InkML">
+  <inkml:definitions>
+    <inkml:context xml:id="ctx0">
+      <inkml:inkSource xml:id="inkSrc0">
+        <inkml:traceFormat>
+          <inkml:channel name="X" type="integer" max="3200" units="cm"/>
+          <inkml:channel name="Y" type="integer" max="1080" units="cm"/>
+        </inkml:traceFormat>
+        <inkml:channelProperties>
+          <inkml:channelProperty channel="X" name="resolution" value="66.666656" units="1/cm"/>
+          <inkml:channelProperty channel="Y" name="resolution" value="40.000000" units="1/cm"/>
+        </inkml:channelProperties>
+      </inkml:inkSource>
+    </inkml:context>
+    <inkml:brush xml:id="br0">
+      <inkml:brushProperty name="width" value="0.035278" units="cm"/>
+      <inkml:brushProperty name="height" value="0.035278" units="cm"/>
+      <inkml:brushProperty name="color" value="#ff0000"/>
+      <inkml:brushProperty name="fitToCurve" value="1"/>
+    </inkml:brush>
+  </inkml:definitions>
+  <inkml:trace contextRef="#ctx0" brushRef="#br0">21 0,'0'21,"0"0,0 0,0 0,-21-21,21-21,0 0,0 21</inkml:trace>
+</inkml:ink>
+</file>
+
 <file path=ppt/ink/ink4.xml><?xml version="1.0" encoding="utf-8"?>
 <inkml:ink xmlns:inkml="http://www.w3.org/2003/InkML">
   <inkml:definitions>
@@ -11767,7 +11975,7 @@
 </file>
 
 <file path=ppt/slides/slide26.xml><?xml version="1.0" encoding="utf-8"?>
-<p:sld xmlns:a="http://schemas.openxmlformats.org/drawingml/2006/main" xmlns:r="http://schemas.openxmlformats.org/officeDocument/2006/relationships" xmlns:p="http://schemas.openxmlformats.org/presentationml/2006/main">
+<p:sld xmlns:a="http://schemas.openxmlformats.org/drawingml/2006/main" xmlns:r="http://schemas.openxmlformats.org/officeDocument/2006/relationships" xmlns:p="http://schemas.openxmlformats.org/presentationml/2006/main" xmlns:p14="http://schemas.microsoft.com/office/powerpoint/2010/main">
   <p:cSld>
     <p:spTree>
       <p:nvGrpSpPr>
@@ -11799,7 +12007,12 @@
             <p:ph type="title"/>
           </p:nvPr>
         </p:nvSpPr>
-        <p:spPr/>
+        <p:spPr>
+          <a:xfrm>
+            <a:off x="443230" y="146050"/>
+            <a:ext cx="7773035" cy="762635"/>
+          </a:xfrm>
+        </p:spPr>
         <p:txBody>
           <a:bodyPr/>
           <a:lstStyle/>
@@ -11845,7 +12058,7 @@
         <p:spPr>
           <a:xfrm>
             <a:off x="444500" y="1152525"/>
-            <a:ext cx="8447980" cy="5019675"/>
+            <a:ext cx="8448040" cy="5019675"/>
           </a:xfrm>
         </p:spPr>
         <p:txBody>
@@ -11911,7 +12124,12 @@
             <p:ph type="sldNum" sz="quarter" idx="10"/>
           </p:nvPr>
         </p:nvSpPr>
-        <p:spPr/>
+        <p:spPr>
+          <a:xfrm>
+            <a:off x="7112000" y="6419850"/>
+            <a:ext cx="1905635" cy="305435"/>
+          </a:xfrm>
+        </p:spPr>
         <p:txBody>
           <a:bodyPr/>
           <a:lstStyle/>
@@ -11946,7 +12164,12 @@
             <p:ph type="ftr" sz="quarter" idx="11"/>
           </p:nvPr>
         </p:nvSpPr>
-        <p:spPr/>
+        <p:spPr>
+          <a:xfrm>
+            <a:off x="897255" y="6393180"/>
+            <a:ext cx="3110230" cy="349885"/>
+          </a:xfrm>
+        </p:spPr>
         <p:txBody>
           <a:bodyPr/>
           <a:lstStyle/>
@@ -11972,8 +12195,8 @@
         </p:nvSpPr>
         <p:spPr>
           <a:xfrm>
-            <a:off x="768328" y="1628800"/>
-            <a:ext cx="3528392" cy="1754326"/>
+            <a:off x="768350" y="1628775"/>
+            <a:ext cx="3529330" cy="1753235"/>
           </a:xfrm>
           <a:prstGeom prst="rect">
             <a:avLst/>
@@ -11986,27 +12209,40 @@
           </a:ln>
         </p:spPr>
         <p:txBody>
-          <a:bodyPr wrap="square" rtlCol="0">
+          <a:bodyPr wrap="square" lIns="91440" tIns="45720" rIns="91440" bIns="45720" numCol="1" vert="horz" anchor="t">
             <a:spAutoFit/>
           </a:bodyPr>
           <a:lstStyle/>
           <a:p>
-            <a:r>
-              <a:rPr lang="en-US" altLang="ko-KR" dirty="0">
+            <a:pPr marL="0" indent="0">
+              <a:buFontTx/>
+              <a:buNone/>
+            </a:pPr>
+            <a:r>
+              <a:rPr lang="en-US" altLang="ko-KR">
                 <a:solidFill>
                   <a:srgbClr val="FF0000"/>
                 </a:solidFill>
               </a:rPr>
               <a:t>ul.style1 { list-style-type: circle; }</a:t>
             </a:r>
-          </a:p>
-          <a:p>
-            <a:r>
-              <a:rPr lang="en-US" altLang="ko-KR" dirty="0"/>
+            <a:endParaRPr lang="ko-KR" altLang="en-US">
+              <a:solidFill>
+                <a:srgbClr val="FF0000"/>
+              </a:solidFill>
+            </a:endParaRPr>
+          </a:p>
+          <a:p>
+            <a:pPr marL="0" indent="0">
+              <a:buFontTx/>
+              <a:buNone/>
+            </a:pPr>
+            <a:r>
+              <a:rPr lang="en-US" altLang="ko-KR"/>
               <a:t>&lt;ul class=</a:t>
             </a:r>
             <a:r>
-              <a:rPr lang="ko-KR" altLang="en-US" sz="1800" b="1" dirty="0">
+              <a:rPr lang="ko-KR" altLang="en-US" sz="1800" b="1">
                 <a:solidFill>
                   <a:srgbClr val="FF0000"/>
                 </a:solidFill>
@@ -12014,7 +12250,7 @@
               <a:t>"</a:t>
             </a:r>
             <a:r>
-              <a:rPr lang="en-US" altLang="ko-KR" dirty="0">
+              <a:rPr lang="en-US" altLang="ko-KR">
                 <a:solidFill>
                   <a:srgbClr val="FF0000"/>
                 </a:solidFill>
@@ -12022,7 +12258,7 @@
               <a:t>style1</a:t>
             </a:r>
             <a:r>
-              <a:rPr lang="ko-KR" altLang="en-US" sz="1800" b="1" dirty="0">
+              <a:rPr lang="ko-KR" altLang="en-US" sz="1800" b="1">
                 <a:solidFill>
                   <a:srgbClr val="FF0000"/>
                 </a:solidFill>
@@ -12030,58 +12266,78 @@
               <a:t>"</a:t>
             </a:r>
             <a:r>
-              <a:rPr lang="en-US" altLang="ko-KR" dirty="0"/>
+              <a:rPr lang="en-US" altLang="ko-KR"/>
               <a:t>&gt;</a:t>
             </a:r>
-          </a:p>
-          <a:p>
-            <a:r>
-              <a:rPr lang="en-US" altLang="ko-KR" dirty="0"/>
+            <a:endParaRPr lang="ko-KR" altLang="en-US"/>
+          </a:p>
+          <a:p>
+            <a:pPr marL="0" indent="0">
+              <a:buFontTx/>
+              <a:buNone/>
+            </a:pPr>
+            <a:r>
+              <a:rPr lang="en-US" altLang="ko-KR"/>
               <a:t>	&lt;li&gt;</a:t>
             </a:r>
             <a:r>
-              <a:rPr lang="ko-KR" altLang="en-US" dirty="0"/>
+              <a:rPr lang="ko-KR" altLang="en-US"/>
               <a:t>우유</a:t>
             </a:r>
             <a:r>
-              <a:rPr lang="en-US" altLang="ko-KR" dirty="0"/>
+              <a:rPr lang="en-US" altLang="ko-KR"/>
               <a:t>&lt;/li&gt;</a:t>
             </a:r>
-          </a:p>
-          <a:p>
-            <a:r>
-              <a:rPr lang="en-US" altLang="ko-KR" dirty="0"/>
+            <a:endParaRPr lang="ko-KR" altLang="en-US"/>
+          </a:p>
+          <a:p>
+            <a:pPr marL="0" indent="0">
+              <a:buFontTx/>
+              <a:buNone/>
+            </a:pPr>
+            <a:r>
+              <a:rPr lang="en-US" altLang="ko-KR"/>
               <a:t>	&lt;li&gt;</a:t>
             </a:r>
             <a:r>
-              <a:rPr lang="ko-KR" altLang="en-US" dirty="0"/>
+              <a:rPr lang="ko-KR" altLang="en-US"/>
               <a:t>커피</a:t>
             </a:r>
             <a:r>
-              <a:rPr lang="en-US" altLang="ko-KR" dirty="0"/>
+              <a:rPr lang="en-US" altLang="ko-KR"/>
               <a:t>&lt;/li&gt;</a:t>
             </a:r>
-          </a:p>
-          <a:p>
-            <a:r>
-              <a:rPr lang="en-US" altLang="ko-KR" dirty="0"/>
+            <a:endParaRPr lang="ko-KR" altLang="en-US"/>
+          </a:p>
+          <a:p>
+            <a:pPr marL="0" indent="0">
+              <a:buFontTx/>
+              <a:buNone/>
+            </a:pPr>
+            <a:r>
+              <a:rPr lang="en-US" altLang="ko-KR"/>
               <a:t>	&lt;li&gt;</a:t>
             </a:r>
             <a:r>
-              <a:rPr lang="ko-KR" altLang="en-US" dirty="0"/>
+              <a:rPr lang="ko-KR" altLang="en-US"/>
               <a:t>홍차</a:t>
             </a:r>
             <a:r>
-              <a:rPr lang="en-US" altLang="ko-KR" dirty="0"/>
+              <a:rPr lang="en-US" altLang="ko-KR"/>
               <a:t>&lt;/li&gt;</a:t>
             </a:r>
-          </a:p>
-          <a:p>
-            <a:r>
-              <a:rPr lang="en-US" altLang="ko-KR" dirty="0"/>
+            <a:endParaRPr lang="ko-KR" altLang="en-US"/>
+          </a:p>
+          <a:p>
+            <a:pPr marL="0" indent="0">
+              <a:buFontTx/>
+              <a:buNone/>
+            </a:pPr>
+            <a:r>
+              <a:rPr lang="en-US" altLang="ko-KR"/>
               <a:t>&lt;/ul&gt;</a:t>
             </a:r>
-            <a:endParaRPr lang="ko-KR" altLang="en-US" dirty="0"/>
+            <a:endParaRPr lang="ko-KR" altLang="en-US"/>
           </a:p>
         </p:txBody>
       </p:sp>
@@ -12099,8 +12355,8 @@
         </p:nvSpPr>
         <p:spPr>
           <a:xfrm>
-            <a:off x="4536108" y="1628800"/>
-            <a:ext cx="3839564" cy="1754326"/>
+            <a:off x="4535805" y="1628775"/>
+            <a:ext cx="3839845" cy="1754505"/>
           </a:xfrm>
           <a:prstGeom prst="rect">
             <a:avLst/>
@@ -12234,8 +12490,8 @@
         </p:blipFill>
         <p:spPr>
           <a:xfrm>
-            <a:off x="768328" y="3681037"/>
-            <a:ext cx="1442814" cy="1414798"/>
+            <a:off x="768350" y="3681095"/>
+            <a:ext cx="1442720" cy="1414780"/>
           </a:xfrm>
           <a:prstGeom prst="rect">
             <a:avLst/>
@@ -12264,14 +12520,53 @@
         </p:blipFill>
         <p:spPr>
           <a:xfrm>
-            <a:off x="4536108" y="3681037"/>
-            <a:ext cx="1442815" cy="1414799"/>
+            <a:off x="4535805" y="3681095"/>
+            <a:ext cx="1442720" cy="1414780"/>
           </a:xfrm>
           <a:prstGeom prst="rect">
             <a:avLst/>
           </a:prstGeom>
         </p:spPr>
       </p:pic>
+      <mc:AlternateContent xmlns:mc="http://schemas.openxmlformats.org/markup-compatibility/2006" xmlns:p14="http://schemas.microsoft.com/office/powerpoint/2010/main">
+        <mc:Choice Requires="p14">
+          <p:contentPart p14:bwMode="auto" r:id="rId4">
+            <p14:nvContentPartPr>
+              <p14:cNvPr id="13" name="잉크 35"/>
+              <p14:cNvContentPartPr/>
+              <p14:nvPr/>
+            </p14:nvContentPartPr>
+            <p14:xfrm>
+              <a:off x="129540" y="1836420"/>
+              <a:ext cx="563880" cy="647700"/>
+            </p14:xfrm>
+          </p:contentPart>
+        </mc:Choice>
+        <mc:Fallback>
+          <p:pic>
+            <p:nvPicPr>
+              <p:cNvPr id="13" name="잉크 35"/>
+              <p:cNvPicPr/>
+              <p:nvPr/>
+            </p:nvPicPr>
+            <p:blipFill>
+              <a:blip r:embed="rId5"/>
+              <a:stretch>
+                <a:fillRect/>
+              </a:stretch>
+            </p:blipFill>
+            <p:spPr>
+              <a:xfrm>
+                <a:off x="129540" y="1836420"/>
+                <a:ext cx="563880" cy="647700"/>
+              </a:xfrm>
+              <a:prstGeom prst="rect">
+                <a:avLst/>
+              </a:prstGeom>
+            </p:spPr>
+          </p:pic>
+        </mc:Fallback>
+      </mc:AlternateContent>
     </p:spTree>
     <p:extLst>
       <p:ext uri="{BB962C8B-B14F-4D97-AF65-F5344CB8AC3E}">
@@ -12282,6 +12577,21 @@
   <p:clrMapOvr>
     <a:masterClrMapping/>
   </p:clrMapOvr>
+  <mc:AlternateContent xmlns:mc="http://schemas.openxmlformats.org/markup-compatibility/2006">
+    <mc:Choice xmlns:p14="http://schemas.microsoft.com/office/powerpoint/2010/main" Requires="p14">
+      <p:transition spd="slow" p14:dur="2000"/>
+    </mc:Choice>
+    <mc:Fallback>
+      <p:transition spd="slow"/>
+    </mc:Fallback>
+  </mc:AlternateContent>
+  <p:timing>
+    <p:tnLst>
+      <p:par>
+        <p:cTn id="1" dur="indefinite" restart="never" nodeType="tmRoot"/>
+      </p:par>
+    </p:tnLst>
+  </p:timing>
 </p:sld>
 </file>
 
@@ -12811,7 +13121,7 @@
 </file>
 
 <file path=ppt/slides/slide28.xml><?xml version="1.0" encoding="utf-8"?>
-<p:sld xmlns:a="http://schemas.openxmlformats.org/drawingml/2006/main" xmlns:r="http://schemas.openxmlformats.org/officeDocument/2006/relationships" xmlns:p="http://schemas.openxmlformats.org/presentationml/2006/main">
+<p:sld xmlns:a="http://schemas.openxmlformats.org/drawingml/2006/main" xmlns:r="http://schemas.openxmlformats.org/officeDocument/2006/relationships" xmlns:p="http://schemas.openxmlformats.org/presentationml/2006/main" xmlns:p14="http://schemas.microsoft.com/office/powerpoint/2010/main">
   <p:cSld>
     <p:spTree>
       <p:nvGrpSpPr>
@@ -12843,7 +13153,12 @@
             <p:ph type="title"/>
           </p:nvPr>
         </p:nvSpPr>
-        <p:spPr/>
+        <p:spPr>
+          <a:xfrm>
+            <a:off x="443230" y="146050"/>
+            <a:ext cx="7773035" cy="762635"/>
+          </a:xfrm>
+        </p:spPr>
         <p:txBody>
           <a:bodyPr/>
           <a:lstStyle/>
@@ -12888,8 +13203,8 @@
         </p:nvSpPr>
         <p:spPr>
           <a:xfrm>
-            <a:off x="444500" y="1052736"/>
-            <a:ext cx="7772400" cy="548283"/>
+            <a:off x="444500" y="1052830"/>
+            <a:ext cx="7772400" cy="548005"/>
           </a:xfrm>
         </p:spPr>
         <p:txBody>
@@ -12993,7 +13308,12 @@
             <p:ph type="sldNum" sz="quarter" idx="10"/>
           </p:nvPr>
         </p:nvSpPr>
-        <p:spPr/>
+        <p:spPr>
+          <a:xfrm>
+            <a:off x="7112000" y="6419850"/>
+            <a:ext cx="1905635" cy="305435"/>
+          </a:xfrm>
+        </p:spPr>
         <p:txBody>
           <a:bodyPr/>
           <a:lstStyle/>
@@ -13028,7 +13348,12 @@
             <p:ph type="ftr" sz="quarter" idx="11"/>
           </p:nvPr>
         </p:nvSpPr>
-        <p:spPr/>
+        <p:spPr>
+          <a:xfrm>
+            <a:off x="897255" y="6393180"/>
+            <a:ext cx="3110230" cy="349885"/>
+          </a:xfrm>
+        </p:spPr>
         <p:txBody>
           <a:bodyPr/>
           <a:lstStyle/>
@@ -13054,8 +13379,8 @@
         </p:nvSpPr>
         <p:spPr>
           <a:xfrm>
-            <a:off x="4445000" y="1052736"/>
-            <a:ext cx="4572000" cy="5324535"/>
+            <a:off x="4445000" y="1052830"/>
+            <a:ext cx="4572000" cy="5324475"/>
           </a:xfrm>
           <a:prstGeom prst="rect">
             <a:avLst/>
@@ -13732,8 +14057,8 @@
         </p:blipFill>
         <p:spPr>
           <a:xfrm>
-            <a:off x="1619672" y="1851936"/>
-            <a:ext cx="1466671" cy="4253344"/>
+            <a:off x="1619885" y="1851660"/>
+            <a:ext cx="1466850" cy="4253230"/>
           </a:xfrm>
           <a:prstGeom prst="rect">
             <a:avLst/>
@@ -13750,11 +14075,26 @@
   <p:clrMapOvr>
     <a:masterClrMapping/>
   </p:clrMapOvr>
+  <mc:AlternateContent xmlns:mc="http://schemas.openxmlformats.org/markup-compatibility/2006">
+    <mc:Choice xmlns:p14="http://schemas.microsoft.com/office/powerpoint/2010/main" Requires="p14">
+      <p:transition spd="slow" p14:dur="2000"/>
+    </mc:Choice>
+    <mc:Fallback>
+      <p:transition spd="slow"/>
+    </mc:Fallback>
+  </mc:AlternateContent>
+  <p:timing>
+    <p:tnLst>
+      <p:par>
+        <p:cTn id="1" dur="indefinite" restart="never" nodeType="tmRoot"/>
+      </p:par>
+    </p:tnLst>
+  </p:timing>
 </p:sld>
 </file>
 
 <file path=ppt/slides/slide29.xml><?xml version="1.0" encoding="utf-8"?>
-<p:sld xmlns:a="http://schemas.openxmlformats.org/drawingml/2006/main" xmlns:r="http://schemas.openxmlformats.org/officeDocument/2006/relationships" xmlns:p="http://schemas.openxmlformats.org/presentationml/2006/main">
+<p:sld xmlns:a="http://schemas.openxmlformats.org/drawingml/2006/main" xmlns:r="http://schemas.openxmlformats.org/officeDocument/2006/relationships" xmlns:p="http://schemas.openxmlformats.org/presentationml/2006/main" xmlns:p14="http://schemas.microsoft.com/office/powerpoint/2010/main">
   <p:cSld>
     <p:spTree>
       <p:nvGrpSpPr>
@@ -13786,7 +14126,12 @@
             <p:ph type="title"/>
           </p:nvPr>
         </p:nvSpPr>
-        <p:spPr/>
+        <p:spPr>
+          <a:xfrm>
+            <a:off x="443230" y="146050"/>
+            <a:ext cx="7773035" cy="762635"/>
+          </a:xfrm>
+        </p:spPr>
         <p:txBody>
           <a:bodyPr/>
           <a:lstStyle/>
@@ -13831,8 +14176,8 @@
         </p:nvSpPr>
         <p:spPr>
           <a:xfrm>
-            <a:off x="444500" y="1052736"/>
-            <a:ext cx="7772400" cy="831081"/>
+            <a:off x="444500" y="1052830"/>
+            <a:ext cx="7772400" cy="831215"/>
           </a:xfrm>
         </p:spPr>
         <p:txBody>
@@ -13880,7 +14225,12 @@
             <p:ph type="sldNum" sz="quarter" idx="10"/>
           </p:nvPr>
         </p:nvSpPr>
-        <p:spPr/>
+        <p:spPr>
+          <a:xfrm>
+            <a:off x="7112000" y="6419850"/>
+            <a:ext cx="1905635" cy="305435"/>
+          </a:xfrm>
+        </p:spPr>
         <p:txBody>
           <a:bodyPr/>
           <a:lstStyle/>
@@ -13915,7 +14265,12 @@
             <p:ph type="ftr" sz="quarter" idx="11"/>
           </p:nvPr>
         </p:nvSpPr>
-        <p:spPr/>
+        <p:spPr>
+          <a:xfrm>
+            <a:off x="897255" y="6393180"/>
+            <a:ext cx="3110230" cy="349885"/>
+          </a:xfrm>
+        </p:spPr>
         <p:txBody>
           <a:bodyPr/>
           <a:lstStyle/>
@@ -13941,8 +14296,8 @@
         </p:nvSpPr>
         <p:spPr>
           <a:xfrm>
-            <a:off x="611560" y="2060848"/>
-            <a:ext cx="4464496" cy="4154984"/>
+            <a:off x="611505" y="2060575"/>
+            <a:ext cx="4464685" cy="4154805"/>
           </a:xfrm>
           <a:prstGeom prst="rect">
             <a:avLst/>
@@ -14132,14 +14487,248 @@
         </p:blipFill>
         <p:spPr>
           <a:xfrm>
-            <a:off x="5258594" y="3573016"/>
-            <a:ext cx="3706812" cy="661586"/>
+            <a:off x="5258435" y="3573145"/>
+            <a:ext cx="3706495" cy="661670"/>
           </a:xfrm>
           <a:prstGeom prst="rect">
             <a:avLst/>
           </a:prstGeom>
         </p:spPr>
       </p:pic>
+      <mc:AlternateContent xmlns:mc="http://schemas.openxmlformats.org/markup-compatibility/2006" xmlns:p14="http://schemas.microsoft.com/office/powerpoint/2010/main">
+        <mc:Choice Requires="p14">
+          <p:contentPart p14:bwMode="auto" r:id="rId3">
+            <p14:nvContentPartPr>
+              <p14:cNvPr id="11" name="잉크 44"/>
+              <p14:cNvContentPartPr/>
+              <p14:nvPr/>
+            </p14:nvContentPartPr>
+            <p14:xfrm>
+              <a:off x="6819900" y="1851660"/>
+              <a:ext cx="998220" cy="1257300"/>
+            </p14:xfrm>
+          </p:contentPart>
+        </mc:Choice>
+        <mc:Fallback>
+          <p:pic>
+            <p:nvPicPr>
+              <p:cNvPr id="11" name="잉크 44"/>
+              <p:cNvPicPr/>
+              <p:nvPr/>
+            </p:nvPicPr>
+            <p:blipFill>
+              <a:blip r:embed="rId4"/>
+              <a:stretch>
+                <a:fillRect/>
+              </a:stretch>
+            </p:blipFill>
+            <p:spPr>
+              <a:xfrm>
+                <a:off x="6819900" y="1851660"/>
+                <a:ext cx="998220" cy="1257300"/>
+              </a:xfrm>
+              <a:prstGeom prst="rect">
+                <a:avLst/>
+              </a:prstGeom>
+            </p:spPr>
+          </p:pic>
+        </mc:Fallback>
+      </mc:AlternateContent>
+      <mc:AlternateContent xmlns:mc="http://schemas.openxmlformats.org/markup-compatibility/2006" xmlns:p14="http://schemas.microsoft.com/office/powerpoint/2010/main">
+        <mc:Choice Requires="p14">
+          <p:contentPart p14:bwMode="auto" r:id="rId5">
+            <p14:nvContentPartPr>
+              <p14:cNvPr id="12" name="잉크 46"/>
+              <p14:cNvContentPartPr/>
+              <p14:nvPr/>
+            </p14:nvContentPartPr>
+            <p14:xfrm>
+              <a:off x="7345680" y="4648200"/>
+              <a:ext cx="777240" cy="1249680"/>
+            </p14:xfrm>
+          </p:contentPart>
+        </mc:Choice>
+        <mc:Fallback>
+          <p:pic>
+            <p:nvPicPr>
+              <p:cNvPr id="12" name="잉크 46"/>
+              <p:cNvPicPr/>
+              <p:nvPr/>
+            </p:nvPicPr>
+            <p:blipFill>
+              <a:blip r:embed="rId6"/>
+              <a:stretch>
+                <a:fillRect/>
+              </a:stretch>
+            </p:blipFill>
+            <p:spPr>
+              <a:xfrm>
+                <a:off x="7345680" y="4648200"/>
+                <a:ext cx="777240" cy="1249680"/>
+              </a:xfrm>
+              <a:prstGeom prst="rect">
+                <a:avLst/>
+              </a:prstGeom>
+            </p:spPr>
+          </p:pic>
+        </mc:Fallback>
+      </mc:AlternateContent>
+      <mc:AlternateContent xmlns:mc="http://schemas.openxmlformats.org/markup-compatibility/2006" xmlns:p14="http://schemas.microsoft.com/office/powerpoint/2010/main">
+        <mc:Choice Requires="p14">
+          <p:contentPart p14:bwMode="auto" r:id="rId7">
+            <p14:nvContentPartPr>
+              <p14:cNvPr id="13" name="잉크 47"/>
+              <p14:cNvContentPartPr/>
+              <p14:nvPr/>
+            </p14:nvContentPartPr>
+            <p14:xfrm>
+              <a:off x="7978140" y="5280660"/>
+              <a:ext cx="342900" cy="205740"/>
+            </p14:xfrm>
+          </p:contentPart>
+        </mc:Choice>
+        <mc:Fallback>
+          <p:pic>
+            <p:nvPicPr>
+              <p:cNvPr id="13" name="잉크 47"/>
+              <p:cNvPicPr/>
+              <p:nvPr/>
+            </p:nvPicPr>
+            <p:blipFill>
+              <a:blip r:embed="rId8"/>
+              <a:stretch>
+                <a:fillRect/>
+              </a:stretch>
+            </p:blipFill>
+            <p:spPr>
+              <a:xfrm>
+                <a:off x="7978140" y="5280660"/>
+                <a:ext cx="342900" cy="205740"/>
+              </a:xfrm>
+              <a:prstGeom prst="rect">
+                <a:avLst/>
+              </a:prstGeom>
+            </p:spPr>
+          </p:pic>
+        </mc:Fallback>
+      </mc:AlternateContent>
+      <mc:AlternateContent xmlns:mc="http://schemas.openxmlformats.org/markup-compatibility/2006" xmlns:p14="http://schemas.microsoft.com/office/powerpoint/2010/main">
+        <mc:Choice Requires="p14">
+          <p:contentPart p14:bwMode="auto" r:id="rId9">
+            <p14:nvContentPartPr>
+              <p14:cNvPr id="14" name="잉크 48"/>
+              <p14:cNvContentPartPr/>
+              <p14:nvPr/>
+            </p14:nvContentPartPr>
+            <p14:xfrm>
+              <a:off x="8145780" y="5318760"/>
+              <a:ext cx="15240" cy="434340"/>
+            </p14:xfrm>
+          </p:contentPart>
+        </mc:Choice>
+        <mc:Fallback>
+          <p:pic>
+            <p:nvPicPr>
+              <p:cNvPr id="14" name="잉크 48"/>
+              <p:cNvPicPr/>
+              <p:nvPr/>
+            </p:nvPicPr>
+            <p:blipFill>
+              <a:blip r:embed="rId10"/>
+              <a:stretch>
+                <a:fillRect/>
+              </a:stretch>
+            </p:blipFill>
+            <p:spPr>
+              <a:xfrm>
+                <a:off x="8145780" y="5318760"/>
+                <a:ext cx="15240" cy="434340"/>
+              </a:xfrm>
+              <a:prstGeom prst="rect">
+                <a:avLst/>
+              </a:prstGeom>
+            </p:spPr>
+          </p:pic>
+        </mc:Fallback>
+      </mc:AlternateContent>
+      <mc:AlternateContent xmlns:mc="http://schemas.openxmlformats.org/markup-compatibility/2006" xmlns:p14="http://schemas.microsoft.com/office/powerpoint/2010/main">
+        <mc:Choice Requires="p14">
+          <p:contentPart p14:bwMode="auto" r:id="rId11">
+            <p14:nvContentPartPr>
+              <p14:cNvPr id="15" name="잉크 49"/>
+              <p14:cNvContentPartPr/>
+              <p14:nvPr/>
+            </p14:nvContentPartPr>
+            <p14:xfrm>
+              <a:off x="8267700" y="5128260"/>
+              <a:ext cx="739140" cy="906780"/>
+            </p14:xfrm>
+          </p:contentPart>
+        </mc:Choice>
+        <mc:Fallback>
+          <p:pic>
+            <p:nvPicPr>
+              <p:cNvPr id="15" name="잉크 49"/>
+              <p:cNvPicPr/>
+              <p:nvPr/>
+            </p:nvPicPr>
+            <p:blipFill>
+              <a:blip r:embed="rId12"/>
+              <a:stretch>
+                <a:fillRect/>
+              </a:stretch>
+            </p:blipFill>
+            <p:spPr>
+              <a:xfrm>
+                <a:off x="8267700" y="5128260"/>
+                <a:ext cx="739140" cy="906780"/>
+              </a:xfrm>
+              <a:prstGeom prst="rect">
+                <a:avLst/>
+              </a:prstGeom>
+            </p:spPr>
+          </p:pic>
+        </mc:Fallback>
+      </mc:AlternateContent>
+      <mc:AlternateContent xmlns:mc="http://schemas.openxmlformats.org/markup-compatibility/2006" xmlns:p14="http://schemas.microsoft.com/office/powerpoint/2010/main">
+        <mc:Choice Requires="p14">
+          <p:contentPart p14:bwMode="auto" r:id="rId13">
+            <p14:nvContentPartPr>
+              <p14:cNvPr id="16" name="잉크 50"/>
+              <p14:cNvContentPartPr/>
+              <p14:nvPr/>
+            </p14:nvContentPartPr>
+            <p14:xfrm>
+              <a:off x="8686800" y="5455920"/>
+              <a:ext cx="510540" cy="502920"/>
+            </p14:xfrm>
+          </p:contentPart>
+        </mc:Choice>
+        <mc:Fallback>
+          <p:pic>
+            <p:nvPicPr>
+              <p:cNvPr id="16" name="잉크 50"/>
+              <p:cNvPicPr/>
+              <p:nvPr/>
+            </p:nvPicPr>
+            <p:blipFill>
+              <a:blip r:embed="rId14"/>
+              <a:stretch>
+                <a:fillRect/>
+              </a:stretch>
+            </p:blipFill>
+            <p:spPr>
+              <a:xfrm>
+                <a:off x="8686800" y="5455920"/>
+                <a:ext cx="510540" cy="502920"/>
+              </a:xfrm>
+              <a:prstGeom prst="rect">
+                <a:avLst/>
+              </a:prstGeom>
+            </p:spPr>
+          </p:pic>
+        </mc:Fallback>
+      </mc:AlternateContent>
     </p:spTree>
     <p:extLst>
       <p:ext uri="{BB962C8B-B14F-4D97-AF65-F5344CB8AC3E}">
@@ -14150,6 +14739,21 @@
   <p:clrMapOvr>
     <a:masterClrMapping/>
   </p:clrMapOvr>
+  <mc:AlternateContent xmlns:mc="http://schemas.openxmlformats.org/markup-compatibility/2006">
+    <mc:Choice xmlns:p14="http://schemas.microsoft.com/office/powerpoint/2010/main" Requires="p14">
+      <p:transition spd="slow" p14:dur="2000"/>
+    </mc:Choice>
+    <mc:Fallback>
+      <p:transition spd="slow"/>
+    </mc:Fallback>
+  </mc:AlternateContent>
+  <p:timing>
+    <p:tnLst>
+      <p:par>
+        <p:cTn id="1" dur="indefinite" restart="never" nodeType="tmRoot"/>
+      </p:par>
+    </p:tnLst>
+  </p:timing>
 </p:sld>
 </file>
 
@@ -14694,7 +15298,7 @@
 </file>
 
 <file path=ppt/slides/slide30.xml><?xml version="1.0" encoding="utf-8"?>
-<p:sld xmlns:a="http://schemas.openxmlformats.org/drawingml/2006/main" xmlns:r="http://schemas.openxmlformats.org/officeDocument/2006/relationships" xmlns:p="http://schemas.openxmlformats.org/presentationml/2006/main">
+<p:sld xmlns:a="http://schemas.openxmlformats.org/drawingml/2006/main" xmlns:r="http://schemas.openxmlformats.org/officeDocument/2006/relationships" xmlns:p="http://schemas.openxmlformats.org/presentationml/2006/main" xmlns:p14="http://schemas.microsoft.com/office/powerpoint/2010/main">
   <p:cSld>
     <p:spTree>
       <p:nvGrpSpPr>
@@ -14726,7 +15330,12 @@
             <p:ph type="title"/>
           </p:nvPr>
         </p:nvSpPr>
-        <p:spPr/>
+        <p:spPr>
+          <a:xfrm>
+            <a:off x="443230" y="146050"/>
+            <a:ext cx="7773035" cy="762635"/>
+          </a:xfrm>
+        </p:spPr>
         <p:txBody>
           <a:bodyPr/>
           <a:lstStyle/>
@@ -14771,8 +15380,8 @@
         </p:nvSpPr>
         <p:spPr>
           <a:xfrm>
-            <a:off x="289449" y="1120422"/>
-            <a:ext cx="7772400" cy="1008112"/>
+            <a:off x="289560" y="1120140"/>
+            <a:ext cx="7772400" cy="1008380"/>
           </a:xfrm>
         </p:spPr>
         <p:txBody>
@@ -14856,7 +15465,12 @@
             <p:ph type="sldNum" sz="quarter" idx="10"/>
           </p:nvPr>
         </p:nvSpPr>
-        <p:spPr/>
+        <p:spPr>
+          <a:xfrm>
+            <a:off x="7112000" y="6419850"/>
+            <a:ext cx="1905635" cy="305435"/>
+          </a:xfrm>
+        </p:spPr>
         <p:txBody>
           <a:bodyPr/>
           <a:lstStyle/>
@@ -14891,7 +15505,12 @@
             <p:ph type="ftr" sz="quarter" idx="11"/>
           </p:nvPr>
         </p:nvSpPr>
-        <p:spPr/>
+        <p:spPr>
+          <a:xfrm>
+            <a:off x="897255" y="6393180"/>
+            <a:ext cx="3110230" cy="349885"/>
+          </a:xfrm>
+        </p:spPr>
         <p:txBody>
           <a:bodyPr/>
           <a:lstStyle/>
@@ -14917,8 +15536,8 @@
         </p:nvSpPr>
         <p:spPr>
           <a:xfrm>
-            <a:off x="3347864" y="2604342"/>
-            <a:ext cx="5508104" cy="3831818"/>
+            <a:off x="3347720" y="2604135"/>
+            <a:ext cx="5507990" cy="3831590"/>
           </a:xfrm>
           <a:prstGeom prst="rect">
             <a:avLst/>
@@ -15385,7 +16004,7 @@
         </p:blipFill>
         <p:spPr>
           <a:xfrm>
-            <a:off x="1474901" y="3537376"/>
+            <a:off x="1475105" y="3537585"/>
             <a:ext cx="1000125" cy="638175"/>
           </a:xfrm>
           <a:prstGeom prst="rect">
@@ -15393,6 +16012,45 @@
           </a:prstGeom>
         </p:spPr>
       </p:pic>
+      <mc:AlternateContent xmlns:mc="http://schemas.openxmlformats.org/markup-compatibility/2006" xmlns:p14="http://schemas.microsoft.com/office/powerpoint/2010/main">
+        <mc:Choice Requires="p14">
+          <p:contentPart p14:bwMode="auto" r:id="rId3">
+            <p14:nvContentPartPr>
+              <p14:cNvPr id="10" name="잉크 45"/>
+              <p14:cNvContentPartPr/>
+              <p14:nvPr/>
+            </p14:nvContentPartPr>
+            <p14:xfrm>
+              <a:off x="7132320" y="914400"/>
+              <a:ext cx="7620" cy="30480"/>
+            </p14:xfrm>
+          </p:contentPart>
+        </mc:Choice>
+        <mc:Fallback>
+          <p:pic>
+            <p:nvPicPr>
+              <p:cNvPr id="10" name="잉크 45"/>
+              <p:cNvPicPr/>
+              <p:nvPr/>
+            </p:nvPicPr>
+            <p:blipFill>
+              <a:blip r:embed="rId4"/>
+              <a:stretch>
+                <a:fillRect/>
+              </a:stretch>
+            </p:blipFill>
+            <p:spPr>
+              <a:xfrm>
+                <a:off x="7132320" y="914400"/>
+                <a:ext cx="7620" cy="30480"/>
+              </a:xfrm>
+              <a:prstGeom prst="rect">
+                <a:avLst/>
+              </a:prstGeom>
+            </p:spPr>
+          </p:pic>
+        </mc:Fallback>
+      </mc:AlternateContent>
     </p:spTree>
     <p:extLst>
       <p:ext uri="{BB962C8B-B14F-4D97-AF65-F5344CB8AC3E}">
@@ -15403,6 +16061,21 @@
   <p:clrMapOvr>
     <a:masterClrMapping/>
   </p:clrMapOvr>
+  <mc:AlternateContent xmlns:mc="http://schemas.openxmlformats.org/markup-compatibility/2006">
+    <mc:Choice xmlns:p14="http://schemas.microsoft.com/office/powerpoint/2010/main" Requires="p14">
+      <p:transition spd="slow" p14:dur="2000"/>
+    </mc:Choice>
+    <mc:Fallback>
+      <p:transition spd="slow"/>
+    </mc:Fallback>
+  </mc:AlternateContent>
+  <p:timing>
+    <p:tnLst>
+      <p:par>
+        <p:cTn id="1" dur="indefinite" restart="never" nodeType="tmRoot"/>
+      </p:par>
+    </p:tnLst>
+  </p:timing>
 </p:sld>
 </file>
 

--- a/1학기/웹 프로그래밍/2026_웹 프로그래밍_part3.pptx
+++ b/1학기/웹 프로그래밍/2026_웹 프로그래밍_part3.pptx
@@ -2,7 +2,7 @@
 <file path=ppt/presentation.xml><?xml version="1.0" encoding="utf-8"?>
 <p:presentation xmlns:a="http://schemas.openxmlformats.org/drawingml/2006/main" xmlns:r="http://schemas.openxmlformats.org/officeDocument/2006/relationships" xmlns:p="http://schemas.openxmlformats.org/presentationml/2006/main" xmlns:p14="http://schemas.microsoft.com/office/powerpoint/2010/main" saveSubsetFonts="1">
   <p:sldMasterIdLst>
-    <p:sldMasterId id="2147483682" r:id="rId5"/>
+    <p:sldMasterId id="2147483687" r:id="rId5"/>
   </p:sldMasterIdLst>
   <p:notesMasterIdLst>
     <p:notesMasterId r:id="rId7"/>
@@ -145,12 +145,12 @@
   <p:extLst>
     <p:ext uri="{EFAFB233-063F-42B5-8137-9DF3F51BA10A}">
       <p15:sldGuideLst xmlns:p15="http://schemas.microsoft.com/office/powerpoint/2012/main">
-        <p15:guide id="1" orient="horz" pos="2155" userDrawn="0">
+        <p15:guide id="1" orient="horz" pos="2153" userDrawn="0">
           <p15:clr>
             <a:srgbClr val="A4A3A4"/>
           </p15:clr>
         </p15:guide>
-        <p15:guide id="2" pos="2875" userDrawn="0">
+        <p15:guide id="2" pos="2873" userDrawn="0">
           <p15:clr>
             <a:srgbClr val="A4A3A4"/>
           </p15:clr>
@@ -599,7 +599,7 @@
       <inkml:brushProperty name="fitToCurve" value="1"/>
     </inkml:brush>
   </inkml:definitions>
-  <inkml:trace contextRef="#ctx0" brushRef="#br0">0 211,'21'0,"21"0,-21 0,21 0,22 0,-1 0,-41 0,-1 0,42 21,-42-21,43 0,-43 0,0 0,0 0,22 0,-22 21,0-21,0 0,22 0,-22 0,0 0,0 0,0 0,0 0,1 0,-1 0,0 0,0 0,0 0,0 0,1 0,-1 0,0 0,0 0,0 0,0 0,1 0,-1 0,0 0,21 0,-21 0,1 0,-1 0,0 0,0 0,0 0,0 0,1 0,-1 0,0 0,21 0,1 0,-22 0,0 0,0 0,0 0,0 0,22 0,-22 0,0 0,0 0,0 0,1 0,20 0,-21 0,0 0,0 0,1 0,-1 0,0 0,0 0,0 0,0 0,1 0,-1 0,0 0,0 0,21 0,-20 0,-1 0,0 0,0 0,21 0,-20 0,-1 22,0-22,0 0,0 0,0 0,1 0,-1 0,21 21,-21-21,0 0,1 0,-1 0,0 0,0 0,21 21,-20-21,-1 0,0 0,0 0,0 0,0 0,22 0,-22 0,0 0,21 0,-20 0,-1 0,0 0,0 0,0 0,0 0,1 0,-1 0,0 0,0 0,0 0,0 0,1 0,-1 0,0 0,0 0,0 0,0 0,22 0,-1 0,-21 0,0 0,1 0,-1 0,0 0,0 0,21 0,-20 0,-1 0,0 0,21 0,-21 0,1 0,-1 0,21 0,-21 0,22 0,-22 0,0 0,0 0,21 0,1 0,-22 0,0 0,21 0,-20 0,20 0,-21 0,0 0,0-21,22 21,-22-21,21-1,-21 22,1 0,20 0,-21-21,0 21,0 0,22 0,-22 0,21 0,1 0,-22 0,0 0,21 0,-21 0,1 0,-1 0,0 0,0 0,21 0,-20 0,-1 0,21 0,-21 0,0 0,1 0,-1 0,21 0,-21 0,0 0,1 0,-1 0,0 0,21 0,-21 0,1 0,-1 0,0 0,21 0,-21-21,1 21,20 0,0 0,-21 0,1 0,-1 0,21 0,-21 0,22 0,-22 0,0 0,21 0,-21 0,1 0,20 0,-21 0,0 0,0 0,1 0,-1 0,0 0,0 0,21 0,-20 0,-1 0,0 0,21 0,-21 0,1 0,-1 0,0-21,0 21,0 0,0 0,1 0,-1 0,0 0,0 0,0 0,0-21,1 21,20-21,-21 21,21-22,-20 22,-1 0,0 0,-21-21,42 21,-21-21,1 21,20 0,-21-21,21 21,-20-21,-1 21,0-21,0 21,0 0,22 0,-22 0,21 0,0-21,-20 21,20 0,-21 0,0 0,0 0,22 0,-1 0,-21 0,0 0,1 0,-1 0,0 0,42 0,-41 0,-1 0,63 0,-41 0,-22 0,0 0,43 0,-43 0,0 0,21 0,22 21,-22-21,0 0,1 0,-1 0,-21 0,43 0,-22 0,22 0,-22 0,-21 0,43 0,-22 0,0 0,1 21,-22-21,42 0,-20 0,-1 0,-21 21,43 0,-43-21,21 0,0 21,-20-21,-22 21,42-21,-21 0,0 0,22 22,-22-22,0 0,21 0,-21 0,1 0,-1 0,0 0,21 0,-21 0,1 0,-1 0,0 0,21 0,1 0,-22 0,0 0,0 0,0 0,22 0,-22 0,0 0,0-22,0 22,0 0,1-21,-1 21,21 0,-21 0,0 0,1 0,-1 0,0 0,0 0,21 0,-20 0,-1 21,-21-21</inkml:trace>
+  <inkml:trace contextRef="#ctx0" brushRef="#br0">4381 0,'-85'126,"-21"23,43-65,-43 43,-84 43,-43 62,-529 382,211-296,-20 20,-128 1,149-64,275-169,127-42,106-43,84-21,42 0,170-106,43 21,41 22,170-1,699-42,-699 106,-64 0,64 0,-127 0,-169 0,-106 0,-64 0,-105-42,42 0,-64-22,-42 22,-64-64,64-21,-42-42,-212-255,212 149,-106 21,105 43,170 189,-21 22,21-42,-42 63,-1 43,1 63,-64 63,0 318,43-106,-22 149,85 20,0-63,-21-63,-42-22,63-105,0-107,-43-190,43 22,0-64,0-1,0 1,0 0,0-42,21-22,1-106,83-63,-41 22,21-22,-1-339,-20 233,20 43,-20 63,-22-43,43-20,63-22,0 85,0 64,-42 20,-63 64,-1 64,0 0,-42 21,21 21,-21 0</inkml:trace>
 </inkml:ink>
 </file>
 
@@ -625,7 +625,7 @@
       <inkml:brushProperty name="fitToCurve" value="1"/>
     </inkml:brush>
   </inkml:definitions>
-  <inkml:trace contextRef="#ctx0" brushRef="#br0">0 105,'21'0,"0"0,0 0,0 0,21 0,-20 0,-1 0,0 0,0 0,0 0,0 0,1 0,-1 0,0 0,0 0,0 0,0 0,1 0,-1 0,0 0,0 0,0 0,0 0,1 0,-1 0,0 0,0 0,21 0,-20 0,-1 0,0 0,0 0,21 0,1 0,-22 0,21 0,-21 0,22 0,-22 0,21 0,1 0,-1 0,0 0,-21 0,1 0,20 0,-21 0,43 0,-22 0,0 0,-21 0,1 0,-1 0,21 0,-21 0,0 0,22 0,-22 0,0 0,0 0,0 0,1 0,-1 0,0 0,21 0,-21 0,1 0,-1 0,0 0,0 0,0 0,0 0,1 0,-1 0,42 0,-42 0,22 0,-22 0,21 0,1 0,-22 0,21 0,-21 0,0 0,22-21,-22 21,0 0,21 0,-20 0,-1-21,0 21,0 0,0 0,22 0,-43-21,21 21,0 0,0 0,0 0,0 0,1 0,-1 0,0 0,0 0,0 0,0 0,1 0,-1 0,0 0,0 0,0 0,-21-21,21 21,1-21,-22 21</inkml:trace>
+  <inkml:trace contextRef="#ctx0" brushRef="#br0">529 0,'-43'0,"-20"42,-1 0,43-21,-21 43,-1-43,22 21,-42 43,20-43,1 1,0 41,42-63,-21 22,0-1,21-21,0 22,0-22,0 42,0 22,0 21,0 42,42-63,-21 20,0 22,43 22,-64-107,21 0,0 1,0-1,21 0,-42-21,43 22,-43-1,21-21,0-21,-21 43,42-22,1-21,-22 42,42-42,22 0,-43 42,-20-42,20 43,21-43,-63 21,0-21</inkml:trace>
 </inkml:ink>
 </file>
 
@@ -651,7 +651,7 @@
       <inkml:brushProperty name="fitToCurve" value="1"/>
     </inkml:brush>
   </inkml:definitions>
-  <inkml:trace contextRef="#ctx0" brushRef="#br0">4381 0,'-85'126,"-21"23,43-65,-43 43,-84 43,-43 62,-529 382,211-296,-20 20,-128 1,149-64,275-169,127-42,106-43,84-21,42 0,170-106,43 21,41 22,170-1,699-42,-699 106,-64 0,64 0,-127 0,-169 0,-106 0,-64 0,-105-42,42 0,-64-22,-42 22,-64-64,64-21,-42-42,-212-255,212 149,-106 21,105 43,170 189,-21 22,21-42,-42 63,-1 43,1 63,-64 63,0 318,43-106,-22 149,85 20,0-63,-21-63,-42-22,63-105,0-107,-43-190,43 22,0-64,0-1,0 1,0 0,0-42,21-22,1-106,83-63,-41 22,21-22,-1-339,-20 233,20 43,-20 63,-22-43,43-20,63-22,0 85,0 64,-42 20,-63 64,-1 64,0 0,-42 21,21 21,-21 0</inkml:trace>
+  <inkml:trace contextRef="#ctx0" brushRef="#br0">0 42,'21'0,"0"0,21 0,0 0,-20 0,20 0,-21 0,21 0,43 0,-43 42,1-42,20 0,43 0,-21 0,-22 0,43 0,21 0,-21 0,-64 0,22 0,-1 0,-42 0,1 0,20 0,-21 0,21 0,-20 0,20 0,0 0,-21 0,22 0,-22 0,21 0,22 0,-22 0,0-21,-20 21,41 0,1-21,-43 21,63 0,-62 0,20 0,0 0,-21 0,22 0,20 0,-20 0,20 0,-42 0,22 0,-1 0,-21 0,43 0,-22 0,-21 0,21 0,22 0,-22 0,22 0,-1 0,43 0,-42 0,20 0,22 0,42 0,-42 0,42 0,-42 0,-21 0,21 0,-22 0,-63 0,22 0,-1 0,-21 0,22 0,-22 0,21 0,0 0,-20-21,-1 21,21 0,-21-21,85 21,-64 0,-20 0,20 0,0 0,-21 0,22 0,-22 0,21 0,1 0,-22 0,0 0,-21 0</inkml:trace>
 </inkml:ink>
 </file>
 
@@ -677,7 +677,7 @@
       <inkml:brushProperty name="fitToCurve" value="1"/>
     </inkml:brush>
   </inkml:definitions>
-  <inkml:trace contextRef="#ctx0" brushRef="#br0">529 0,'-43'0,"-20"42,-1 0,43-21,-21 43,-1-43,22 21,-42 43,20-43,1 1,0 41,42-63,-21 22,0-1,21-21,0 22,0-22,0 42,0 22,0 21,0 42,42-63,-21 20,0 22,43 22,-64-107,21 0,0 1,0-1,21 0,-42-21,43 22,-43-1,21-21,0-21,-21 43,42-22,1-21,-22 42,42-42,22 0,-43 42,-20-42,20 43,21-43,-63 21,0-21</inkml:trace>
+  <inkml:trace contextRef="#ctx0" brushRef="#br0">0 126,'21'0,"0"0,21 0,0 0,-20 0,41 0,22 0,-1 0,-20 0,-1 0,1 0,-22 0,1 0,-22 0,21 0,0 0,-20 0,20 0,21 0,-20-21,20-21,1 42,-43 0,0 0,21-21,-20 21,20 0,0 0,-21 0,22 0,-22 0,21 0,1 0,-22-42,21 42,-21 0,22 0,-1 0,-21 0,21 0,1 21,-1-42,0 42,1-21,-22 0,21 0,-21 0,22 0,-1 0,-21 0,22 0,-22 0,21 0,0 0,-20 0,20 0,0 0,-21-21,22 21,-1 0,-21 0,0 0,1 0,20 0,-21 0,21 0,-20 0,20 0,-21 0,21 0,1 0,-22 0,21 0,-21 0,22 0,-22 0,21 0,1 0,-22 0,21 0,-21 0,-21 42,21-42,22 0,-22 0,21 0,-21 0,22 0,-1 0,-21 0,22 0,-22 0,21 0,-21 0,0 0,1 0,-1 0,21 0,0 0,-20 0,20 0,-21 0,21 0,1 0,-22 21,42-21,-20 0,-22 0,21 0,-21 0,22 0,-1 0,-21 0,22 0,-22 0,21 0,0 0,-20 0,20 0,-21 0,21 0,1 0,-22 0,21 21,1-21,-22 0,21 0,-21 0,0 0,22 0,-22 0,21 0,-42 0</inkml:trace>
 </inkml:ink>
 </file>
 
@@ -703,7 +703,7 @@
       <inkml:brushProperty name="fitToCurve" value="1"/>
     </inkml:brush>
   </inkml:definitions>
-  <inkml:trace contextRef="#ctx0" brushRef="#br0">0 42,'21'0,"0"0,21 0,0 0,-20 0,20 0,-21 0,21 0,43 0,-43 42,1-42,20 0,43 0,-21 0,-22 0,43 0,21 0,-21 0,-64 0,22 0,-1 0,-42 0,1 0,20 0,-21 0,21 0,-20 0,20 0,0 0,-21 0,22 0,-22 0,21 0,22 0,-22 0,0-21,-20 21,41 0,1-21,-43 21,63 0,-62 0,20 0,0 0,-21 0,22 0,20 0,-20 0,20 0,-42 0,22 0,-1 0,-21 0,43 0,-22 0,-21 0,21 0,22 0,-22 0,22 0,-1 0,43 0,-42 0,20 0,22 0,42 0,-42 0,42 0,-42 0,-21 0,21 0,-22 0,-63 0,22 0,-1 0,-21 0,22 0,-22 0,21 0,0 0,-20-21,-1 21,21 0,-21-21,85 21,-64 0,-20 0,20 0,0 0,-21 0,22 0,-22 0,21 0,1 0,-22 0,0 0,-21 0</inkml:trace>
+  <inkml:trace contextRef="#ctx0" brushRef="#br0">952 0,'-64'42,"-20"85,-22 0,0-21,-127 148,149-170,-1 1,0 0,43-43,21 0,0-21,0 1,21-1,21-21,42 0,-21 0,128 0,-64 0,190-21,-148-1,-63 22,42-21,-43 0,1 0,0 0,-43 21,22-21,-22 21,-21-22,0 22,0 0,1 0,-1 0,-85 0,43 0,-64 0,-84-42,42 21,-21 0,0-43,-191-20,191 20,63 22,22 21,-1-1,22 22,21-21,0 21,0 0,21 21,21 1,0 20,-21 0,21 43,21-22,1 22,62 106,-62-64,-1 0,43 21,-64-106,0 22,0-1,22-21,-43-20,21 20,0-21,0-21,-21 21,0 0,0 1,21-22,0 0,1 0,-1-22,-21 1,0 0,0-42,0-1,0 22,0-43,0-21,0 0,-21-21,-1-21,-41-106,63 148,0-21,0 22,0 41,0-21,21 22,21-1,-20 43,-22 0,42 21,-21 0,-21 0</inkml:trace>
 </inkml:ink>
 </file>
 
@@ -729,7 +729,7 @@
       <inkml:brushProperty name="fitToCurve" value="1"/>
     </inkml:brush>
   </inkml:definitions>
-  <inkml:trace contextRef="#ctx0" brushRef="#br0">0 126,'21'0,"0"0,21 0,0 0,-20 0,41 0,22 0,-1 0,-20 0,-1 0,1 0,-22 0,1 0,-22 0,21 0,0 0,-20 0,20 0,21 0,-20-21,20-21,1 42,-43 0,0 0,21-21,-20 21,20 0,0 0,-21 0,22 0,-22 0,21 0,1 0,-22-42,21 42,-21 0,22 0,-1 0,-21 0,21 0,1 21,-1-42,0 42,1-21,-22 0,21 0,-21 0,22 0,-1 0,-21 0,22 0,-22 0,21 0,0 0,-20 0,20 0,0 0,-21-21,22 21,-1 0,-21 0,0 0,1 0,20 0,-21 0,21 0,-20 0,20 0,-21 0,21 0,1 0,-22 0,21 0,-21 0,22 0,-22 0,21 0,1 0,-22 0,21 0,-21 0,-21 42,21-42,22 0,-22 0,21 0,-21 0,22 0,-1 0,-21 0,22 0,-22 0,21 0,-21 0,0 0,1 0,-1 0,21 0,0 0,-20 0,20 0,-21 0,21 0,1 0,-22 21,42-21,-20 0,-22 0,21 0,-21 0,22 0,-1 0,-21 0,22 0,-22 0,21 0,0 0,-20 0,20 0,-21 0,21 0,1 0,-22 0,21 21,1-21,-22 0,21 0,-21 0,0 0,22 0,-22 0,21 0,-42 0</inkml:trace>
+  <inkml:trace contextRef="#ctx0" brushRef="#br0">2476 529,'-42'42,"20"0,-62 1,-86 62,22 1,-21-42,21 84,21-42,-85 21,22 21,-128 64,170-107,21-41,42-22,-21 1,85-43,0 42,-21-42,21 21,21 0,-43-21,1 21,21-21,0 43,-1-22,-20 0,42 0,-42-21,0 43,63-43,21 0,-21 0,21 0,-20 0,20 0,43 0,20 0,44 0,-86 21,1 0,84 0,-21-21,21 0,42 0,-20 21,-22-21,-42 0,-22 0,-20 0,-22 0,1 0,-1 0,0 0,22 0,-22 0,-21 0,22 0,-22 0,21 0,0 0,-20 0,41 0,1 0,-43 0,21 0,-21 0,22 0,-22 0,-21-42,0 21,-21 0,-43-64,-63-84,-190-297,105 233,106 43,-21-1,-42 1,21 20,84 43,22 43,-1-1,1 43,0 20,-1-20,22 42,-21-42,0 42,20 0,-20 0,21 0,-21-42,-1 42,43 42,0-21,0 85,0 105,0-20,0 42,0 42,0 85,43 84,-22-105,0 21,21-106,-21 21,-21-127,43-84,-43-22,0-21,42 21,-42 1,0-22,21-21,-21-42,21-43,1-63,20-43,0 1,64-22,190-275,-126 254,-1 43,-63-1,21-20,0-1,21 22,-42-22,-21 64,-22 63,-21 22,1 20,20 22,-63 21</inkml:trace>
 </inkml:ink>
 </file>
 
@@ -781,7 +781,7 @@
       <inkml:brushProperty name="fitToCurve" value="1"/>
     </inkml:brush>
   </inkml:definitions>
-  <inkml:trace contextRef="#ctx0" brushRef="#br0">952 0,'-64'42,"-20"85,-22 0,0-21,-127 148,149-170,-1 1,0 0,43-43,21 0,0-21,0 1,21-1,21-21,42 0,-21 0,128 0,-64 0,190-21,-148-1,-63 22,42-21,-43 0,1 0,0 0,-43 21,22-21,-22 21,-21-22,0 22,0 0,1 0,-1 0,-85 0,43 0,-64 0,-84-42,42 21,-21 0,0-43,-191-20,191 20,63 22,22 21,-1-1,22 22,21-21,0 21,0 0,21 21,21 1,0 20,-21 0,21 43,21-22,1 22,62 106,-62-64,-1 0,43 21,-64-106,0 22,0-1,22-21,-43-20,21 20,0-21,0-21,-21 21,0 0,0 1,21-22,0 0,1 0,-1-22,-21 1,0 0,0-42,0-1,0 22,0-43,0-21,0 0,-21-21,-1-21,-41-106,63 148,0-21,0 22,0 41,0-21,21 22,21-1,-20 43,-22 0,42 21,-21 0,-21 0</inkml:trace>
+  <inkml:trace contextRef="#ctx0" brushRef="#br0">2158 0,'0'21,"0"21,0 0,0 22,0 42,0 42,-21 0,-21 0,-43 0,-42 85,-254 296,170-338,41 20,1-62,21 41,105-148,1 1,0-1,-1 43,22-43,-21-21,0 43,-22-1,-42 107,64-128,21 0,-22 1,1-1,42-21,-42 21,42-20,0 20,-43 0,43-21,-21 1,-21 62,0-84,63 0,-21 21,-42 22,84-43,21-21,-105 42,42-21</inkml:trace>
 </inkml:ink>
 </file>
 
@@ -807,7 +807,7 @@
       <inkml:brushProperty name="fitToCurve" value="1"/>
     </inkml:brush>
   </inkml:definitions>
-  <inkml:trace contextRef="#ctx0" brushRef="#br0">2476 529,'-42'42,"20"0,-62 1,-86 62,22 1,-21-42,21 84,21-42,-85 21,22 21,-128 64,170-107,21-41,42-22,-21 1,85-43,0 42,-21-42,21 21,21 0,-43-21,1 21,21-21,0 43,-1-22,-20 0,42 0,-42-21,0 43,63-43,21 0,-21 0,21 0,-20 0,20 0,43 0,20 0,44 0,-86 21,1 0,84 0,-21-21,21 0,42 0,-20 21,-22-21,-42 0,-22 0,-20 0,-22 0,1 0,-1 0,0 0,22 0,-22 0,-21 0,22 0,-22 0,21 0,0 0,-20 0,41 0,1 0,-43 0,21 0,-21 0,22 0,-22 0,-21-42,0 21,-21 0,-43-64,-63-84,-190-297,105 233,106 43,-21-1,-42 1,21 20,84 43,22 43,-1-1,1 43,0 20,-1-20,22 42,-21-42,0 42,20 0,-20 0,21 0,-21-42,-1 42,43 42,0-21,0 85,0 105,0-20,0 42,0 42,0 85,43 84,-22-105,0 21,21-106,-21 21,-21-127,43-84,-43-22,0-21,42 21,-42 1,0-22,21-21,-21-42,21-43,1-63,20-43,0 1,64-22,190-275,-126 254,-1 43,-63-1,21-20,0-1,21 22,-42-22,-21 64,-22 63,-21 22,1 20,20 22,-63 21</inkml:trace>
+  <inkml:trace contextRef="#ctx0" brushRef="#br0">656 0,'-85'42,"43"0,-43 22,21-1,1-21,21-20,-22 41,22-21,-22 22,43-22,-21 1,0-1,63-42,0 0,21 0,22 0,41 0,-41 0,-1 0,86 0,105 0,-149 0,-83 0,20 0,-42-21,0 21</inkml:trace>
 </inkml:ink>
 </file>
 
@@ -833,7 +833,7 @@
       <inkml:brushProperty name="fitToCurve" value="1"/>
     </inkml:brush>
   </inkml:definitions>
-  <inkml:trace contextRef="#ctx0" brushRef="#br0">2158 0,'0'21,"0"21,0 0,0 22,0 42,0 42,-21 0,-21 0,-43 0,-42 85,-254 296,170-338,41 20,1-62,21 41,105-148,1 1,0-1,-1 43,22-43,-21-21,0 43,-22-1,-42 107,64-128,21 0,-22 1,1-1,42-21,-42 21,42-20,0 20,-43 0,43-21,-21 1,-21 62,0-84,63 0,-21 21,-42 22,84-43,21-21,-105 42,42-21</inkml:trace>
+  <inkml:trace contextRef="#ctx0" brushRef="#br0">42 0,'0'21,"0"63,0-20,0 20,0 22,0-42,0-22,0 0,0 1,0 20,0 1,0-1,0 128,0-107,0-41,0-1,0 0,0 1,-42-22,42-21</inkml:trace>
 </inkml:ink>
 </file>
 
@@ -859,7 +859,7 @@
       <inkml:brushProperty name="fitToCurve" value="1"/>
     </inkml:brush>
   </inkml:definitions>
-  <inkml:trace contextRef="#ctx0" brushRef="#br0">656 0,'-85'42,"43"0,-43 22,21-1,1-21,21-20,-22 41,22-21,-22 22,43-22,-21 1,0-1,63-42,0 0,21 0,22 0,41 0,-41 0,-1 0,86 0,105 0,-149 0,-83 0,20 0,-42-21,0 21</inkml:trace>
+  <inkml:trace contextRef="#ctx0" brushRef="#br0">2053 0,'-106'169,"-42"85,63-127,0 0,-63 63,42-42,-21-21,-127 212,85-148,-22-1,22 1,42-43,-42 0,84-42,43-64,0-21,42-21</inkml:trace>
 </inkml:ink>
 </file>
 
@@ -885,7 +885,7 @@
       <inkml:brushProperty name="fitToCurve" value="1"/>
     </inkml:brush>
   </inkml:definitions>
-  <inkml:trace contextRef="#ctx0" brushRef="#br0">42 0,'0'21,"0"63,0-20,0 20,0 22,0-42,0-22,0 0,0 1,0 20,0 1,0-1,0 128,0-107,0-41,0-1,0 0,0 1,-42-22,42-21</inkml:trace>
+  <inkml:trace contextRef="#ctx0" brushRef="#br0">0 931,'84'-170,"-63"86,22 20,20-42,22-21,-22 22,1 20,-1 21,-20 22,20 0,-42 0,22 42,-1 0,-21 0,0 21,22 0,-22 21,-21 0,0 1,21 63,-21 21,42-85,-42 21,0 1,0-22,0 22,0-1,-42-20,42-22,-21 42,-22-20,1-22,-21 0,20 0,1-21,21 42,-22-42,22 0,0 0,-21 0,-1 43,22-43,-21 42,0-42,63 0,21 0,-21 21,43-21,-1 43,-20-43,-22 21,63-21,1 21,21-21,-21 21,20 0,-20 0,0 1,21-1,-64 0,21 0,-41 21,-22-42</inkml:trace>
 </inkml:ink>
 </file>
 
@@ -911,7 +911,7 @@
       <inkml:brushProperty name="fitToCurve" value="1"/>
     </inkml:brush>
   </inkml:definitions>
-  <inkml:trace contextRef="#ctx0" brushRef="#br0">2053 0,'-106'169,"-42"85,63-127,0 0,-63 63,42-42,-21-21,-127 212,85-148,-22-1,22 1,42-43,-42 0,84-42,43-64,0-21,42-21</inkml:trace>
+  <inkml:trace contextRef="#ctx0" brushRef="#br0">21 0,'0'21,"0"0,0 0,0 0,-21-21,21-21,0 0,0 21</inkml:trace>
 </inkml:ink>
 </file>
 
@@ -937,7 +937,7 @@
       <inkml:brushProperty name="fitToCurve" value="1"/>
     </inkml:brush>
   </inkml:definitions>
-  <inkml:trace contextRef="#ctx0" brushRef="#br0">0 931,'84'-170,"-63"86,22 20,20-42,22-21,-22 22,1 20,-1 21,-20 22,20 0,-42 0,22 42,-1 0,-21 0,0 21,22 0,-22 21,-21 0,0 1,21 63,-21 21,42-85,-42 21,0 1,0-22,0 22,0-1,-42-20,42-22,-21 42,-22-20,1-22,-21 0,20 0,1-21,21 42,-22-42,22 0,0 0,-21 0,-1 43,22-43,-21 42,0-42,63 0,21 0,-21 21,43-21,-1 43,-20-43,-22 21,63-21,1 21,21-21,-21 21,20 0,-20 0,0 1,21-1,-64 0,21 0,-41 21,-22-42</inkml:trace>
+  <inkml:trace contextRef="#ctx0" brushRef="#br0">0 211,'21'0,"21"0,-21 0,21 0,22 0,-1 0,-41 0,-1 0,42 21,-42-21,43 0,-43 0,0 0,0 0,22 0,-22 21,0-21,0 0,22 0,-22 0,0 0,0 0,0 0,0 0,1 0,-1 0,0 0,0 0,0 0,0 0,1 0,-1 0,0 0,0 0,0 0,0 0,1 0,-1 0,0 0,21 0,-21 0,1 0,-1 0,0 0,0 0,0 0,0 0,1 0,-1 0,0 0,21 0,1 0,-22 0,0 0,0 0,0 0,0 0,22 0,-22 0,0 0,0 0,0 0,1 0,20 0,-21 0,0 0,0 0,1 0,-1 0,0 0,0 0,0 0,0 0,1 0,-1 0,0 0,0 0,21 0,-20 0,-1 0,0 0,0 0,21 0,-20 0,-1 22,0-22,0 0,0 0,0 0,1 0,-1 0,21 21,-21-21,0 0,1 0,-1 0,0 0,0 0,21 21,-20-21,-1 0,0 0,0 0,0 0,0 0,22 0,-22 0,0 0,21 0,-20 0,-1 0,0 0,0 0,0 0,0 0,1 0,-1 0,0 0,0 0,0 0,0 0,1 0,-1 0,0 0,0 0,0 0,0 0,22 0,-1 0,-21 0,0 0,1 0,-1 0,0 0,0 0,21 0,-20 0,-1 0,0 0,21 0,-21 0,1 0,-1 0,21 0,-21 0,22 0,-22 0,0 0,0 0,21 0,1 0,-22 0,0 0,21 0,-20 0,20 0,-21 0,0 0,0-21,22 21,-22-21,21-1,-21 22,1 0,20 0,-21-21,0 21,0 0,22 0,-22 0,21 0,1 0,-22 0,0 0,21 0,-21 0,1 0,-1 0,0 0,0 0,21 0,-20 0,-1 0,21 0,-21 0,0 0,1 0,-1 0,21 0,-21 0,0 0,1 0,-1 0,0 0,21 0,-21 0,1 0,-1 0,0 0,21 0,-21-21,1 21,20 0,0 0,-21 0,1 0,-1 0,21 0,-21 0,22 0,-22 0,0 0,21 0,-21 0,1 0,20 0,-21 0,0 0,0 0,1 0,-1 0,0 0,0 0,21 0,-20 0,-1 0,0 0,21 0,-21 0,1 0,-1 0,0-21,0 21,0 0,0 0,1 0,-1 0,0 0,0 0,0 0,0-21,1 21,20-21,-21 21,21-22,-20 22,-1 0,0 0,-21-21,42 21,-21-21,1 21,20 0,-21-21,21 21,-20-21,-1 21,0-21,0 21,0 0,22 0,-22 0,21 0,0-21,-20 21,20 0,-21 0,0 0,0 0,22 0,-1 0,-21 0,0 0,1 0,-1 0,0 0,42 0,-41 0,-1 0,63 0,-41 0,-22 0,0 0,43 0,-43 0,0 0,21 0,22 21,-22-21,0 0,1 0,-1 0,-21 0,43 0,-22 0,22 0,-22 0,-21 0,43 0,-22 0,0 0,1 21,-22-21,42 0,-20 0,-1 0,-21 21,43 0,-43-21,21 0,0 21,-20-21,-22 21,42-21,-21 0,0 0,22 22,-22-22,0 0,21 0,-21 0,1 0,-1 0,0 0,21 0,-21 0,1 0,-1 0,0 0,21 0,1 0,-22 0,0 0,0 0,0 0,22 0,-22 0,0 0,0-22,0 22,0 0,1-21,-1 21,21 0,-21 0,0 0,1 0,-1 0,0 0,0 0,21 0,-20 0,-1 21,-21-21</inkml:trace>
 </inkml:ink>
 </file>
 
@@ -963,7 +963,7 @@
       <inkml:brushProperty name="fitToCurve" value="1"/>
     </inkml:brush>
   </inkml:definitions>
-  <inkml:trace contextRef="#ctx0" brushRef="#br0">21 0,'0'21,"0"0,0 0,0 0,-21-21,21-21,0 0,0 21</inkml:trace>
+  <inkml:trace contextRef="#ctx0" brushRef="#br0">0 105,'21'0,"0"0,0 0,0 0,21 0,-20 0,-1 0,0 0,0 0,0 0,0 0,1 0,-1 0,0 0,0 0,0 0,0 0,1 0,-1 0,0 0,0 0,0 0,0 0,1 0,-1 0,0 0,0 0,21 0,-20 0,-1 0,0 0,0 0,21 0,1 0,-22 0,21 0,-21 0,22 0,-22 0,21 0,1 0,-1 0,0 0,-21 0,1 0,20 0,-21 0,43 0,-22 0,0 0,-21 0,1 0,-1 0,21 0,-21 0,0 0,22 0,-22 0,0 0,0 0,0 0,1 0,-1 0,0 0,21 0,-21 0,1 0,-1 0,0 0,0 0,0 0,0 0,1 0,-1 0,42 0,-42 0,22 0,-22 0,21 0,1 0,-22 0,21 0,-21 0,0 0,22-21,-22 21,0 0,21 0,-20 0,-1-21,0 21,0 0,0 0,22 0,-43-21,21 21,0 0,0 0,0 0,0 0,1 0,-1 0,0 0,0 0,0 0,0 0,1 0,-1 0,0 0,0 0,0 0,-21-21,21 21,1-21,-22 21</inkml:trace>
 </inkml:ink>
 </file>
 
@@ -6842,7 +6842,7 @@
 </file>
 
 <file path=ppt/slides/slide17.xml><?xml version="1.0" encoding="utf-8"?>
-<p:sld xmlns:a="http://schemas.openxmlformats.org/drawingml/2006/main" xmlns:r="http://schemas.openxmlformats.org/officeDocument/2006/relationships" xmlns:p="http://schemas.openxmlformats.org/presentationml/2006/main">
+<p:sld xmlns:a="http://schemas.openxmlformats.org/drawingml/2006/main" xmlns:r="http://schemas.openxmlformats.org/officeDocument/2006/relationships" xmlns:p="http://schemas.openxmlformats.org/presentationml/2006/main" xmlns:p14="http://schemas.microsoft.com/office/powerpoint/2010/main">
   <p:cSld>
     <p:spTree>
       <p:nvGrpSpPr>
@@ -6874,7 +6874,12 @@
             <p:ph type="title"/>
           </p:nvPr>
         </p:nvSpPr>
-        <p:spPr/>
+        <p:spPr>
+          <a:xfrm>
+            <a:off x="443230" y="146050"/>
+            <a:ext cx="7773035" cy="762635"/>
+          </a:xfrm>
+        </p:spPr>
         <p:txBody>
           <a:bodyPr/>
           <a:lstStyle/>
@@ -6914,7 +6919,7 @@
         <p:spPr>
           <a:xfrm>
             <a:off x="444500" y="1152525"/>
-            <a:ext cx="7772400" cy="1268363"/>
+            <a:ext cx="7772400" cy="1268095"/>
           </a:xfrm>
         </p:spPr>
         <p:txBody>
@@ -6967,7 +6972,12 @@
             <p:ph type="sldNum" sz="quarter" idx="10"/>
           </p:nvPr>
         </p:nvSpPr>
-        <p:spPr/>
+        <p:spPr>
+          <a:xfrm>
+            <a:off x="7112000" y="6419850"/>
+            <a:ext cx="1905635" cy="305435"/>
+          </a:xfrm>
+        </p:spPr>
         <p:txBody>
           <a:bodyPr/>
           <a:lstStyle/>
@@ -7002,7 +7012,12 @@
             <p:ph type="ftr" sz="quarter" idx="11"/>
           </p:nvPr>
         </p:nvSpPr>
-        <p:spPr/>
+        <p:spPr>
+          <a:xfrm>
+            <a:off x="897255" y="6393180"/>
+            <a:ext cx="3110230" cy="349885"/>
+          </a:xfrm>
+        </p:spPr>
         <p:txBody>
           <a:bodyPr/>
           <a:lstStyle/>
@@ -7028,8 +7043,8 @@
         </p:nvSpPr>
         <p:spPr>
           <a:xfrm>
-            <a:off x="539552" y="2276872"/>
-            <a:ext cx="5650201" cy="4016484"/>
+            <a:off x="539750" y="2277110"/>
+            <a:ext cx="5650230" cy="4016375"/>
           </a:xfrm>
           <a:prstGeom prst="rect">
             <a:avLst/>
@@ -7191,14 +7206,66 @@
         </p:blipFill>
         <p:spPr>
           <a:xfrm>
-            <a:off x="6444208" y="4797152"/>
-            <a:ext cx="2303140" cy="1168505"/>
+            <a:off x="6443980" y="4797425"/>
+            <a:ext cx="2303145" cy="1168400"/>
           </a:xfrm>
           <a:prstGeom prst="rect">
             <a:avLst/>
           </a:prstGeom>
         </p:spPr>
       </p:pic>
+      <p:sp>
+        <p:nvSpPr>
+          <p:cNvPr id="11" name="텍스트 상자 1"/>
+          <p:cNvSpPr txBox="1">
+            <a:spLocks/>
+          </p:cNvSpPr>
+          <p:nvPr/>
+        </p:nvSpPr>
+        <p:spPr>
+          <a:xfrm rot="0">
+            <a:off x="3695700" y="3895090"/>
+            <a:ext cx="5358765" cy="539115"/>
+          </a:xfrm>
+          <a:prstGeom prst="rect"/>
+          <a:noFill/>
+          <a:ln>
+            <a:noFill/>
+            <a:prstDash/>
+          </a:ln>
+        </p:spPr>
+        <p:txBody>
+          <a:bodyPr wrap="square" lIns="89535" tIns="46355" rIns="89535" bIns="46355" vert="horz" anchor="t">
+            <a:spAutoFit/>
+          </a:bodyPr>
+          <a:lstStyle/>
+          <a:p>
+            <a:pPr marL="0" indent="0">
+              <a:buFontTx/>
+              <a:buNone/>
+            </a:pPr>
+            <a:r>
+              <a:rPr sz="1100"/>
+              <a:t>p</a:t>
+            </a:r>
+            <a:r>
+              <a:rPr sz="1100"/>
+              <a:t>태그 중에서 id="a"를 가진 문단의 글자 크기를 15픽셀로 설정 </a:t>
+            </a:r>
+            <a:endParaRPr lang="ko-KR" altLang="en-US" sz="1100"/>
+          </a:p>
+          <a:p>
+            <a:pPr marL="228600" indent="-228600">
+              <a:buFont typeface="맑은 고딕"/>
+              <a:buChar char="•"/>
+            </a:pPr>
+            <a:endParaRPr lang="ko-KR" altLang="en-US" sz="1800">
+              <a:latin typeface="맑은 고딕" charset="0"/>
+              <a:ea typeface="맑은 고딕" charset="0"/>
+            </a:endParaRPr>
+          </a:p>
+        </p:txBody>
+      </p:sp>
     </p:spTree>
     <p:extLst>
       <p:ext uri="{BB962C8B-B14F-4D97-AF65-F5344CB8AC3E}">
@@ -7209,6 +7276,21 @@
   <p:clrMapOvr>
     <a:masterClrMapping/>
   </p:clrMapOvr>
+  <mc:AlternateContent xmlns:mc="http://schemas.openxmlformats.org/markup-compatibility/2006">
+    <mc:Choice xmlns:p14="http://schemas.microsoft.com/office/powerpoint/2010/main" Requires="p14">
+      <p:transition spd="slow" p14:dur="2000"/>
+    </mc:Choice>
+    <mc:Fallback>
+      <p:transition spd="slow"/>
+    </mc:Fallback>
+  </mc:AlternateContent>
+  <p:timing>
+    <p:tnLst>
+      <p:par>
+        <p:cTn id="1" dur="indefinite" restart="never" nodeType="tmRoot"/>
+      </p:par>
+    </p:tnLst>
+  </p:timing>
 </p:sld>
 </file>
 
@@ -8956,7 +9038,7 @@
       </p:sp>
       <mc:AlternateContent xmlns:mc="http://schemas.openxmlformats.org/markup-compatibility/2006" xmlns:p14="http://schemas.microsoft.com/office/powerpoint/2010/main">
         <mc:Choice Requires="p14">
-          <p:contentPart p14:bwMode="auto" r:id="rId1">
+          <p:contentPart p14:bwMode="auto" r:id="rId5">
             <p14:nvContentPartPr>
               <p14:cNvPr id="6" name="잉크 9"/>
               <p14:cNvContentPartPr/>
@@ -8976,7 +9058,7 @@
               <p:nvPr/>
             </p:nvPicPr>
             <p:blipFill>
-              <a:blip r:embed="rId2"/>
+              <a:blip r:embed="rId6"/>
               <a:stretch>
                 <a:fillRect/>
               </a:stretch>
@@ -8995,7 +9077,7 @@
       </mc:AlternateContent>
       <mc:AlternateContent xmlns:mc="http://schemas.openxmlformats.org/markup-compatibility/2006" xmlns:p14="http://schemas.microsoft.com/office/powerpoint/2010/main">
         <mc:Choice Requires="p14">
-          <p:contentPart p14:bwMode="auto" r:id="rId3">
+          <p:contentPart p14:bwMode="auto" r:id="rId7">
             <p14:nvContentPartPr>
               <p14:cNvPr id="7" name="잉크 10"/>
               <p14:cNvContentPartPr/>
@@ -9015,7 +9097,7 @@
               <p:nvPr/>
             </p:nvPicPr>
             <p:blipFill>
-              <a:blip r:embed="rId4"/>
+              <a:blip r:embed="rId8"/>
               <a:stretch>
                 <a:fillRect/>
               </a:stretch>
@@ -9032,6 +9114,35 @@
           </p:pic>
         </mc:Fallback>
       </mc:AlternateContent>
+      <p:pic>
+        <p:nvPicPr>
+          <p:cNvPr id="8" name="그림 3" descr="C:/Users/gtaeh/AppData/Roaming/PolarisOffice/ETemp/3680_19004176/fImage15143153196334.png"/>
+          <p:cNvPicPr>
+            <a:picLocks noChangeAspect="1"/>
+          </p:cNvPicPr>
+          <p:nvPr/>
+        </p:nvPicPr>
+        <p:blipFill rotWithShape="1">
+          <a:blip r:embed="rId9" cstate="print">
+            <a:extLst>
+              <a:ext uri="{28A0092B-C50C-407E-A947-70E740481C1C}">
+                <a14:useLocalDpi xmlns:a14="http://schemas.microsoft.com/office/drawing/2010/main" val="0"/>
+              </a:ext>
+            </a:extLst>
+          </a:blip>
+          <a:stretch>
+            <a:fillRect/>
+          </a:stretch>
+        </p:blipFill>
+        <p:spPr>
+          <a:xfrm rot="0">
+            <a:off x="6005830" y="3208020"/>
+            <a:ext cx="2743835" cy="1821815"/>
+          </a:xfrm>
+          <a:prstGeom prst="rect"/>
+          <a:noFill/>
+        </p:spPr>
+      </p:pic>
     </p:spTree>
     <p:extLst>
       <p:ext uri="{BB962C8B-B14F-4D97-AF65-F5344CB8AC3E}">
@@ -9061,7 +9172,7 @@
 </file>
 
 <file path=ppt/slides/slide21.xml><?xml version="1.0" encoding="utf-8"?>
-<p:sld xmlns:a="http://schemas.openxmlformats.org/drawingml/2006/main" xmlns:r="http://schemas.openxmlformats.org/officeDocument/2006/relationships" xmlns:p="http://schemas.openxmlformats.org/presentationml/2006/main">
+<p:sld xmlns:a="http://schemas.openxmlformats.org/drawingml/2006/main" xmlns:r="http://schemas.openxmlformats.org/officeDocument/2006/relationships" xmlns:p="http://schemas.openxmlformats.org/presentationml/2006/main" xmlns:p14="http://schemas.microsoft.com/office/powerpoint/2010/main">
   <p:cSld>
     <p:spTree>
       <p:nvGrpSpPr>
@@ -9093,7 +9204,12 @@
             <p:ph type="title"/>
           </p:nvPr>
         </p:nvSpPr>
-        <p:spPr/>
+        <p:spPr>
+          <a:xfrm>
+            <a:off x="443230" y="146050"/>
+            <a:ext cx="7773035" cy="762635"/>
+          </a:xfrm>
+        </p:spPr>
         <p:txBody>
           <a:bodyPr/>
           <a:lstStyle/>
@@ -9129,7 +9245,7 @@
         <p:spPr>
           <a:xfrm>
             <a:off x="444500" y="1152525"/>
-            <a:ext cx="8303964" cy="1040229"/>
+            <a:ext cx="8303895" cy="1040130"/>
           </a:xfrm>
         </p:spPr>
         <p:txBody>
@@ -9177,7 +9293,12 @@
             <p:ph type="sldNum" sz="quarter" idx="10"/>
           </p:nvPr>
         </p:nvSpPr>
-        <p:spPr/>
+        <p:spPr>
+          <a:xfrm>
+            <a:off x="7112000" y="6419850"/>
+            <a:ext cx="1905635" cy="305435"/>
+          </a:xfrm>
+        </p:spPr>
         <p:txBody>
           <a:bodyPr/>
           <a:lstStyle/>
@@ -9212,7 +9333,12 @@
             <p:ph type="ftr" sz="quarter" idx="11"/>
           </p:nvPr>
         </p:nvSpPr>
-        <p:spPr/>
+        <p:spPr>
+          <a:xfrm>
+            <a:off x="897255" y="6393180"/>
+            <a:ext cx="3110230" cy="349885"/>
+          </a:xfrm>
+        </p:spPr>
         <p:txBody>
           <a:bodyPr/>
           <a:lstStyle/>
@@ -9238,8 +9364,8 @@
         </p:nvSpPr>
         <p:spPr>
           <a:xfrm>
-            <a:off x="569020" y="2189641"/>
-            <a:ext cx="7099324" cy="3647152"/>
+            <a:off x="568960" y="2189480"/>
+            <a:ext cx="7099300" cy="3647440"/>
           </a:xfrm>
           <a:prstGeom prst="rect">
             <a:avLst/>
@@ -9516,8 +9642,8 @@
         </p:blipFill>
         <p:spPr>
           <a:xfrm>
-            <a:off x="6581754" y="4869160"/>
-            <a:ext cx="2173180" cy="1446752"/>
+            <a:off x="6581775" y="4869180"/>
+            <a:ext cx="2172970" cy="1446530"/>
           </a:xfrm>
           <a:prstGeom prst="rect">
             <a:avLst/>
@@ -9534,6 +9660,21 @@
   <p:clrMapOvr>
     <a:masterClrMapping/>
   </p:clrMapOvr>
+  <mc:AlternateContent xmlns:mc="http://schemas.openxmlformats.org/markup-compatibility/2006">
+    <mc:Choice xmlns:p14="http://schemas.microsoft.com/office/powerpoint/2010/main" Requires="p14">
+      <p:transition spd="slow" p14:dur="2000"/>
+    </mc:Choice>
+    <mc:Fallback>
+      <p:transition spd="slow"/>
+    </mc:Fallback>
+  </mc:AlternateContent>
+  <p:timing>
+    <p:tnLst>
+      <p:par>
+        <p:cTn id="1" dur="indefinite" restart="never" nodeType="tmRoot"/>
+      </p:par>
+    </p:tnLst>
+  </p:timing>
 </p:sld>
 </file>
 

--- a/1학기/웹 프로그래밍/2026_웹 프로그래밍_part3.pptx
+++ b/1학기/웹 프로그래밍/2026_웹 프로그래밍_part3.pptx
@@ -2,7 +2,7 @@
 <file path=ppt/presentation.xml><?xml version="1.0" encoding="utf-8"?>
 <p:presentation xmlns:a="http://schemas.openxmlformats.org/drawingml/2006/main" xmlns:r="http://schemas.openxmlformats.org/officeDocument/2006/relationships" xmlns:p="http://schemas.openxmlformats.org/presentationml/2006/main" xmlns:p14="http://schemas.microsoft.com/office/powerpoint/2010/main" saveSubsetFonts="1">
   <p:sldMasterIdLst>
-    <p:sldMasterId id="2147483687" r:id="rId5"/>
+    <p:sldMasterId id="2147483691" r:id="rId5"/>
   </p:sldMasterIdLst>
   <p:notesMasterIdLst>
     <p:notesMasterId r:id="rId7"/>
@@ -145,12 +145,12 @@
   <p:extLst>
     <p:ext uri="{EFAFB233-063F-42B5-8137-9DF3F51BA10A}">
       <p15:sldGuideLst xmlns:p15="http://schemas.microsoft.com/office/powerpoint/2012/main">
-        <p15:guide id="1" orient="horz" pos="2153" userDrawn="0">
+        <p15:guide id="1" orient="horz" pos="2152" userDrawn="0">
           <p15:clr>
             <a:srgbClr val="A4A3A4"/>
           </p15:clr>
         </p15:guide>
-        <p15:guide id="2" pos="2873" userDrawn="0">
+        <p15:guide id="2" pos="2872" userDrawn="0">
           <p15:clr>
             <a:srgbClr val="A4A3A4"/>
           </p15:clr>
@@ -9038,7 +9038,7 @@
       </p:sp>
       <mc:AlternateContent xmlns:mc="http://schemas.openxmlformats.org/markup-compatibility/2006" xmlns:p14="http://schemas.microsoft.com/office/powerpoint/2010/main">
         <mc:Choice Requires="p14">
-          <p:contentPart p14:bwMode="auto" r:id="rId5">
+          <p:contentPart p14:bwMode="auto" r:id="rId10">
             <p14:nvContentPartPr>
               <p14:cNvPr id="6" name="잉크 9"/>
               <p14:cNvContentPartPr/>
@@ -9058,7 +9058,7 @@
               <p:nvPr/>
             </p:nvPicPr>
             <p:blipFill>
-              <a:blip r:embed="rId6"/>
+              <a:blip r:embed="rId11"/>
               <a:stretch>
                 <a:fillRect/>
               </a:stretch>
@@ -9077,7 +9077,7 @@
       </mc:AlternateContent>
       <mc:AlternateContent xmlns:mc="http://schemas.openxmlformats.org/markup-compatibility/2006" xmlns:p14="http://schemas.microsoft.com/office/powerpoint/2010/main">
         <mc:Choice Requires="p14">
-          <p:contentPart p14:bwMode="auto" r:id="rId7">
+          <p:contentPart p14:bwMode="auto" r:id="rId12">
             <p14:nvContentPartPr>
               <p14:cNvPr id="7" name="잉크 10"/>
               <p14:cNvContentPartPr/>
@@ -9097,7 +9097,7 @@
               <p:nvPr/>
             </p:nvPicPr>
             <p:blipFill>
-              <a:blip r:embed="rId8"/>
+              <a:blip r:embed="rId13"/>
               <a:stretch>
                 <a:fillRect/>
               </a:stretch>
@@ -9116,14 +9116,14 @@
       </mc:AlternateContent>
       <p:pic>
         <p:nvPicPr>
-          <p:cNvPr id="8" name="그림 3" descr="C:/Users/gtaeh/AppData/Roaming/PolarisOffice/ETemp/3680_19004176/fImage15143153196334.png"/>
+          <p:cNvPr id="8" name="그림 3" descr="C:/Users/gtaeh/AppData/Roaming/PolarisOffice/ETemp/14188_11695544/fImage121813226334.png"/>
           <p:cNvPicPr>
             <a:picLocks noChangeAspect="1"/>
           </p:cNvPicPr>
           <p:nvPr/>
         </p:nvPicPr>
         <p:blipFill rotWithShape="1">
-          <a:blip r:embed="rId9" cstate="print">
+          <a:blip r:embed="rId14" cstate="print">
             <a:extLst>
               <a:ext uri="{28A0092B-C50C-407E-A947-70E740481C1C}">
                 <a14:useLocalDpi xmlns:a14="http://schemas.microsoft.com/office/drawing/2010/main" val="0"/>
@@ -9136,8 +9136,8 @@
         </p:blipFill>
         <p:spPr>
           <a:xfrm rot="0">
-            <a:off x="6005830" y="3208020"/>
-            <a:ext cx="2743835" cy="1821815"/>
+            <a:off x="5746750" y="2946400"/>
+            <a:ext cx="3400425" cy="1914525"/>
           </a:xfrm>
           <a:prstGeom prst="rect"/>
           <a:noFill/>
